--- a/claudedocs/pii-gateway-hr-deck.pptx
+++ b/claudedocs/pii-gateway-hr-deck.pptx
@@ -12,10 +12,6 @@
     <p:sldId id="260" r:id="rId11"/>
     <p:sldId id="261" r:id="rId12"/>
     <p:sldId id="262" r:id="rId13"/>
-    <p:sldId id="263" r:id="rId14"/>
-    <p:sldId id="264" r:id="rId15"/>
-    <p:sldId id="265" r:id="rId16"/>
-    <p:sldId id="266" r:id="rId17"/>
   </p:sldIdLst>
   <p:sldSz cx="12191695" cy="6858000" type="screen4x3"/>
   <p:notesSz cx="6858000" cy="9144000"/>
@@ -3254,7 +3250,7 @@
                 </a:solidFill>
                 <a:latin typeface="Calibri"/>
               </a:rPr>
-              <a:t>인사 데이터를 AI에 그대로 노출하지 않고 안전하게 활용하는 법</a:t>
+              <a:t>인사 데이터를 AI에 그대로 노출하지 않고 안전하게 활용하기</a:t>
             </a:r>
           </a:p>
         </p:txBody>
@@ -3329,585 +3325,6 @@
               <a:rPr sz="1800" b="1" i="0">
                 <a:solidFill>
                   <a:srgbClr val="111111"/>
-                </a:solidFill>
-                <a:latin typeface="Calibri"/>
-              </a:rPr>
-              <a:t>Confidential</a:t>
-            </a:r>
-          </a:p>
-        </p:txBody>
-      </p:sp>
-    </p:spTree>
-  </p:cSld>
-  <p:clrMapOvr>
-    <a:masterClrMapping/>
-  </p:clrMapOvr>
-</p:sld>
-</file>
-
-<file path=ppt/slides/slide10.xml><?xml version="1.0" encoding="utf-8"?>
-<p:sld xmlns:a="http://schemas.openxmlformats.org/drawingml/2006/main" xmlns:p="http://schemas.openxmlformats.org/presentationml/2006/main" xmlns:r="http://schemas.openxmlformats.org/officeDocument/2006/relationships">
-  <p:cSld>
-    <p:spTree>
-      <p:nvGrpSpPr>
-        <p:cNvPr id="1" name=""/>
-        <p:cNvGrpSpPr/>
-        <p:nvPr/>
-      </p:nvGrpSpPr>
-      <p:grpSpPr/>
-      <p:sp>
-        <p:nvSpPr>
-          <p:cNvPr id="2" name="Rectangle 1"/>
-          <p:cNvSpPr/>
-          <p:nvPr/>
-        </p:nvSpPr>
-        <p:spPr>
-          <a:xfrm>
-            <a:off x="0" y="0"/>
-            <a:ext cx="12191695" cy="914400"/>
-          </a:xfrm>
-          <a:prstGeom prst="rect">
-            <a:avLst/>
-          </a:prstGeom>
-          <a:solidFill>
-            <a:srgbClr val="111111"/>
-          </a:solidFill>
-          <a:ln>
-            <a:noFill/>
-          </a:ln>
-          <a:effectLst/>
-        </p:spPr>
-        <p:style>
-          <a:lnRef idx="1">
-            <a:schemeClr val="accent1"/>
-          </a:lnRef>
-          <a:fillRef idx="3">
-            <a:schemeClr val="accent1"/>
-          </a:fillRef>
-          <a:effectRef idx="2">
-            <a:schemeClr val="accent1"/>
-          </a:effectRef>
-          <a:fontRef idx="minor">
-            <a:schemeClr val="lt1"/>
-          </a:fontRef>
-        </p:style>
-        <p:txBody>
-          <a:bodyPr rtlCol="0" anchor="ctr"/>
-          <a:lstStyle/>
-          <a:p>
-            <a:pPr algn="ctr"/>
-          </a:p>
-        </p:txBody>
-      </p:sp>
-      <p:sp>
-        <p:nvSpPr>
-          <p:cNvPr id="3" name="TextBox 2"/>
-          <p:cNvSpPr txBox="1"/>
-          <p:nvPr/>
-        </p:nvSpPr>
-        <p:spPr>
-          <a:xfrm>
-            <a:off x="640080" y="118872"/>
-            <a:ext cx="8168335" cy="219456"/>
-          </a:xfrm>
-          <a:prstGeom prst="rect">
-            <a:avLst/>
-          </a:prstGeom>
-          <a:noFill/>
-        </p:spPr>
-        <p:txBody>
-          <a:bodyPr wrap="square" anchor="t" lIns="0" rIns="0" tIns="0" bIns="0">
-            <a:spAutoFit/>
-          </a:bodyPr>
-          <a:lstStyle/>
-          <a:p>
-            <a:pPr algn="l">
-              <a:lnSpc>
-                <a:spcPct val="105000"/>
-              </a:lnSpc>
-            </a:pPr>
-            <a:r>
-              <a:rPr sz="1100" b="1" i="0">
-                <a:solidFill>
-                  <a:srgbClr val="FFFFFF"/>
-                </a:solidFill>
-                <a:latin typeface="Calibri"/>
-              </a:rPr>
-              <a:t>유의사항</a:t>
-            </a:r>
-          </a:p>
-        </p:txBody>
-      </p:sp>
-      <p:sp>
-        <p:nvSpPr>
-          <p:cNvPr id="4" name="TextBox 3"/>
-          <p:cNvSpPr txBox="1"/>
-          <p:nvPr/>
-        </p:nvSpPr>
-        <p:spPr>
-          <a:xfrm>
-            <a:off x="640080" y="347472"/>
-            <a:ext cx="8168335" cy="493776"/>
-          </a:xfrm>
-          <a:prstGeom prst="rect">
-            <a:avLst/>
-          </a:prstGeom>
-          <a:noFill/>
-        </p:spPr>
-        <p:txBody>
-          <a:bodyPr wrap="square" anchor="t" lIns="0" rIns="0" tIns="0" bIns="0">
-            <a:spAutoFit/>
-          </a:bodyPr>
-          <a:lstStyle/>
-          <a:p>
-            <a:pPr algn="l">
-              <a:lnSpc>
-                <a:spcPct val="105000"/>
-              </a:lnSpc>
-            </a:pPr>
-            <a:r>
-              <a:rPr sz="3000" b="1" i="0">
-                <a:solidFill>
-                  <a:srgbClr val="FFFFFF"/>
-                </a:solidFill>
-                <a:latin typeface="Calibri"/>
-              </a:rPr>
-              <a:t>꼭 알아둘 점 (솔직한 한계)</a:t>
-            </a:r>
-          </a:p>
-        </p:txBody>
-      </p:sp>
-      <p:sp>
-        <p:nvSpPr>
-          <p:cNvPr id="5" name="TextBox 4"/>
-          <p:cNvSpPr txBox="1"/>
-          <p:nvPr/>
-        </p:nvSpPr>
-        <p:spPr>
-          <a:xfrm>
-            <a:off x="640080" y="1645920"/>
-            <a:ext cx="10911535" cy="4572000"/>
-          </a:xfrm>
-          <a:prstGeom prst="rect">
-            <a:avLst/>
-          </a:prstGeom>
-          <a:noFill/>
-        </p:spPr>
-        <p:txBody>
-          <a:bodyPr wrap="square" anchor="t" lIns="0" rIns="0" tIns="0" bIns="0">
-            <a:spAutoFit/>
-          </a:bodyPr>
-          <a:lstStyle/>
-          <a:p>
-            <a:pPr algn="l">
-              <a:lnSpc>
-                <a:spcPct val="125000"/>
-              </a:lnSpc>
-              <a:spcAft>
-                <a:spcPts val="1200"/>
-              </a:spcAft>
-            </a:pPr>
-            <a:r>
-              <a:rPr sz="2200" b="0" i="0">
-                <a:solidFill>
-                  <a:srgbClr val="1A1A1A"/>
-                </a:solidFill>
-                <a:latin typeface="Calibri"/>
-              </a:rPr>
-              <a:t>숫자 값 자체는 (이름과 분리된 채) 모델에 보입니다 — 이게 통계를 가능케 하지만, 개별 숫자조차 숨겨야 한다면 집계값만 전달하세요.</a:t>
-            </a:r>
-          </a:p>
-          <a:p>
-            <a:pPr algn="l">
-              <a:lnSpc>
-                <a:spcPct val="125000"/>
-              </a:lnSpc>
-              <a:spcAft>
-                <a:spcPts val="1200"/>
-              </a:spcAft>
-            </a:pPr>
-            <a:r>
-              <a:rPr sz="2200" b="0" i="0">
-                <a:solidFill>
-                  <a:srgbClr val="1A1A1A"/>
-                </a:solidFill>
-                <a:latin typeface="Calibri"/>
-              </a:rPr>
-              <a:t>복원 대응표(map)는 평문이라 원본만큼 민감합니다 — 원본 파일처럼 안전하게 보관해야 합니다.</a:t>
-            </a:r>
-          </a:p>
-          <a:p>
-            <a:pPr algn="l">
-              <a:lnSpc>
-                <a:spcPct val="125000"/>
-              </a:lnSpc>
-              <a:spcAft>
-                <a:spcPts val="1200"/>
-              </a:spcAft>
-            </a:pPr>
-            <a:r>
-              <a:rPr sz="2200" b="0" i="0">
-                <a:solidFill>
-                  <a:srgbClr val="1A1A1A"/>
-                </a:solidFill>
-                <a:latin typeface="Calibri"/>
-              </a:rPr>
-              <a:t>문장 속 '이름'은 직원 명부를 줘야 가려집니다. 명부에 없는 외부 인물 이름은 자동 탐지되지 않습니다.</a:t>
-            </a:r>
-          </a:p>
-          <a:p>
-            <a:pPr algn="l">
-              <a:lnSpc>
-                <a:spcPct val="125000"/>
-              </a:lnSpc>
-              <a:spcAft>
-                <a:spcPts val="1200"/>
-              </a:spcAft>
-            </a:pPr>
-            <a:r>
-              <a:rPr sz="2200" b="0" i="0">
-                <a:solidFill>
-                  <a:srgbClr val="1A1A1A"/>
-                </a:solidFill>
-                <a:latin typeface="Calibri"/>
-              </a:rPr>
-              <a:t>개인별 산출물과 디스크 암호화가 동시에 필요하면 더 강한 '키 게이트웨이' 모드를 씁니다(대신 숫자가 봉인되어 집계는 불가).</a:t>
-            </a:r>
-          </a:p>
-        </p:txBody>
-      </p:sp>
-      <p:sp>
-        <p:nvSpPr>
-          <p:cNvPr id="6" name="TextBox 5"/>
-          <p:cNvSpPr txBox="1"/>
-          <p:nvPr/>
-        </p:nvSpPr>
-        <p:spPr>
-          <a:xfrm>
-            <a:off x="640080" y="6400800"/>
-            <a:ext cx="9997135" cy="274320"/>
-          </a:xfrm>
-          <a:prstGeom prst="rect">
-            <a:avLst/>
-          </a:prstGeom>
-          <a:noFill/>
-        </p:spPr>
-        <p:txBody>
-          <a:bodyPr wrap="square" anchor="t" lIns="0" rIns="0" tIns="0" bIns="0">
-            <a:spAutoFit/>
-          </a:bodyPr>
-          <a:lstStyle/>
-          <a:p>
-            <a:pPr algn="l">
-              <a:lnSpc>
-                <a:spcPct val="105000"/>
-              </a:lnSpc>
-            </a:pPr>
-            <a:r>
-              <a:rPr sz="1000" b="0" i="0">
-                <a:solidFill>
-                  <a:srgbClr val="7F7F7F"/>
-                </a:solidFill>
-                <a:latin typeface="Calibri"/>
-              </a:rPr>
-              <a:t>대외비 · Confidential · 인사팀 대상 설명자료</a:t>
-            </a:r>
-          </a:p>
-        </p:txBody>
-      </p:sp>
-      <p:sp>
-        <p:nvSpPr>
-          <p:cNvPr id="7" name="TextBox 6"/>
-          <p:cNvSpPr txBox="1"/>
-          <p:nvPr/>
-        </p:nvSpPr>
-        <p:spPr>
-          <a:xfrm>
-            <a:off x="10454335" y="6291072"/>
-            <a:ext cx="1097280" cy="384048"/>
-          </a:xfrm>
-          <a:prstGeom prst="rect">
-            <a:avLst/>
-          </a:prstGeom>
-          <a:noFill/>
-        </p:spPr>
-        <p:txBody>
-          <a:bodyPr wrap="square" anchor="t" lIns="0" rIns="0" tIns="0" bIns="0">
-            <a:spAutoFit/>
-          </a:bodyPr>
-          <a:lstStyle/>
-          <a:p>
-            <a:pPr algn="r">
-              <a:lnSpc>
-                <a:spcPct val="105000"/>
-              </a:lnSpc>
-            </a:pPr>
-            <a:r>
-              <a:rPr sz="1600" b="0" i="0">
-                <a:solidFill>
-                  <a:srgbClr val="7F7F7F"/>
-                </a:solidFill>
-                <a:latin typeface="Calibri"/>
-              </a:rPr>
-              <a:t>10</a:t>
-            </a:r>
-          </a:p>
-        </p:txBody>
-      </p:sp>
-      <p:sp>
-        <p:nvSpPr>
-          <p:cNvPr id="8" name="TextBox 7"/>
-          <p:cNvSpPr txBox="1"/>
-          <p:nvPr/>
-        </p:nvSpPr>
-        <p:spPr>
-          <a:xfrm>
-            <a:off x="8808415" y="182880"/>
-            <a:ext cx="2743200" cy="548640"/>
-          </a:xfrm>
-          <a:prstGeom prst="rect">
-            <a:avLst/>
-          </a:prstGeom>
-          <a:noFill/>
-        </p:spPr>
-        <p:txBody>
-          <a:bodyPr wrap="square" anchor="t" lIns="0" rIns="0" tIns="0" bIns="0">
-            <a:spAutoFit/>
-          </a:bodyPr>
-          <a:lstStyle/>
-          <a:p>
-            <a:pPr algn="r">
-              <a:lnSpc>
-                <a:spcPct val="105000"/>
-              </a:lnSpc>
-            </a:pPr>
-            <a:r>
-              <a:rPr sz="1800" b="1" i="0">
-                <a:solidFill>
-                  <a:srgbClr val="FFFFFF"/>
-                </a:solidFill>
-                <a:latin typeface="Calibri"/>
-              </a:rPr>
-              <a:t>Confidential</a:t>
-            </a:r>
-          </a:p>
-        </p:txBody>
-      </p:sp>
-    </p:spTree>
-  </p:cSld>
-  <p:clrMapOvr>
-    <a:masterClrMapping/>
-  </p:clrMapOvr>
-</p:sld>
-</file>
-
-<file path=ppt/slides/slide11.xml><?xml version="1.0" encoding="utf-8"?>
-<p:sld xmlns:a="http://schemas.openxmlformats.org/drawingml/2006/main" xmlns:p="http://schemas.openxmlformats.org/presentationml/2006/main" xmlns:r="http://schemas.openxmlformats.org/officeDocument/2006/relationships">
-  <p:cSld>
-    <p:spTree>
-      <p:nvGrpSpPr>
-        <p:cNvPr id="1" name=""/>
-        <p:cNvGrpSpPr/>
-        <p:nvPr/>
-      </p:nvGrpSpPr>
-      <p:grpSpPr/>
-      <p:sp>
-        <p:nvSpPr>
-          <p:cNvPr id="2" name="Rectangle 1"/>
-          <p:cNvSpPr/>
-          <p:nvPr/>
-        </p:nvSpPr>
-        <p:spPr>
-          <a:xfrm>
-            <a:off x="0" y="0"/>
-            <a:ext cx="12191695" cy="6858000"/>
-          </a:xfrm>
-          <a:prstGeom prst="rect">
-            <a:avLst/>
-          </a:prstGeom>
-          <a:solidFill>
-            <a:srgbClr val="111111"/>
-          </a:solidFill>
-          <a:ln>
-            <a:noFill/>
-          </a:ln>
-          <a:effectLst/>
-        </p:spPr>
-        <p:style>
-          <a:lnRef idx="1">
-            <a:schemeClr val="accent1"/>
-          </a:lnRef>
-          <a:fillRef idx="3">
-            <a:schemeClr val="accent1"/>
-          </a:fillRef>
-          <a:effectRef idx="2">
-            <a:schemeClr val="accent1"/>
-          </a:effectRef>
-          <a:fontRef idx="minor">
-            <a:schemeClr val="lt1"/>
-          </a:fontRef>
-        </p:style>
-        <p:txBody>
-          <a:bodyPr rtlCol="0" anchor="ctr"/>
-          <a:lstStyle/>
-          <a:p>
-            <a:pPr algn="ctr"/>
-          </a:p>
-        </p:txBody>
-      </p:sp>
-      <p:sp>
-        <p:nvSpPr>
-          <p:cNvPr id="3" name="Rectangle 2"/>
-          <p:cNvSpPr/>
-          <p:nvPr/>
-        </p:nvSpPr>
-        <p:spPr>
-          <a:xfrm>
-            <a:off x="0" y="6492240"/>
-            <a:ext cx="12191695" cy="365760"/>
-          </a:xfrm>
-          <a:prstGeom prst="rect">
-            <a:avLst/>
-          </a:prstGeom>
-          <a:solidFill>
-            <a:srgbClr val="2F5597"/>
-          </a:solidFill>
-          <a:ln>
-            <a:noFill/>
-          </a:ln>
-          <a:effectLst/>
-        </p:spPr>
-        <p:style>
-          <a:lnRef idx="1">
-            <a:schemeClr val="accent1"/>
-          </a:lnRef>
-          <a:fillRef idx="3">
-            <a:schemeClr val="accent1"/>
-          </a:fillRef>
-          <a:effectRef idx="2">
-            <a:schemeClr val="accent1"/>
-          </a:effectRef>
-          <a:fontRef idx="minor">
-            <a:schemeClr val="lt1"/>
-          </a:fontRef>
-        </p:style>
-        <p:txBody>
-          <a:bodyPr rtlCol="0" anchor="ctr"/>
-          <a:lstStyle/>
-          <a:p>
-            <a:pPr algn="ctr"/>
-          </a:p>
-        </p:txBody>
-      </p:sp>
-      <p:sp>
-        <p:nvSpPr>
-          <p:cNvPr id="4" name="TextBox 3"/>
-          <p:cNvSpPr txBox="1"/>
-          <p:nvPr/>
-        </p:nvSpPr>
-        <p:spPr>
-          <a:xfrm>
-            <a:off x="640080" y="2377440"/>
-            <a:ext cx="10911535" cy="1463040"/>
-          </a:xfrm>
-          <a:prstGeom prst="rect">
-            <a:avLst/>
-          </a:prstGeom>
-          <a:noFill/>
-        </p:spPr>
-        <p:txBody>
-          <a:bodyPr wrap="square" anchor="t" lIns="0" rIns="0" tIns="0" bIns="0">
-            <a:spAutoFit/>
-          </a:bodyPr>
-          <a:lstStyle/>
-          <a:p>
-            <a:pPr algn="ctr">
-              <a:lnSpc>
-                <a:spcPct val="105000"/>
-              </a:lnSpc>
-            </a:pPr>
-            <a:r>
-              <a:rPr sz="5000" b="1" i="0">
-                <a:solidFill>
-                  <a:srgbClr val="FFFFFF"/>
-                </a:solidFill>
-                <a:latin typeface="Calibri"/>
-              </a:rPr>
-              <a:t>시작하기</a:t>
-            </a:r>
-          </a:p>
-        </p:txBody>
-      </p:sp>
-      <p:sp>
-        <p:nvSpPr>
-          <p:cNvPr id="5" name="TextBox 4"/>
-          <p:cNvSpPr txBox="1"/>
-          <p:nvPr/>
-        </p:nvSpPr>
-        <p:spPr>
-          <a:xfrm>
-            <a:off x="640080" y="3931920"/>
-            <a:ext cx="10911535" cy="1097280"/>
-          </a:xfrm>
-          <a:prstGeom prst="rect">
-            <a:avLst/>
-          </a:prstGeom>
-          <a:noFill/>
-        </p:spPr>
-        <p:txBody>
-          <a:bodyPr wrap="square" anchor="t" lIns="0" rIns="0" tIns="0" bIns="0">
-            <a:spAutoFit/>
-          </a:bodyPr>
-          <a:lstStyle/>
-          <a:p>
-            <a:pPr algn="ctr">
-              <a:lnSpc>
-                <a:spcPct val="120000"/>
-              </a:lnSpc>
-            </a:pPr>
-            <a:r>
-              <a:rPr sz="2400" b="0" i="0">
-                <a:solidFill>
-                  <a:srgbClr val="FFFFFF"/>
-                </a:solidFill>
-                <a:latin typeface="Calibri"/>
-              </a:rPr>
-              <a:t>담당자 키·도입 방법은 데이터보호 담당 부서로 문의해 주세요 · 본 자료의 데이터는 모두 합성(가상) 예시입니다</a:t>
-            </a:r>
-          </a:p>
-        </p:txBody>
-      </p:sp>
-      <p:sp>
-        <p:nvSpPr>
-          <p:cNvPr id="6" name="TextBox 5"/>
-          <p:cNvSpPr txBox="1"/>
-          <p:nvPr/>
-        </p:nvSpPr>
-        <p:spPr>
-          <a:xfrm>
-            <a:off x="8808415" y="182880"/>
-            <a:ext cx="2743200" cy="548640"/>
-          </a:xfrm>
-          <a:prstGeom prst="rect">
-            <a:avLst/>
-          </a:prstGeom>
-          <a:noFill/>
-        </p:spPr>
-        <p:txBody>
-          <a:bodyPr wrap="square" anchor="t" lIns="0" rIns="0" tIns="0" bIns="0">
-            <a:spAutoFit/>
-          </a:bodyPr>
-          <a:lstStyle/>
-          <a:p>
-            <a:pPr algn="r">
-              <a:lnSpc>
-                <a:spcPct val="105000"/>
-              </a:lnSpc>
-            </a:pPr>
-            <a:r>
-              <a:rPr sz="1800" b="1" i="0">
-                <a:solidFill>
-                  <a:srgbClr val="FFFFFF"/>
                 </a:solidFill>
                 <a:latin typeface="Calibri"/>
               </a:rPr>
@@ -4012,7 +3429,7 @@
                 </a:solidFill>
                 <a:latin typeface="Calibri"/>
               </a:rPr>
-              <a:t>배경</a:t>
+              <a:t>왜 · 무엇</a:t>
             </a:r>
           </a:p>
         </p:txBody>
@@ -4051,7 +3468,7 @@
                 </a:solidFill>
                 <a:latin typeface="Calibri"/>
               </a:rPr>
-              <a:t>인사 데이터엔 가장 민감한 개인정보가 있습니다</a:t>
+              <a:t>신원은 가리고, 숫자는 살린다</a:t>
             </a:r>
           </a:p>
         </p:txBody>
@@ -4064,8 +3481,8 @@
         </p:nvSpPr>
         <p:spPr>
           <a:xfrm>
-            <a:off x="640080" y="1645920"/>
-            <a:ext cx="10911535" cy="4572000"/>
+            <a:off x="640080" y="1554480"/>
+            <a:ext cx="10911535" cy="640080"/>
           </a:xfrm>
           <a:prstGeom prst="rect">
             <a:avLst/>
@@ -4080,48 +3497,87 @@
           <a:p>
             <a:pPr algn="l">
               <a:lnSpc>
-                <a:spcPct val="125000"/>
+                <a:spcPct val="110000"/>
+              </a:lnSpc>
+            </a:pPr>
+            <a:r>
+              <a:rPr sz="2400" b="0" i="1">
+                <a:solidFill>
+                  <a:srgbClr val="595959"/>
+                </a:solidFill>
+                <a:latin typeface="Calibri"/>
+              </a:rPr>
+              <a:t>AI로 인사 데이터를 다루면 민감정보가 노출됩니다 — 이를 막는 안전 통로입니다.</a:t>
+            </a:r>
+          </a:p>
+        </p:txBody>
+      </p:sp>
+      <p:sp>
+        <p:nvSpPr>
+          <p:cNvPr id="6" name="TextBox 5"/>
+          <p:cNvSpPr txBox="1"/>
+          <p:nvPr/>
+        </p:nvSpPr>
+        <p:spPr>
+          <a:xfrm>
+            <a:off x="640080" y="2286000"/>
+            <a:ext cx="10911535" cy="3931920"/>
+          </a:xfrm>
+          <a:prstGeom prst="rect">
+            <a:avLst/>
+          </a:prstGeom>
+          <a:noFill/>
+        </p:spPr>
+        <p:txBody>
+          <a:bodyPr wrap="square" anchor="t" lIns="0" rIns="0" tIns="0" bIns="0">
+            <a:spAutoFit/>
+          </a:bodyPr>
+          <a:lstStyle/>
+          <a:p>
+            <a:pPr algn="l">
+              <a:lnSpc>
+                <a:spcPct val="110000"/>
               </a:lnSpc>
               <a:spcAft>
-                <a:spcPts val="1200"/>
+                <a:spcPts val="1000"/>
               </a:spcAft>
             </a:pPr>
             <a:r>
-              <a:rPr sz="2200" b="0" i="0">
+              <a:rPr sz="2200" b="1" i="0">
                 <a:solidFill>
                   <a:srgbClr val="1A1A1A"/>
                 </a:solidFill>
                 <a:latin typeface="Calibri"/>
               </a:rPr>
-              <a:t>연봉·주민등록번호·계좌·전화번호처럼 한 번 새면 되돌릴 수 없는 정보가 인사 데이터의 핵심입니다.</a:t>
+              <a:t>●  이름·주민번호·계좌 등 직접 식별자 → 토큰으로 치환 (누구인지 가림)</a:t>
             </a:r>
           </a:p>
           <a:p>
             <a:pPr algn="l">
               <a:lnSpc>
-                <a:spcPct val="125000"/>
+                <a:spcPct val="110000"/>
               </a:lnSpc>
               <a:spcAft>
-                <a:spcPts val="1200"/>
+                <a:spcPts val="1000"/>
               </a:spcAft>
             </a:pPr>
             <a:r>
-              <a:rPr sz="2200" b="0" i="0">
+              <a:rPr sz="2200" b="1" i="0">
                 <a:solidFill>
                   <a:srgbClr val="1A1A1A"/>
                 </a:solidFill>
                 <a:latin typeface="Calibri"/>
               </a:rPr>
-              <a:t>그런데 이 데이터로 AI에게 안내문 작성·근태 통지·통계 리포트를 맡기려면, 보통 원본을 그대로 모델에 넣게 됩니다 — 그 순간 민감정보가 노출되고, 유출 시 법적·평판 리스크로 이어집니다.</a:t>
+              <a:t>●  연봉·근태 같은 숫자 → 원본 유지 (평균·집계가 그대로 가능)</a:t>
             </a:r>
           </a:p>
           <a:p>
             <a:pPr algn="l">
               <a:lnSpc>
-                <a:spcPct val="125000"/>
+                <a:spcPct val="110000"/>
               </a:lnSpc>
               <a:spcAft>
-                <a:spcPts val="1200"/>
+                <a:spcPts val="1000"/>
               </a:spcAft>
             </a:pPr>
             <a:r>
@@ -4131,14 +3587,33 @@
                 </a:solidFill>
                 <a:latin typeface="Calibri"/>
               </a:rPr>
-              <a:t>이 게이트웨이는 'AI에게 일은 시키되, 누구의 정보인지는 보여주지 않는' 안전한 통로를 만듭니다.</a:t>
-            </a:r>
-          </a:p>
-        </p:txBody>
-      </p:sp>
-      <p:sp>
-        <p:nvSpPr>
-          <p:cNvPr id="6" name="TextBox 5"/>
+              <a:t>●  AI는 토큰 파일만 보고 작업 — 실제 식별자는 컨텍스트에 안 들어감</a:t>
+            </a:r>
+          </a:p>
+          <a:p>
+            <a:pPr algn="l">
+              <a:lnSpc>
+                <a:spcPct val="110000"/>
+              </a:lnSpc>
+              <a:spcAft>
+                <a:spcPts val="1000"/>
+              </a:spcAft>
+            </a:pPr>
+            <a:r>
+              <a:rPr sz="2200" b="0" i="0">
+                <a:solidFill>
+                  <a:srgbClr val="1A1A1A"/>
+                </a:solidFill>
+                <a:latin typeface="Calibri"/>
+              </a:rPr>
+              <a:t>●  최종 결과물만 실제 값으로 되돌려(재식별) 담당자에게 전달</a:t>
+            </a:r>
+          </a:p>
+        </p:txBody>
+      </p:sp>
+      <p:sp>
+        <p:nvSpPr>
+          <p:cNvPr id="7" name="TextBox 6"/>
           <p:cNvSpPr txBox="1"/>
           <p:nvPr/>
         </p:nvSpPr>
@@ -4177,7 +3652,7 @@
       </p:sp>
       <p:sp>
         <p:nvSpPr>
-          <p:cNvPr id="7" name="TextBox 6"/>
+          <p:cNvPr id="8" name="TextBox 7"/>
           <p:cNvSpPr txBox="1"/>
           <p:nvPr/>
         </p:nvSpPr>
@@ -4216,7 +3691,7 @@
       </p:sp>
       <p:sp>
         <p:nvSpPr>
-          <p:cNvPr id="8" name="TextBox 7"/>
+          <p:cNvPr id="9" name="TextBox 8"/>
           <p:cNvSpPr txBox="1"/>
           <p:nvPr/>
         </p:nvSpPr>
@@ -4349,7 +3824,7 @@
                 </a:solidFill>
                 <a:latin typeface="Calibri"/>
               </a:rPr>
-              <a:t>핵심 아이디어</a:t>
+              <a:t>동작 원리</a:t>
             </a:r>
           </a:p>
         </p:txBody>
@@ -4388,171 +3863,309 @@
                 </a:solidFill>
                 <a:latin typeface="Calibri"/>
               </a:rPr>
-              <a:t>신원은 번호표로, 숫자는 그대로</a:t>
-            </a:r>
-          </a:p>
-        </p:txBody>
-      </p:sp>
-      <p:sp>
-        <p:nvSpPr>
-          <p:cNvPr id="5" name="TextBox 4"/>
-          <p:cNvSpPr txBox="1"/>
-          <p:nvPr/>
-        </p:nvSpPr>
-        <p:spPr>
-          <a:xfrm>
-            <a:off x="640080" y="1554480"/>
-            <a:ext cx="10911535" cy="640080"/>
-          </a:xfrm>
-          <a:prstGeom prst="rect">
-            <a:avLst/>
-          </a:prstGeom>
-          <a:noFill/>
-        </p:spPr>
-        <p:txBody>
-          <a:bodyPr wrap="square" anchor="t" lIns="0" rIns="0" tIns="0" bIns="0">
-            <a:spAutoFit/>
-          </a:bodyPr>
-          <a:lstStyle/>
-          <a:p>
-            <a:pPr algn="l">
-              <a:lnSpc>
-                <a:spcPct val="110000"/>
-              </a:lnSpc>
-            </a:pPr>
-            <a:r>
-              <a:rPr sz="2400" b="0" i="1">
-                <a:solidFill>
-                  <a:srgbClr val="595959"/>
+              <a:t>세 단계로 끝납니다</a:t>
+            </a:r>
+          </a:p>
+        </p:txBody>
+      </p:sp>
+      <p:sp>
+        <p:nvSpPr>
+          <p:cNvPr id="5" name="Rounded Rectangle 4"/>
+          <p:cNvSpPr/>
+          <p:nvPr/>
+        </p:nvSpPr>
+        <p:spPr>
+          <a:xfrm>
+            <a:off x="640080" y="3246120"/>
+            <a:ext cx="3332378" cy="1554480"/>
+          </a:xfrm>
+          <a:prstGeom prst="roundRect">
+            <a:avLst/>
+          </a:prstGeom>
+          <a:solidFill>
+            <a:srgbClr val="111111"/>
+          </a:solidFill>
+          <a:ln>
+            <a:noFill/>
+          </a:ln>
+          <a:effectLst/>
+        </p:spPr>
+        <p:style>
+          <a:lnRef idx="1">
+            <a:schemeClr val="accent1"/>
+          </a:lnRef>
+          <a:fillRef idx="3">
+            <a:schemeClr val="accent1"/>
+          </a:fillRef>
+          <a:effectRef idx="2">
+            <a:schemeClr val="accent1"/>
+          </a:effectRef>
+          <a:fontRef idx="minor">
+            <a:schemeClr val="lt1"/>
+          </a:fontRef>
+        </p:style>
+        <p:txBody>
+          <a:bodyPr rtlCol="0" anchor="ctr" wrap="square" lIns="73152" rIns="73152" tIns="27432" bIns="27432"/>
+          <a:lstStyle/>
+          <a:p>
+            <a:pPr algn="ctr"/>
+            <a:r>
+              <a:rPr b="1" sz="1500">
+                <a:solidFill>
+                  <a:srgbClr val="FFFFFF"/>
                 </a:solidFill>
                 <a:latin typeface="Calibri"/>
               </a:rPr>
-              <a:t>직접 식별자만 '대리 번호표(토큰)'로 바꾸고, 분석에 필요한 숫자는 원본을 유지합니다.</a:t>
-            </a:r>
-          </a:p>
-        </p:txBody>
-      </p:sp>
-      <p:sp>
-        <p:nvSpPr>
-          <p:cNvPr id="6" name="TextBox 5"/>
-          <p:cNvSpPr txBox="1"/>
-          <p:nvPr/>
-        </p:nvSpPr>
-        <p:spPr>
-          <a:xfrm>
-            <a:off x="640080" y="2286000"/>
-            <a:ext cx="10911535" cy="3931920"/>
-          </a:xfrm>
-          <a:prstGeom prst="rect">
-            <a:avLst/>
-          </a:prstGeom>
-          <a:noFill/>
-        </p:spPr>
-        <p:txBody>
-          <a:bodyPr wrap="square" anchor="t" lIns="0" rIns="0" tIns="0" bIns="0">
-            <a:spAutoFit/>
-          </a:bodyPr>
-          <a:lstStyle/>
-          <a:p>
-            <a:pPr algn="l">
-              <a:lnSpc>
-                <a:spcPct val="110000"/>
-              </a:lnSpc>
-              <a:spcAft>
-                <a:spcPts val="1000"/>
-              </a:spcAft>
+              <a:t>1. 비식별화</a:t>
+            </a:r>
+          </a:p>
+          <a:p>
+            <a:pPr algn="ctr">
+              <a:spcBef>
+                <a:spcPts val="200"/>
+              </a:spcBef>
             </a:pPr>
             <a:r>
-              <a:rPr sz="2200" b="1" i="0">
-                <a:solidFill>
-                  <a:srgbClr val="1A1A1A"/>
+              <a:rPr sz="1100">
+                <a:solidFill>
+                  <a:srgbClr val="FFFFFF"/>
                 </a:solidFill>
                 <a:latin typeface="Calibri"/>
               </a:rPr>
-              <a:t>●  이름·주민번호·계좌 같은 직접 식별자 → 토큰으로 치환 (누구인지 가림)</a:t>
-            </a:r>
-          </a:p>
-          <a:p>
-            <a:pPr algn="l">
-              <a:lnSpc>
-                <a:spcPct val="110000"/>
-              </a:lnSpc>
-              <a:spcAft>
-                <a:spcPts val="1000"/>
-              </a:spcAft>
-            </a:pPr>
-            <a:r>
-              <a:rPr sz="2200" b="1" i="0">
-                <a:solidFill>
-                  <a:srgbClr val="1A1A1A"/>
+              <a:t>식별자→토큰, 숫자는 원본 유지</a:t>
+            </a:r>
+          </a:p>
+        </p:txBody>
+      </p:sp>
+      <p:sp>
+        <p:nvSpPr>
+          <p:cNvPr id="6" name="Right Arrow 5"/>
+          <p:cNvSpPr/>
+          <p:nvPr/>
+        </p:nvSpPr>
+        <p:spPr>
+          <a:xfrm>
+            <a:off x="4018178" y="3858768"/>
+            <a:ext cx="365760" cy="329184"/>
+          </a:xfrm>
+          <a:prstGeom prst="rightArrow">
+            <a:avLst/>
+          </a:prstGeom>
+          <a:solidFill>
+            <a:srgbClr val="2F5597"/>
+          </a:solidFill>
+          <a:ln>
+            <a:noFill/>
+          </a:ln>
+          <a:effectLst/>
+        </p:spPr>
+        <p:style>
+          <a:lnRef idx="1">
+            <a:schemeClr val="accent1"/>
+          </a:lnRef>
+          <a:fillRef idx="3">
+            <a:schemeClr val="accent1"/>
+          </a:fillRef>
+          <a:effectRef idx="2">
+            <a:schemeClr val="accent1"/>
+          </a:effectRef>
+          <a:fontRef idx="minor">
+            <a:schemeClr val="lt1"/>
+          </a:fontRef>
+        </p:style>
+        <p:txBody>
+          <a:bodyPr rtlCol="0" anchor="ctr"/>
+          <a:lstStyle/>
+          <a:p>
+            <a:pPr algn="ctr"/>
+          </a:p>
+        </p:txBody>
+      </p:sp>
+      <p:sp>
+        <p:nvSpPr>
+          <p:cNvPr id="7" name="Rounded Rectangle 6"/>
+          <p:cNvSpPr/>
+          <p:nvPr/>
+        </p:nvSpPr>
+        <p:spPr>
+          <a:xfrm>
+            <a:off x="4429658" y="3246120"/>
+            <a:ext cx="3332378" cy="1554480"/>
+          </a:xfrm>
+          <a:prstGeom prst="roundRect">
+            <a:avLst/>
+          </a:prstGeom>
+          <a:solidFill>
+            <a:srgbClr val="595959"/>
+          </a:solidFill>
+          <a:ln>
+            <a:noFill/>
+          </a:ln>
+          <a:effectLst/>
+        </p:spPr>
+        <p:style>
+          <a:lnRef idx="1">
+            <a:schemeClr val="accent1"/>
+          </a:lnRef>
+          <a:fillRef idx="3">
+            <a:schemeClr val="accent1"/>
+          </a:fillRef>
+          <a:effectRef idx="2">
+            <a:schemeClr val="accent1"/>
+          </a:effectRef>
+          <a:fontRef idx="minor">
+            <a:schemeClr val="lt1"/>
+          </a:fontRef>
+        </p:style>
+        <p:txBody>
+          <a:bodyPr rtlCol="0" anchor="ctr" wrap="square" lIns="73152" rIns="73152" tIns="27432" bIns="27432"/>
+          <a:lstStyle/>
+          <a:p>
+            <a:pPr algn="ctr"/>
+            <a:r>
+              <a:rPr b="1" sz="1500">
+                <a:solidFill>
+                  <a:srgbClr val="FFFFFF"/>
                 </a:solidFill>
                 <a:latin typeface="Calibri"/>
               </a:rPr>
-              <a:t>●  연봉·근태 같은 숫자 → 원본 그대로 유지 (평균·집계가 가능)</a:t>
-            </a:r>
-          </a:p>
-          <a:p>
-            <a:pPr algn="l">
-              <a:lnSpc>
-                <a:spcPct val="110000"/>
-              </a:lnSpc>
-              <a:spcAft>
-                <a:spcPts val="1000"/>
-              </a:spcAft>
+              <a:t>2. 작업·집계</a:t>
+            </a:r>
+          </a:p>
+          <a:p>
+            <a:pPr algn="ctr">
+              <a:spcBef>
+                <a:spcPts val="200"/>
+              </a:spcBef>
             </a:pPr>
             <a:r>
-              <a:rPr sz="2200" b="0" i="0">
-                <a:solidFill>
-                  <a:srgbClr val="1A1A1A"/>
+              <a:rPr sz="1100">
+                <a:solidFill>
+                  <a:srgbClr val="FFFFFF"/>
                 </a:solidFill>
                 <a:latin typeface="Calibri"/>
               </a:rPr>
-              <a:t>●  AI는 토큰 파일만 보고 작업 — 실제 이름·주민번호는 컨텍스트에 들어가지 않음</a:t>
-            </a:r>
-          </a:p>
-          <a:p>
-            <a:pPr algn="l">
-              <a:lnSpc>
-                <a:spcPct val="110000"/>
-              </a:lnSpc>
-              <a:spcAft>
-                <a:spcPts val="1000"/>
-              </a:spcAft>
-            </a:pPr>
-            <a:r>
-              <a:rPr sz="2200" b="0" i="0">
-                <a:solidFill>
-                  <a:srgbClr val="1A1A1A"/>
+              <a:t>토큰 파일로 안내문·통계 작성</a:t>
+            </a:r>
+          </a:p>
+        </p:txBody>
+      </p:sp>
+      <p:sp>
+        <p:nvSpPr>
+          <p:cNvPr id="8" name="Right Arrow 7"/>
+          <p:cNvSpPr/>
+          <p:nvPr/>
+        </p:nvSpPr>
+        <p:spPr>
+          <a:xfrm>
+            <a:off x="7807756" y="3858768"/>
+            <a:ext cx="365760" cy="329184"/>
+          </a:xfrm>
+          <a:prstGeom prst="rightArrow">
+            <a:avLst/>
+          </a:prstGeom>
+          <a:solidFill>
+            <a:srgbClr val="2F5597"/>
+          </a:solidFill>
+          <a:ln>
+            <a:noFill/>
+          </a:ln>
+          <a:effectLst/>
+        </p:spPr>
+        <p:style>
+          <a:lnRef idx="1">
+            <a:schemeClr val="accent1"/>
+          </a:lnRef>
+          <a:fillRef idx="3">
+            <a:schemeClr val="accent1"/>
+          </a:fillRef>
+          <a:effectRef idx="2">
+            <a:schemeClr val="accent1"/>
+          </a:effectRef>
+          <a:fontRef idx="minor">
+            <a:schemeClr val="lt1"/>
+          </a:fontRef>
+        </p:style>
+        <p:txBody>
+          <a:bodyPr rtlCol="0" anchor="ctr"/>
+          <a:lstStyle/>
+          <a:p>
+            <a:pPr algn="ctr"/>
+          </a:p>
+        </p:txBody>
+      </p:sp>
+      <p:sp>
+        <p:nvSpPr>
+          <p:cNvPr id="9" name="Rounded Rectangle 8"/>
+          <p:cNvSpPr/>
+          <p:nvPr/>
+        </p:nvSpPr>
+        <p:spPr>
+          <a:xfrm>
+            <a:off x="8219236" y="3246120"/>
+            <a:ext cx="3332378" cy="1554480"/>
+          </a:xfrm>
+          <a:prstGeom prst="roundRect">
+            <a:avLst/>
+          </a:prstGeom>
+          <a:solidFill>
+            <a:srgbClr val="111111"/>
+          </a:solidFill>
+          <a:ln>
+            <a:noFill/>
+          </a:ln>
+          <a:effectLst/>
+        </p:spPr>
+        <p:style>
+          <a:lnRef idx="1">
+            <a:schemeClr val="accent1"/>
+          </a:lnRef>
+          <a:fillRef idx="3">
+            <a:schemeClr val="accent1"/>
+          </a:fillRef>
+          <a:effectRef idx="2">
+            <a:schemeClr val="accent1"/>
+          </a:effectRef>
+          <a:fontRef idx="minor">
+            <a:schemeClr val="lt1"/>
+          </a:fontRef>
+        </p:style>
+        <p:txBody>
+          <a:bodyPr rtlCol="0" anchor="ctr" wrap="square" lIns="73152" rIns="73152" tIns="27432" bIns="27432"/>
+          <a:lstStyle/>
+          <a:p>
+            <a:pPr algn="ctr"/>
+            <a:r>
+              <a:rPr b="1" sz="1500">
+                <a:solidFill>
+                  <a:srgbClr val="FFFFFF"/>
                 </a:solidFill>
                 <a:latin typeface="Calibri"/>
               </a:rPr>
-              <a:t>●  작업이 끝나면 최종 결과물만 실제 값으로 되돌려(재식별) 담당자에게 전달</a:t>
-            </a:r>
-          </a:p>
-          <a:p>
-            <a:pPr algn="l">
-              <a:lnSpc>
-                <a:spcPct val="110000"/>
-              </a:lnSpc>
-              <a:spcAft>
-                <a:spcPts val="1000"/>
-              </a:spcAft>
+              <a:t>3. 재식별</a:t>
+            </a:r>
+          </a:p>
+          <a:p>
+            <a:pPr algn="ctr">
+              <a:spcBef>
+                <a:spcPts val="200"/>
+              </a:spcBef>
             </a:pPr>
             <a:r>
-              <a:rPr sz="2200" b="0" i="0">
-                <a:solidFill>
-                  <a:srgbClr val="1A1A1A"/>
+              <a:rPr sz="1100">
+                <a:solidFill>
+                  <a:srgbClr val="FFFFFF"/>
                 </a:solidFill>
                 <a:latin typeface="Calibri"/>
               </a:rPr>
-              <a:t>●  원본↔토큰 대응표만 안전하게 보관하면 됨 (키 없이도 동작)</a:t>
-            </a:r>
-          </a:p>
-        </p:txBody>
-      </p:sp>
-      <p:sp>
-        <p:nvSpPr>
-          <p:cNvPr id="7" name="TextBox 6"/>
+              <a:t>최종본만 실제 값 복원</a:t>
+            </a:r>
+          </a:p>
+        </p:txBody>
+      </p:sp>
+      <p:sp>
+        <p:nvSpPr>
+          <p:cNvPr id="10" name="TextBox 9"/>
           <p:cNvSpPr txBox="1"/>
           <p:nvPr/>
         </p:nvSpPr>
@@ -4591,7 +4204,7 @@
       </p:sp>
       <p:sp>
         <p:nvSpPr>
-          <p:cNvPr id="8" name="TextBox 7"/>
+          <p:cNvPr id="11" name="TextBox 10"/>
           <p:cNvSpPr txBox="1"/>
           <p:nvPr/>
         </p:nvSpPr>
@@ -4630,7 +4243,7 @@
       </p:sp>
       <p:sp>
         <p:nvSpPr>
-          <p:cNvPr id="9" name="TextBox 8"/>
+          <p:cNvPr id="12" name="TextBox 11"/>
           <p:cNvSpPr txBox="1"/>
           <p:nvPr/>
         </p:nvSpPr>
@@ -4763,7 +4376,7 @@
                 </a:solidFill>
                 <a:latin typeface="Calibri"/>
               </a:rPr>
-              <a:t>동작 원리</a:t>
+              <a:t>사용 예시 · 연봉 안내 메일</a:t>
             </a:r>
           </a:p>
         </p:txBody>
@@ -4802,23 +4415,67 @@
                 </a:solidFill>
                 <a:latin typeface="Calibri"/>
               </a:rPr>
-              <a:t>세 단계로 끝납니다</a:t>
-            </a:r>
-          </a:p>
-        </p:txBody>
-      </p:sp>
-      <p:sp>
-        <p:nvSpPr>
-          <p:cNvPr id="5" name="Rounded Rectangle 4"/>
+              <a:t>작업본은 토큰, 최종본만 실명</a:t>
+            </a:r>
+          </a:p>
+        </p:txBody>
+      </p:sp>
+      <p:sp>
+        <p:nvSpPr>
+          <p:cNvPr id="5" name="Rectangle 4"/>
           <p:cNvSpPr/>
           <p:nvPr/>
         </p:nvSpPr>
         <p:spPr>
           <a:xfrm>
-            <a:off x="640080" y="3246120"/>
-            <a:ext cx="3332378" cy="1554480"/>
-          </a:xfrm>
-          <a:prstGeom prst="roundRect">
+            <a:off x="640080" y="1737360"/>
+            <a:ext cx="5227167" cy="4480560"/>
+          </a:xfrm>
+          <a:prstGeom prst="rect">
+            <a:avLst/>
+          </a:prstGeom>
+          <a:solidFill>
+            <a:srgbClr val="F2F2F2"/>
+          </a:solidFill>
+          <a:ln>
+            <a:noFill/>
+          </a:ln>
+          <a:effectLst/>
+        </p:spPr>
+        <p:style>
+          <a:lnRef idx="1">
+            <a:schemeClr val="accent1"/>
+          </a:lnRef>
+          <a:fillRef idx="3">
+            <a:schemeClr val="accent1"/>
+          </a:fillRef>
+          <a:effectRef idx="2">
+            <a:schemeClr val="accent1"/>
+          </a:effectRef>
+          <a:fontRef idx="minor">
+            <a:schemeClr val="lt1"/>
+          </a:fontRef>
+        </p:style>
+        <p:txBody>
+          <a:bodyPr rtlCol="0" anchor="ctr"/>
+          <a:lstStyle/>
+          <a:p>
+            <a:pPr algn="ctr"/>
+          </a:p>
+        </p:txBody>
+      </p:sp>
+      <p:sp>
+        <p:nvSpPr>
+          <p:cNvPr id="6" name="Rectangle 5"/>
+          <p:cNvSpPr/>
+          <p:nvPr/>
+        </p:nvSpPr>
+        <p:spPr>
+          <a:xfrm>
+            <a:off x="640080" y="1737360"/>
+            <a:ext cx="5227167" cy="640080"/>
+          </a:xfrm>
+          <a:prstGeom prst="rect">
             <a:avLst/>
           </a:prstGeom>
           <a:solidFill>
@@ -4844,50 +4501,188 @@
           </a:fontRef>
         </p:style>
         <p:txBody>
-          <a:bodyPr rtlCol="0" anchor="ctr" wrap="square" lIns="73152" rIns="73152" tIns="27432" bIns="27432"/>
+          <a:bodyPr rtlCol="0" anchor="ctr"/>
           <a:lstStyle/>
           <a:p>
             <a:pPr algn="ctr"/>
-            <a:r>
-              <a:rPr b="1" sz="1500">
+          </a:p>
+        </p:txBody>
+      </p:sp>
+      <p:sp>
+        <p:nvSpPr>
+          <p:cNvPr id="7" name="TextBox 6"/>
+          <p:cNvSpPr txBox="1"/>
+          <p:nvPr/>
+        </p:nvSpPr>
+        <p:spPr>
+          <a:xfrm>
+            <a:off x="914400" y="1737360"/>
+            <a:ext cx="4678527" cy="640080"/>
+          </a:xfrm>
+          <a:prstGeom prst="rect">
+            <a:avLst/>
+          </a:prstGeom>
+          <a:noFill/>
+        </p:spPr>
+        <p:txBody>
+          <a:bodyPr wrap="square" anchor="ctr" lIns="0" rIns="0" tIns="0" bIns="0">
+            <a:spAutoFit/>
+          </a:bodyPr>
+          <a:lstStyle/>
+          <a:p>
+            <a:pPr algn="l">
+              <a:lnSpc>
+                <a:spcPct val="105000"/>
+              </a:lnSpc>
+            </a:pPr>
+            <a:r>
+              <a:rPr sz="2600" b="1" i="0">
                 <a:solidFill>
                   <a:srgbClr val="FFFFFF"/>
                 </a:solidFill>
                 <a:latin typeface="Calibri"/>
               </a:rPr>
-              <a:t>1. 비식별화</a:t>
-            </a:r>
-          </a:p>
-          <a:p>
-            <a:pPr algn="ctr">
-              <a:spcBef>
-                <a:spcPts val="200"/>
-              </a:spcBef>
+              <a:t>AI가 보는 작업본 (토큰)</a:t>
+            </a:r>
+          </a:p>
+        </p:txBody>
+      </p:sp>
+      <p:sp>
+        <p:nvSpPr>
+          <p:cNvPr id="8" name="TextBox 7"/>
+          <p:cNvSpPr txBox="1"/>
+          <p:nvPr/>
+        </p:nvSpPr>
+        <p:spPr>
+          <a:xfrm>
+            <a:off x="914400" y="2606040"/>
+            <a:ext cx="4678527" cy="3383280"/>
+          </a:xfrm>
+          <a:prstGeom prst="rect">
+            <a:avLst/>
+          </a:prstGeom>
+          <a:noFill/>
+        </p:spPr>
+        <p:txBody>
+          <a:bodyPr wrap="square" anchor="t" lIns="0" rIns="0" tIns="0" bIns="0">
+            <a:spAutoFit/>
+          </a:bodyPr>
+          <a:lstStyle/>
+          <a:p>
+            <a:pPr algn="l">
+              <a:lnSpc>
+                <a:spcPct val="110000"/>
+              </a:lnSpc>
+              <a:spcAft>
+                <a:spcPts val="1000"/>
+              </a:spcAft>
             </a:pPr>
             <a:r>
-              <a:rPr sz="1100">
-                <a:solidFill>
-                  <a:srgbClr val="FFFFFF"/>
+              <a:rPr sz="2200" b="0" i="0">
+                <a:solidFill>
+                  <a:srgbClr val="1A1A1A"/>
                 </a:solidFill>
                 <a:latin typeface="Calibri"/>
               </a:rPr>
-              <a:t>식별자→토큰, 숫자는 원본 유지</a:t>
-            </a:r>
-          </a:p>
-        </p:txBody>
-      </p:sp>
-      <p:sp>
-        <p:nvSpPr>
-          <p:cNvPr id="6" name="Right Arrow 5"/>
+              <a:t>●  받는사람: [[NAME:17f2…]]</a:t>
+            </a:r>
+          </a:p>
+          <a:p>
+            <a:pPr algn="l">
+              <a:lnSpc>
+                <a:spcPct val="110000"/>
+              </a:lnSpc>
+              <a:spcAft>
+                <a:spcPts val="1000"/>
+              </a:spcAft>
+            </a:pPr>
+            <a:r>
+              <a:rPr sz="2200" b="0" i="0">
+                <a:solidFill>
+                  <a:srgbClr val="1A1A1A"/>
+                </a:solidFill>
+                <a:latin typeface="Calibri"/>
+              </a:rPr>
+              <a:t>●  2026년 확정 연봉은 3,194만원</a:t>
+            </a:r>
+          </a:p>
+          <a:p>
+            <a:pPr algn="l">
+              <a:lnSpc>
+                <a:spcPct val="110000"/>
+              </a:lnSpc>
+              <a:spcAft>
+                <a:spcPts val="1000"/>
+              </a:spcAft>
+            </a:pPr>
+            <a:r>
+              <a:rPr sz="2200" b="0" i="0">
+                <a:solidFill>
+                  <a:srgbClr val="1A1A1A"/>
+                </a:solidFill>
+                <a:latin typeface="Calibri"/>
+              </a:rPr>
+              <a:t>●  → 실제 이름·주민·계좌 없음</a:t>
+            </a:r>
+          </a:p>
+        </p:txBody>
+      </p:sp>
+      <p:sp>
+        <p:nvSpPr>
+          <p:cNvPr id="9" name="Rectangle 8"/>
           <p:cNvSpPr/>
           <p:nvPr/>
         </p:nvSpPr>
         <p:spPr>
           <a:xfrm>
-            <a:off x="4018178" y="3858768"/>
-            <a:ext cx="365760" cy="329184"/>
-          </a:xfrm>
-          <a:prstGeom prst="rightArrow">
+            <a:off x="6324447" y="1737360"/>
+            <a:ext cx="5227167" cy="4480560"/>
+          </a:xfrm>
+          <a:prstGeom prst="rect">
+            <a:avLst/>
+          </a:prstGeom>
+          <a:solidFill>
+            <a:srgbClr val="F2F2F2"/>
+          </a:solidFill>
+          <a:ln>
+            <a:noFill/>
+          </a:ln>
+          <a:effectLst/>
+        </p:spPr>
+        <p:style>
+          <a:lnRef idx="1">
+            <a:schemeClr val="accent1"/>
+          </a:lnRef>
+          <a:fillRef idx="3">
+            <a:schemeClr val="accent1"/>
+          </a:fillRef>
+          <a:effectRef idx="2">
+            <a:schemeClr val="accent1"/>
+          </a:effectRef>
+          <a:fontRef idx="minor">
+            <a:schemeClr val="lt1"/>
+          </a:fontRef>
+        </p:style>
+        <p:txBody>
+          <a:bodyPr rtlCol="0" anchor="ctr"/>
+          <a:lstStyle/>
+          <a:p>
+            <a:pPr algn="ctr"/>
+          </a:p>
+        </p:txBody>
+      </p:sp>
+      <p:sp>
+        <p:nvSpPr>
+          <p:cNvPr id="10" name="Rectangle 9"/>
+          <p:cNvSpPr/>
+          <p:nvPr/>
+        </p:nvSpPr>
+        <p:spPr>
+          <a:xfrm>
+            <a:off x="6324447" y="1737360"/>
+            <a:ext cx="5227167" cy="640080"/>
+          </a:xfrm>
+          <a:prstGeom prst="rect">
             <a:avLst/>
           </a:prstGeom>
           <a:solidFill>
@@ -4922,196 +4717,14 @@
       </p:sp>
       <p:sp>
         <p:nvSpPr>
-          <p:cNvPr id="7" name="Rounded Rectangle 6"/>
-          <p:cNvSpPr/>
-          <p:nvPr/>
-        </p:nvSpPr>
-        <p:spPr>
-          <a:xfrm>
-            <a:off x="4429658" y="3246120"/>
-            <a:ext cx="3332378" cy="1554480"/>
-          </a:xfrm>
-          <a:prstGeom prst="roundRect">
-            <a:avLst/>
-          </a:prstGeom>
-          <a:solidFill>
-            <a:srgbClr val="595959"/>
-          </a:solidFill>
-          <a:ln>
-            <a:noFill/>
-          </a:ln>
-          <a:effectLst/>
-        </p:spPr>
-        <p:style>
-          <a:lnRef idx="1">
-            <a:schemeClr val="accent1"/>
-          </a:lnRef>
-          <a:fillRef idx="3">
-            <a:schemeClr val="accent1"/>
-          </a:fillRef>
-          <a:effectRef idx="2">
-            <a:schemeClr val="accent1"/>
-          </a:effectRef>
-          <a:fontRef idx="minor">
-            <a:schemeClr val="lt1"/>
-          </a:fontRef>
-        </p:style>
-        <p:txBody>
-          <a:bodyPr rtlCol="0" anchor="ctr" wrap="square" lIns="73152" rIns="73152" tIns="27432" bIns="27432"/>
-          <a:lstStyle/>
-          <a:p>
-            <a:pPr algn="ctr"/>
-            <a:r>
-              <a:rPr b="1" sz="1500">
-                <a:solidFill>
-                  <a:srgbClr val="FFFFFF"/>
-                </a:solidFill>
-                <a:latin typeface="Calibri"/>
-              </a:rPr>
-              <a:t>2. 작업·집계</a:t>
-            </a:r>
-          </a:p>
-          <a:p>
-            <a:pPr algn="ctr">
-              <a:spcBef>
-                <a:spcPts val="200"/>
-              </a:spcBef>
-            </a:pPr>
-            <a:r>
-              <a:rPr sz="1100">
-                <a:solidFill>
-                  <a:srgbClr val="FFFFFF"/>
-                </a:solidFill>
-                <a:latin typeface="Calibri"/>
-              </a:rPr>
-              <a:t>토큰 파일로 안내문·통계 작성</a:t>
-            </a:r>
-          </a:p>
-        </p:txBody>
-      </p:sp>
-      <p:sp>
-        <p:nvSpPr>
-          <p:cNvPr id="8" name="Right Arrow 7"/>
-          <p:cNvSpPr/>
-          <p:nvPr/>
-        </p:nvSpPr>
-        <p:spPr>
-          <a:xfrm>
-            <a:off x="7807756" y="3858768"/>
-            <a:ext cx="365760" cy="329184"/>
-          </a:xfrm>
-          <a:prstGeom prst="rightArrow">
-            <a:avLst/>
-          </a:prstGeom>
-          <a:solidFill>
-            <a:srgbClr val="2F5597"/>
-          </a:solidFill>
-          <a:ln>
-            <a:noFill/>
-          </a:ln>
-          <a:effectLst/>
-        </p:spPr>
-        <p:style>
-          <a:lnRef idx="1">
-            <a:schemeClr val="accent1"/>
-          </a:lnRef>
-          <a:fillRef idx="3">
-            <a:schemeClr val="accent1"/>
-          </a:fillRef>
-          <a:effectRef idx="2">
-            <a:schemeClr val="accent1"/>
-          </a:effectRef>
-          <a:fontRef idx="minor">
-            <a:schemeClr val="lt1"/>
-          </a:fontRef>
-        </p:style>
-        <p:txBody>
-          <a:bodyPr rtlCol="0" anchor="ctr"/>
-          <a:lstStyle/>
-          <a:p>
-            <a:pPr algn="ctr"/>
-          </a:p>
-        </p:txBody>
-      </p:sp>
-      <p:sp>
-        <p:nvSpPr>
-          <p:cNvPr id="9" name="Rounded Rectangle 8"/>
-          <p:cNvSpPr/>
-          <p:nvPr/>
-        </p:nvSpPr>
-        <p:spPr>
-          <a:xfrm>
-            <a:off x="8219236" y="3246120"/>
-            <a:ext cx="3332378" cy="1554480"/>
-          </a:xfrm>
-          <a:prstGeom prst="roundRect">
-            <a:avLst/>
-          </a:prstGeom>
-          <a:solidFill>
-            <a:srgbClr val="111111"/>
-          </a:solidFill>
-          <a:ln>
-            <a:noFill/>
-          </a:ln>
-          <a:effectLst/>
-        </p:spPr>
-        <p:style>
-          <a:lnRef idx="1">
-            <a:schemeClr val="accent1"/>
-          </a:lnRef>
-          <a:fillRef idx="3">
-            <a:schemeClr val="accent1"/>
-          </a:fillRef>
-          <a:effectRef idx="2">
-            <a:schemeClr val="accent1"/>
-          </a:effectRef>
-          <a:fontRef idx="minor">
-            <a:schemeClr val="lt1"/>
-          </a:fontRef>
-        </p:style>
-        <p:txBody>
-          <a:bodyPr rtlCol="0" anchor="ctr" wrap="square" lIns="73152" rIns="73152" tIns="27432" bIns="27432"/>
-          <a:lstStyle/>
-          <a:p>
-            <a:pPr algn="ctr"/>
-            <a:r>
-              <a:rPr b="1" sz="1500">
-                <a:solidFill>
-                  <a:srgbClr val="FFFFFF"/>
-                </a:solidFill>
-                <a:latin typeface="Calibri"/>
-              </a:rPr>
-              <a:t>3. 재식별</a:t>
-            </a:r>
-          </a:p>
-          <a:p>
-            <a:pPr algn="ctr">
-              <a:spcBef>
-                <a:spcPts val="200"/>
-              </a:spcBef>
-            </a:pPr>
-            <a:r>
-              <a:rPr sz="1100">
-                <a:solidFill>
-                  <a:srgbClr val="FFFFFF"/>
-                </a:solidFill>
-                <a:latin typeface="Calibri"/>
-              </a:rPr>
-              <a:t>최종본만 실제 값 복원</a:t>
-            </a:r>
-          </a:p>
-        </p:txBody>
-      </p:sp>
-      <p:sp>
-        <p:nvSpPr>
-          <p:cNvPr id="10" name="TextBox 9"/>
+          <p:cNvPr id="11" name="TextBox 10"/>
           <p:cNvSpPr txBox="1"/>
           <p:nvPr/>
         </p:nvSpPr>
         <p:spPr>
           <a:xfrm>
-            <a:off x="640080" y="6400800"/>
-            <a:ext cx="9997135" cy="274320"/>
+            <a:off x="6598767" y="1737360"/>
+            <a:ext cx="4678527" cy="640080"/>
           </a:xfrm>
           <a:prstGeom prst="rect">
             <a:avLst/>
@@ -5119,7 +4732,7 @@
           <a:noFill/>
         </p:spPr>
         <p:txBody>
-          <a:bodyPr wrap="square" anchor="t" lIns="0" rIns="0" tIns="0" bIns="0">
+          <a:bodyPr wrap="square" anchor="ctr" lIns="0" rIns="0" tIns="0" bIns="0">
             <a:spAutoFit/>
           </a:bodyPr>
           <a:lstStyle/>
@@ -5130,6 +4743,125 @@
               </a:lnSpc>
             </a:pPr>
             <a:r>
+              <a:rPr sz="2600" b="1" i="0">
+                <a:solidFill>
+                  <a:srgbClr val="FFFFFF"/>
+                </a:solidFill>
+                <a:latin typeface="Calibri"/>
+              </a:rPr>
+              <a:t>담당자만 보는 최종본 (재식별)</a:t>
+            </a:r>
+          </a:p>
+        </p:txBody>
+      </p:sp>
+      <p:sp>
+        <p:nvSpPr>
+          <p:cNvPr id="12" name="TextBox 11"/>
+          <p:cNvSpPr txBox="1"/>
+          <p:nvPr/>
+        </p:nvSpPr>
+        <p:spPr>
+          <a:xfrm>
+            <a:off x="6598767" y="2606040"/>
+            <a:ext cx="4678527" cy="3383280"/>
+          </a:xfrm>
+          <a:prstGeom prst="rect">
+            <a:avLst/>
+          </a:prstGeom>
+          <a:noFill/>
+        </p:spPr>
+        <p:txBody>
+          <a:bodyPr wrap="square" anchor="t" lIns="0" rIns="0" tIns="0" bIns="0">
+            <a:spAutoFit/>
+          </a:bodyPr>
+          <a:lstStyle/>
+          <a:p>
+            <a:pPr algn="l">
+              <a:lnSpc>
+                <a:spcPct val="110000"/>
+              </a:lnSpc>
+              <a:spcAft>
+                <a:spcPts val="1000"/>
+              </a:spcAft>
+            </a:pPr>
+            <a:r>
+              <a:rPr sz="2200" b="0" i="0">
+                <a:solidFill>
+                  <a:srgbClr val="1A1A1A"/>
+                </a:solidFill>
+                <a:latin typeface="Calibri"/>
+              </a:rPr>
+              <a:t>●  받는사람: 신다은</a:t>
+            </a:r>
+          </a:p>
+          <a:p>
+            <a:pPr algn="l">
+              <a:lnSpc>
+                <a:spcPct val="110000"/>
+              </a:lnSpc>
+              <a:spcAft>
+                <a:spcPts val="1000"/>
+              </a:spcAft>
+            </a:pPr>
+            <a:r>
+              <a:rPr sz="2200" b="0" i="0">
+                <a:solidFill>
+                  <a:srgbClr val="1A1A1A"/>
+                </a:solidFill>
+                <a:latin typeface="Calibri"/>
+              </a:rPr>
+              <a:t>●  2026년 확정 연봉은 3,194만원</a:t>
+            </a:r>
+          </a:p>
+          <a:p>
+            <a:pPr algn="l">
+              <a:lnSpc>
+                <a:spcPct val="110000"/>
+              </a:lnSpc>
+              <a:spcAft>
+                <a:spcPts val="1000"/>
+              </a:spcAft>
+            </a:pPr>
+            <a:r>
+              <a:rPr sz="2200" b="0" i="0">
+                <a:solidFill>
+                  <a:srgbClr val="1A1A1A"/>
+                </a:solidFill>
+                <a:latin typeface="Calibri"/>
+              </a:rPr>
+              <a:t>●  → 인가된 담당자에게만</a:t>
+            </a:r>
+          </a:p>
+        </p:txBody>
+      </p:sp>
+      <p:sp>
+        <p:nvSpPr>
+          <p:cNvPr id="13" name="TextBox 12"/>
+          <p:cNvSpPr txBox="1"/>
+          <p:nvPr/>
+        </p:nvSpPr>
+        <p:spPr>
+          <a:xfrm>
+            <a:off x="640080" y="6400800"/>
+            <a:ext cx="9997135" cy="274320"/>
+          </a:xfrm>
+          <a:prstGeom prst="rect">
+            <a:avLst/>
+          </a:prstGeom>
+          <a:noFill/>
+        </p:spPr>
+        <p:txBody>
+          <a:bodyPr wrap="square" anchor="t" lIns="0" rIns="0" tIns="0" bIns="0">
+            <a:spAutoFit/>
+          </a:bodyPr>
+          <a:lstStyle/>
+          <a:p>
+            <a:pPr algn="l">
+              <a:lnSpc>
+                <a:spcPct val="105000"/>
+              </a:lnSpc>
+            </a:pPr>
+            <a:r>
               <a:rPr sz="1000" b="0" i="0">
                 <a:solidFill>
                   <a:srgbClr val="7F7F7F"/>
@@ -5143,7 +4875,7 @@
       </p:sp>
       <p:sp>
         <p:nvSpPr>
-          <p:cNvPr id="11" name="TextBox 10"/>
+          <p:cNvPr id="14" name="TextBox 13"/>
           <p:cNvSpPr txBox="1"/>
           <p:nvPr/>
         </p:nvSpPr>
@@ -5182,7 +4914,7 @@
       </p:sp>
       <p:sp>
         <p:nvSpPr>
-          <p:cNvPr id="12" name="TextBox 11"/>
+          <p:cNvPr id="15" name="TextBox 14"/>
           <p:cNvSpPr txBox="1"/>
           <p:nvPr/>
         </p:nvSpPr>
@@ -5315,7 +5047,7 @@
                 </a:solidFill>
                 <a:latin typeface="Calibri"/>
               </a:rPr>
-              <a:t>보호 범위</a:t>
+              <a:t>검증 결과</a:t>
             </a:r>
           </a:p>
         </p:txBody>
@@ -5354,21 +5086,841 @@
                 </a:solidFill>
                 <a:latin typeface="Calibri"/>
               </a:rPr>
-              <a:t>무엇을 가리고, 무엇을 남기나</a:t>
-            </a:r>
-          </a:p>
-        </p:txBody>
-      </p:sp>
-      <p:sp>
-        <p:nvSpPr>
-          <p:cNvPr id="5" name="TextBox 4"/>
+              <a:t>통계도, 개인별 업무도 — 누출 없이 둘 다</a:t>
+            </a:r>
+          </a:p>
+        </p:txBody>
+      </p:sp>
+      <p:sp>
+        <p:nvSpPr>
+          <p:cNvPr id="5" name="Rectangle 4"/>
+          <p:cNvSpPr/>
+          <p:nvPr/>
+        </p:nvSpPr>
+        <p:spPr>
+          <a:xfrm>
+            <a:off x="640080" y="2103120"/>
+            <a:ext cx="2453563" cy="2560320"/>
+          </a:xfrm>
+          <a:prstGeom prst="rect">
+            <a:avLst/>
+          </a:prstGeom>
+          <a:solidFill>
+            <a:srgbClr val="F2F2F2"/>
+          </a:solidFill>
+          <a:ln>
+            <a:noFill/>
+          </a:ln>
+          <a:effectLst/>
+        </p:spPr>
+        <p:style>
+          <a:lnRef idx="1">
+            <a:schemeClr val="accent1"/>
+          </a:lnRef>
+          <a:fillRef idx="3">
+            <a:schemeClr val="accent1"/>
+          </a:fillRef>
+          <a:effectRef idx="2">
+            <a:schemeClr val="accent1"/>
+          </a:effectRef>
+          <a:fontRef idx="minor">
+            <a:schemeClr val="lt1"/>
+          </a:fontRef>
+        </p:style>
+        <p:txBody>
+          <a:bodyPr rtlCol="0" anchor="ctr"/>
+          <a:lstStyle/>
+          <a:p>
+            <a:pPr algn="ctr"/>
+          </a:p>
+        </p:txBody>
+      </p:sp>
+      <p:sp>
+        <p:nvSpPr>
+          <p:cNvPr id="6" name="Rectangle 5"/>
+          <p:cNvSpPr/>
+          <p:nvPr/>
+        </p:nvSpPr>
+        <p:spPr>
+          <a:xfrm>
+            <a:off x="640080" y="2103120"/>
+            <a:ext cx="2453563" cy="109728"/>
+          </a:xfrm>
+          <a:prstGeom prst="rect">
+            <a:avLst/>
+          </a:prstGeom>
+          <a:solidFill>
+            <a:srgbClr val="2F5597"/>
+          </a:solidFill>
+          <a:ln>
+            <a:noFill/>
+          </a:ln>
+          <a:effectLst/>
+        </p:spPr>
+        <p:style>
+          <a:lnRef idx="1">
+            <a:schemeClr val="accent1"/>
+          </a:lnRef>
+          <a:fillRef idx="3">
+            <a:schemeClr val="accent1"/>
+          </a:fillRef>
+          <a:effectRef idx="2">
+            <a:schemeClr val="accent1"/>
+          </a:effectRef>
+          <a:fontRef idx="minor">
+            <a:schemeClr val="lt1"/>
+          </a:fontRef>
+        </p:style>
+        <p:txBody>
+          <a:bodyPr rtlCol="0" anchor="ctr"/>
+          <a:lstStyle/>
+          <a:p>
+            <a:pPr algn="ctr"/>
+          </a:p>
+        </p:txBody>
+      </p:sp>
+      <p:sp>
+        <p:nvSpPr>
+          <p:cNvPr id="7" name="TextBox 6"/>
           <p:cNvSpPr txBox="1"/>
           <p:nvPr/>
         </p:nvSpPr>
         <p:spPr>
           <a:xfrm>
-            <a:off x="640080" y="1737360"/>
-            <a:ext cx="5181447" cy="457200"/>
+            <a:off x="640080" y="2560320"/>
+            <a:ext cx="2453563" cy="1005840"/>
+          </a:xfrm>
+          <a:prstGeom prst="rect">
+            <a:avLst/>
+          </a:prstGeom>
+          <a:noFill/>
+        </p:spPr>
+        <p:txBody>
+          <a:bodyPr wrap="square" anchor="t" lIns="0" rIns="0" tIns="0" bIns="0">
+            <a:spAutoFit/>
+          </a:bodyPr>
+          <a:lstStyle/>
+          <a:p>
+            <a:pPr algn="ctr">
+              <a:lnSpc>
+                <a:spcPct val="105000"/>
+              </a:lnSpc>
+            </a:pPr>
+            <a:r>
+              <a:rPr sz="4800" b="1" i="0">
+                <a:solidFill>
+                  <a:srgbClr val="111111"/>
+                </a:solidFill>
+                <a:latin typeface="Calibri"/>
+              </a:rPr>
+              <a:t>0건</a:t>
+            </a:r>
+          </a:p>
+        </p:txBody>
+      </p:sp>
+      <p:sp>
+        <p:nvSpPr>
+          <p:cNvPr id="8" name="TextBox 7"/>
+          <p:cNvSpPr txBox="1"/>
+          <p:nvPr/>
+        </p:nvSpPr>
+        <p:spPr>
+          <a:xfrm>
+            <a:off x="640080" y="3611880"/>
+            <a:ext cx="2453563" cy="457200"/>
+          </a:xfrm>
+          <a:prstGeom prst="rect">
+            <a:avLst/>
+          </a:prstGeom>
+          <a:noFill/>
+        </p:spPr>
+        <p:txBody>
+          <a:bodyPr wrap="square" anchor="t" lIns="0" rIns="0" tIns="0" bIns="0">
+            <a:spAutoFit/>
+          </a:bodyPr>
+          <a:lstStyle/>
+          <a:p>
+            <a:pPr algn="ctr">
+              <a:lnSpc>
+                <a:spcPct val="105000"/>
+              </a:lnSpc>
+            </a:pPr>
+            <a:r>
+              <a:rPr sz="2200" b="1" i="0">
+                <a:solidFill>
+                  <a:srgbClr val="1A1A1A"/>
+                </a:solidFill>
+                <a:latin typeface="Calibri"/>
+              </a:rPr>
+              <a:t>식별자 누출</a:t>
+            </a:r>
+          </a:p>
+        </p:txBody>
+      </p:sp>
+      <p:sp>
+        <p:nvSpPr>
+          <p:cNvPr id="9" name="TextBox 8"/>
+          <p:cNvSpPr txBox="1"/>
+          <p:nvPr/>
+        </p:nvSpPr>
+        <p:spPr>
+          <a:xfrm>
+            <a:off x="822960" y="4023360"/>
+            <a:ext cx="2087803" cy="548640"/>
+          </a:xfrm>
+          <a:prstGeom prst="rect">
+            <a:avLst/>
+          </a:prstGeom>
+          <a:noFill/>
+        </p:spPr>
+        <p:txBody>
+          <a:bodyPr wrap="square" anchor="t" lIns="0" rIns="0" tIns="0" bIns="0">
+            <a:spAutoFit/>
+          </a:bodyPr>
+          <a:lstStyle/>
+          <a:p>
+            <a:pPr algn="ctr">
+              <a:lnSpc>
+                <a:spcPct val="100000"/>
+              </a:lnSpc>
+            </a:pPr>
+            <a:r>
+              <a:rPr sz="1200" b="0" i="0">
+                <a:solidFill>
+                  <a:srgbClr val="7F7F7F"/>
+                </a:solidFill>
+                <a:latin typeface="Calibri"/>
+              </a:rPr>
+              <a:t>작업 내내</a:t>
+            </a:r>
+          </a:p>
+        </p:txBody>
+      </p:sp>
+      <p:sp>
+        <p:nvSpPr>
+          <p:cNvPr id="10" name="Rectangle 9"/>
+          <p:cNvSpPr/>
+          <p:nvPr/>
+        </p:nvSpPr>
+        <p:spPr>
+          <a:xfrm>
+            <a:off x="3459403" y="2103120"/>
+            <a:ext cx="2453563" cy="2560320"/>
+          </a:xfrm>
+          <a:prstGeom prst="rect">
+            <a:avLst/>
+          </a:prstGeom>
+          <a:solidFill>
+            <a:srgbClr val="F2F2F2"/>
+          </a:solidFill>
+          <a:ln>
+            <a:noFill/>
+          </a:ln>
+          <a:effectLst/>
+        </p:spPr>
+        <p:style>
+          <a:lnRef idx="1">
+            <a:schemeClr val="accent1"/>
+          </a:lnRef>
+          <a:fillRef idx="3">
+            <a:schemeClr val="accent1"/>
+          </a:fillRef>
+          <a:effectRef idx="2">
+            <a:schemeClr val="accent1"/>
+          </a:effectRef>
+          <a:fontRef idx="minor">
+            <a:schemeClr val="lt1"/>
+          </a:fontRef>
+        </p:style>
+        <p:txBody>
+          <a:bodyPr rtlCol="0" anchor="ctr"/>
+          <a:lstStyle/>
+          <a:p>
+            <a:pPr algn="ctr"/>
+          </a:p>
+        </p:txBody>
+      </p:sp>
+      <p:sp>
+        <p:nvSpPr>
+          <p:cNvPr id="11" name="Rectangle 10"/>
+          <p:cNvSpPr/>
+          <p:nvPr/>
+        </p:nvSpPr>
+        <p:spPr>
+          <a:xfrm>
+            <a:off x="3459403" y="2103120"/>
+            <a:ext cx="2453563" cy="109728"/>
+          </a:xfrm>
+          <a:prstGeom prst="rect">
+            <a:avLst/>
+          </a:prstGeom>
+          <a:solidFill>
+            <a:srgbClr val="2F5597"/>
+          </a:solidFill>
+          <a:ln>
+            <a:noFill/>
+          </a:ln>
+          <a:effectLst/>
+        </p:spPr>
+        <p:style>
+          <a:lnRef idx="1">
+            <a:schemeClr val="accent1"/>
+          </a:lnRef>
+          <a:fillRef idx="3">
+            <a:schemeClr val="accent1"/>
+          </a:fillRef>
+          <a:effectRef idx="2">
+            <a:schemeClr val="accent1"/>
+          </a:effectRef>
+          <a:fontRef idx="minor">
+            <a:schemeClr val="lt1"/>
+          </a:fontRef>
+        </p:style>
+        <p:txBody>
+          <a:bodyPr rtlCol="0" anchor="ctr"/>
+          <a:lstStyle/>
+          <a:p>
+            <a:pPr algn="ctr"/>
+          </a:p>
+        </p:txBody>
+      </p:sp>
+      <p:sp>
+        <p:nvSpPr>
+          <p:cNvPr id="12" name="TextBox 11"/>
+          <p:cNvSpPr txBox="1"/>
+          <p:nvPr/>
+        </p:nvSpPr>
+        <p:spPr>
+          <a:xfrm>
+            <a:off x="3459403" y="2560320"/>
+            <a:ext cx="2453563" cy="1005840"/>
+          </a:xfrm>
+          <a:prstGeom prst="rect">
+            <a:avLst/>
+          </a:prstGeom>
+          <a:noFill/>
+        </p:spPr>
+        <p:txBody>
+          <a:bodyPr wrap="square" anchor="t" lIns="0" rIns="0" tIns="0" bIns="0">
+            <a:spAutoFit/>
+          </a:bodyPr>
+          <a:lstStyle/>
+          <a:p>
+            <a:pPr algn="ctr">
+              <a:lnSpc>
+                <a:spcPct val="105000"/>
+              </a:lnSpc>
+            </a:pPr>
+            <a:r>
+              <a:rPr sz="4800" b="1" i="0">
+                <a:solidFill>
+                  <a:srgbClr val="111111"/>
+                </a:solidFill>
+                <a:latin typeface="Calibri"/>
+              </a:rPr>
+              <a:t>24/24</a:t>
+            </a:r>
+          </a:p>
+        </p:txBody>
+      </p:sp>
+      <p:sp>
+        <p:nvSpPr>
+          <p:cNvPr id="13" name="TextBox 12"/>
+          <p:cNvSpPr txBox="1"/>
+          <p:nvPr/>
+        </p:nvSpPr>
+        <p:spPr>
+          <a:xfrm>
+            <a:off x="3459403" y="3611880"/>
+            <a:ext cx="2453563" cy="457200"/>
+          </a:xfrm>
+          <a:prstGeom prst="rect">
+            <a:avLst/>
+          </a:prstGeom>
+          <a:noFill/>
+        </p:spPr>
+        <p:txBody>
+          <a:bodyPr wrap="square" anchor="t" lIns="0" rIns="0" tIns="0" bIns="0">
+            <a:spAutoFit/>
+          </a:bodyPr>
+          <a:lstStyle/>
+          <a:p>
+            <a:pPr algn="ctr">
+              <a:lnSpc>
+                <a:spcPct val="105000"/>
+              </a:lnSpc>
+            </a:pPr>
+            <a:r>
+              <a:rPr sz="2200" b="1" i="0">
+                <a:solidFill>
+                  <a:srgbClr val="1A1A1A"/>
+                </a:solidFill>
+                <a:latin typeface="Calibri"/>
+              </a:rPr>
+              <a:t>시나리오 통과</a:t>
+            </a:r>
+          </a:p>
+        </p:txBody>
+      </p:sp>
+      <p:sp>
+        <p:nvSpPr>
+          <p:cNvPr id="14" name="TextBox 13"/>
+          <p:cNvSpPr txBox="1"/>
+          <p:nvPr/>
+        </p:nvSpPr>
+        <p:spPr>
+          <a:xfrm>
+            <a:off x="3642283" y="4023360"/>
+            <a:ext cx="2087803" cy="548640"/>
+          </a:xfrm>
+          <a:prstGeom prst="rect">
+            <a:avLst/>
+          </a:prstGeom>
+          <a:noFill/>
+        </p:spPr>
+        <p:txBody>
+          <a:bodyPr wrap="square" anchor="t" lIns="0" rIns="0" tIns="0" bIns="0">
+            <a:spAutoFit/>
+          </a:bodyPr>
+          <a:lstStyle/>
+          <a:p>
+            <a:pPr algn="ctr">
+              <a:lnSpc>
+                <a:spcPct val="100000"/>
+              </a:lnSpc>
+            </a:pPr>
+            <a:r>
+              <a:rPr sz="1200" b="0" i="0">
+                <a:solidFill>
+                  <a:srgbClr val="7F7F7F"/>
+                </a:solidFill>
+                <a:latin typeface="Calibri"/>
+              </a:rPr>
+              <a:t>통계 + HR 업무</a:t>
+            </a:r>
+          </a:p>
+        </p:txBody>
+      </p:sp>
+      <p:sp>
+        <p:nvSpPr>
+          <p:cNvPr id="15" name="Rectangle 14"/>
+          <p:cNvSpPr/>
+          <p:nvPr/>
+        </p:nvSpPr>
+        <p:spPr>
+          <a:xfrm>
+            <a:off x="6278727" y="2103120"/>
+            <a:ext cx="2453563" cy="2560320"/>
+          </a:xfrm>
+          <a:prstGeom prst="rect">
+            <a:avLst/>
+          </a:prstGeom>
+          <a:solidFill>
+            <a:srgbClr val="F2F2F2"/>
+          </a:solidFill>
+          <a:ln>
+            <a:noFill/>
+          </a:ln>
+          <a:effectLst/>
+        </p:spPr>
+        <p:style>
+          <a:lnRef idx="1">
+            <a:schemeClr val="accent1"/>
+          </a:lnRef>
+          <a:fillRef idx="3">
+            <a:schemeClr val="accent1"/>
+          </a:fillRef>
+          <a:effectRef idx="2">
+            <a:schemeClr val="accent1"/>
+          </a:effectRef>
+          <a:fontRef idx="minor">
+            <a:schemeClr val="lt1"/>
+          </a:fontRef>
+        </p:style>
+        <p:txBody>
+          <a:bodyPr rtlCol="0" anchor="ctr"/>
+          <a:lstStyle/>
+          <a:p>
+            <a:pPr algn="ctr"/>
+          </a:p>
+        </p:txBody>
+      </p:sp>
+      <p:sp>
+        <p:nvSpPr>
+          <p:cNvPr id="16" name="Rectangle 15"/>
+          <p:cNvSpPr/>
+          <p:nvPr/>
+        </p:nvSpPr>
+        <p:spPr>
+          <a:xfrm>
+            <a:off x="6278727" y="2103120"/>
+            <a:ext cx="2453563" cy="109728"/>
+          </a:xfrm>
+          <a:prstGeom prst="rect">
+            <a:avLst/>
+          </a:prstGeom>
+          <a:solidFill>
+            <a:srgbClr val="2F5597"/>
+          </a:solidFill>
+          <a:ln>
+            <a:noFill/>
+          </a:ln>
+          <a:effectLst/>
+        </p:spPr>
+        <p:style>
+          <a:lnRef idx="1">
+            <a:schemeClr val="accent1"/>
+          </a:lnRef>
+          <a:fillRef idx="3">
+            <a:schemeClr val="accent1"/>
+          </a:fillRef>
+          <a:effectRef idx="2">
+            <a:schemeClr val="accent1"/>
+          </a:effectRef>
+          <a:fontRef idx="minor">
+            <a:schemeClr val="lt1"/>
+          </a:fontRef>
+        </p:style>
+        <p:txBody>
+          <a:bodyPr rtlCol="0" anchor="ctr"/>
+          <a:lstStyle/>
+          <a:p>
+            <a:pPr algn="ctr"/>
+          </a:p>
+        </p:txBody>
+      </p:sp>
+      <p:sp>
+        <p:nvSpPr>
+          <p:cNvPr id="17" name="TextBox 16"/>
+          <p:cNvSpPr txBox="1"/>
+          <p:nvPr/>
+        </p:nvSpPr>
+        <p:spPr>
+          <a:xfrm>
+            <a:off x="6278727" y="2560320"/>
+            <a:ext cx="2453563" cy="1005840"/>
+          </a:xfrm>
+          <a:prstGeom prst="rect">
+            <a:avLst/>
+          </a:prstGeom>
+          <a:noFill/>
+        </p:spPr>
+        <p:txBody>
+          <a:bodyPr wrap="square" anchor="t" lIns="0" rIns="0" tIns="0" bIns="0">
+            <a:spAutoFit/>
+          </a:bodyPr>
+          <a:lstStyle/>
+          <a:p>
+            <a:pPr algn="ctr">
+              <a:lnSpc>
+                <a:spcPct val="105000"/>
+              </a:lnSpc>
+            </a:pPr>
+            <a:r>
+              <a:rPr sz="4800" b="1" i="0">
+                <a:solidFill>
+                  <a:srgbClr val="111111"/>
+                </a:solidFill>
+                <a:latin typeface="Calibri"/>
+              </a:rPr>
+              <a:t>100%</a:t>
+            </a:r>
+          </a:p>
+        </p:txBody>
+      </p:sp>
+      <p:sp>
+        <p:nvSpPr>
+          <p:cNvPr id="18" name="TextBox 17"/>
+          <p:cNvSpPr txBox="1"/>
+          <p:nvPr/>
+        </p:nvSpPr>
+        <p:spPr>
+          <a:xfrm>
+            <a:off x="6278727" y="3611880"/>
+            <a:ext cx="2453563" cy="457200"/>
+          </a:xfrm>
+          <a:prstGeom prst="rect">
+            <a:avLst/>
+          </a:prstGeom>
+          <a:noFill/>
+        </p:spPr>
+        <p:txBody>
+          <a:bodyPr wrap="square" anchor="t" lIns="0" rIns="0" tIns="0" bIns="0">
+            <a:spAutoFit/>
+          </a:bodyPr>
+          <a:lstStyle/>
+          <a:p>
+            <a:pPr algn="ctr">
+              <a:lnSpc>
+                <a:spcPct val="105000"/>
+              </a:lnSpc>
+            </a:pPr>
+            <a:r>
+              <a:rPr sz="2200" b="1" i="0">
+                <a:solidFill>
+                  <a:srgbClr val="1A1A1A"/>
+                </a:solidFill>
+                <a:latin typeface="Calibri"/>
+              </a:rPr>
+              <a:t>통계 정확도</a:t>
+            </a:r>
+          </a:p>
+        </p:txBody>
+      </p:sp>
+      <p:sp>
+        <p:nvSpPr>
+          <p:cNvPr id="19" name="TextBox 18"/>
+          <p:cNvSpPr txBox="1"/>
+          <p:nvPr/>
+        </p:nvSpPr>
+        <p:spPr>
+          <a:xfrm>
+            <a:off x="6461607" y="4023360"/>
+            <a:ext cx="2087803" cy="548640"/>
+          </a:xfrm>
+          <a:prstGeom prst="rect">
+            <a:avLst/>
+          </a:prstGeom>
+          <a:noFill/>
+        </p:spPr>
+        <p:txBody>
+          <a:bodyPr wrap="square" anchor="t" lIns="0" rIns="0" tIns="0" bIns="0">
+            <a:spAutoFit/>
+          </a:bodyPr>
+          <a:lstStyle/>
+          <a:p>
+            <a:pPr algn="ctr">
+              <a:lnSpc>
+                <a:spcPct val="100000"/>
+              </a:lnSpc>
+            </a:pPr>
+            <a:r>
+              <a:rPr sz="1200" b="0" i="0">
+                <a:solidFill>
+                  <a:srgbClr val="7F7F7F"/>
+                </a:solidFill>
+                <a:latin typeface="Calibri"/>
+              </a:rPr>
+              <a:t>비식별 파일서 직접 산출</a:t>
+            </a:r>
+          </a:p>
+        </p:txBody>
+      </p:sp>
+      <p:sp>
+        <p:nvSpPr>
+          <p:cNvPr id="20" name="Rectangle 19"/>
+          <p:cNvSpPr/>
+          <p:nvPr/>
+        </p:nvSpPr>
+        <p:spPr>
+          <a:xfrm>
+            <a:off x="9098051" y="2103120"/>
+            <a:ext cx="2453563" cy="2560320"/>
+          </a:xfrm>
+          <a:prstGeom prst="rect">
+            <a:avLst/>
+          </a:prstGeom>
+          <a:solidFill>
+            <a:srgbClr val="F2F2F2"/>
+          </a:solidFill>
+          <a:ln>
+            <a:noFill/>
+          </a:ln>
+          <a:effectLst/>
+        </p:spPr>
+        <p:style>
+          <a:lnRef idx="1">
+            <a:schemeClr val="accent1"/>
+          </a:lnRef>
+          <a:fillRef idx="3">
+            <a:schemeClr val="accent1"/>
+          </a:fillRef>
+          <a:effectRef idx="2">
+            <a:schemeClr val="accent1"/>
+          </a:effectRef>
+          <a:fontRef idx="minor">
+            <a:schemeClr val="lt1"/>
+          </a:fontRef>
+        </p:style>
+        <p:txBody>
+          <a:bodyPr rtlCol="0" anchor="ctr"/>
+          <a:lstStyle/>
+          <a:p>
+            <a:pPr algn="ctr"/>
+          </a:p>
+        </p:txBody>
+      </p:sp>
+      <p:sp>
+        <p:nvSpPr>
+          <p:cNvPr id="21" name="Rectangle 20"/>
+          <p:cNvSpPr/>
+          <p:nvPr/>
+        </p:nvSpPr>
+        <p:spPr>
+          <a:xfrm>
+            <a:off x="9098051" y="2103120"/>
+            <a:ext cx="2453563" cy="109728"/>
+          </a:xfrm>
+          <a:prstGeom prst="rect">
+            <a:avLst/>
+          </a:prstGeom>
+          <a:solidFill>
+            <a:srgbClr val="2F5597"/>
+          </a:solidFill>
+          <a:ln>
+            <a:noFill/>
+          </a:ln>
+          <a:effectLst/>
+        </p:spPr>
+        <p:style>
+          <a:lnRef idx="1">
+            <a:schemeClr val="accent1"/>
+          </a:lnRef>
+          <a:fillRef idx="3">
+            <a:schemeClr val="accent1"/>
+          </a:fillRef>
+          <a:effectRef idx="2">
+            <a:schemeClr val="accent1"/>
+          </a:effectRef>
+          <a:fontRef idx="minor">
+            <a:schemeClr val="lt1"/>
+          </a:fontRef>
+        </p:style>
+        <p:txBody>
+          <a:bodyPr rtlCol="0" anchor="ctr"/>
+          <a:lstStyle/>
+          <a:p>
+            <a:pPr algn="ctr"/>
+          </a:p>
+        </p:txBody>
+      </p:sp>
+      <p:sp>
+        <p:nvSpPr>
+          <p:cNvPr id="22" name="TextBox 21"/>
+          <p:cNvSpPr txBox="1"/>
+          <p:nvPr/>
+        </p:nvSpPr>
+        <p:spPr>
+          <a:xfrm>
+            <a:off x="9098051" y="2560320"/>
+            <a:ext cx="2453563" cy="1005840"/>
+          </a:xfrm>
+          <a:prstGeom prst="rect">
+            <a:avLst/>
+          </a:prstGeom>
+          <a:noFill/>
+        </p:spPr>
+        <p:txBody>
+          <a:bodyPr wrap="square" anchor="t" lIns="0" rIns="0" tIns="0" bIns="0">
+            <a:spAutoFit/>
+          </a:bodyPr>
+          <a:lstStyle/>
+          <a:p>
+            <a:pPr algn="ctr">
+              <a:lnSpc>
+                <a:spcPct val="105000"/>
+              </a:lnSpc>
+            </a:pPr>
+            <a:r>
+              <a:rPr sz="4800" b="1" i="0">
+                <a:solidFill>
+                  <a:srgbClr val="111111"/>
+                </a:solidFill>
+                <a:latin typeface="Calibri"/>
+              </a:rPr>
+              <a:t>250명+</a:t>
+            </a:r>
+          </a:p>
+        </p:txBody>
+      </p:sp>
+      <p:sp>
+        <p:nvSpPr>
+          <p:cNvPr id="23" name="TextBox 22"/>
+          <p:cNvSpPr txBox="1"/>
+          <p:nvPr/>
+        </p:nvSpPr>
+        <p:spPr>
+          <a:xfrm>
+            <a:off x="9098051" y="3611880"/>
+            <a:ext cx="2453563" cy="457200"/>
+          </a:xfrm>
+          <a:prstGeom prst="rect">
+            <a:avLst/>
+          </a:prstGeom>
+          <a:noFill/>
+        </p:spPr>
+        <p:txBody>
+          <a:bodyPr wrap="square" anchor="t" lIns="0" rIns="0" tIns="0" bIns="0">
+            <a:spAutoFit/>
+          </a:bodyPr>
+          <a:lstStyle/>
+          <a:p>
+            <a:pPr algn="ctr">
+              <a:lnSpc>
+                <a:spcPct val="105000"/>
+              </a:lnSpc>
+            </a:pPr>
+            <a:r>
+              <a:rPr sz="2200" b="1" i="0">
+                <a:solidFill>
+                  <a:srgbClr val="1A1A1A"/>
+                </a:solidFill>
+                <a:latin typeface="Calibri"/>
+              </a:rPr>
+              <a:t>검증 데이터</a:t>
+            </a:r>
+          </a:p>
+        </p:txBody>
+      </p:sp>
+      <p:sp>
+        <p:nvSpPr>
+          <p:cNvPr id="24" name="TextBox 23"/>
+          <p:cNvSpPr txBox="1"/>
+          <p:nvPr/>
+        </p:nvSpPr>
+        <p:spPr>
+          <a:xfrm>
+            <a:off x="9280931" y="4023360"/>
+            <a:ext cx="2087803" cy="548640"/>
+          </a:xfrm>
+          <a:prstGeom prst="rect">
+            <a:avLst/>
+          </a:prstGeom>
+          <a:noFill/>
+        </p:spPr>
+        <p:txBody>
+          <a:bodyPr wrap="square" anchor="t" lIns="0" rIns="0" tIns="0" bIns="0">
+            <a:spAutoFit/>
+          </a:bodyPr>
+          <a:lstStyle/>
+          <a:p>
+            <a:pPr algn="ctr">
+              <a:lnSpc>
+                <a:spcPct val="100000"/>
+              </a:lnSpc>
+            </a:pPr>
+            <a:r>
+              <a:rPr sz="1200" b="0" i="0">
+                <a:solidFill>
+                  <a:srgbClr val="7F7F7F"/>
+                </a:solidFill>
+                <a:latin typeface="Calibri"/>
+              </a:rPr>
+              <a:t>다른 규모·문서 포함</a:t>
+            </a:r>
+          </a:p>
+        </p:txBody>
+      </p:sp>
+      <p:sp>
+        <p:nvSpPr>
+          <p:cNvPr id="25" name="TextBox 24"/>
+          <p:cNvSpPr txBox="1"/>
+          <p:nvPr/>
+        </p:nvSpPr>
+        <p:spPr>
+          <a:xfrm>
+            <a:off x="640080" y="6400800"/>
+            <a:ext cx="9997135" cy="274320"/>
           </a:xfrm>
           <a:prstGeom prst="rect">
             <a:avLst/>
@@ -5387,339 +5939,6 @@
               </a:lnSpc>
             </a:pPr>
             <a:r>
-              <a:rPr sz="2600" b="1" i="0">
-                <a:solidFill>
-                  <a:srgbClr val="595959"/>
-                </a:solidFill>
-                <a:latin typeface="Calibri"/>
-              </a:rPr>
-              <a:t>토큰으로 가림 (직접 식별자)</a:t>
-            </a:r>
-          </a:p>
-        </p:txBody>
-      </p:sp>
-      <p:sp>
-        <p:nvSpPr>
-          <p:cNvPr id="6" name="TextBox 5"/>
-          <p:cNvSpPr txBox="1"/>
-          <p:nvPr/>
-        </p:nvSpPr>
-        <p:spPr>
-          <a:xfrm>
-            <a:off x="640080" y="2286000"/>
-            <a:ext cx="5181447" cy="3931920"/>
-          </a:xfrm>
-          <a:prstGeom prst="rect">
-            <a:avLst/>
-          </a:prstGeom>
-          <a:noFill/>
-        </p:spPr>
-        <p:txBody>
-          <a:bodyPr wrap="square" anchor="t" lIns="0" rIns="0" tIns="0" bIns="0">
-            <a:spAutoFit/>
-          </a:bodyPr>
-          <a:lstStyle/>
-          <a:p>
-            <a:pPr algn="l">
-              <a:lnSpc>
-                <a:spcPct val="110000"/>
-              </a:lnSpc>
-              <a:spcAft>
-                <a:spcPts val="1000"/>
-              </a:spcAft>
-            </a:pPr>
-            <a:r>
-              <a:rPr sz="2200" b="0" i="0">
-                <a:solidFill>
-                  <a:srgbClr val="1A1A1A"/>
-                </a:solidFill>
-                <a:latin typeface="Calibri"/>
-              </a:rPr>
-              <a:t>●  이름</a:t>
-            </a:r>
-          </a:p>
-          <a:p>
-            <a:pPr algn="l">
-              <a:lnSpc>
-                <a:spcPct val="110000"/>
-              </a:lnSpc>
-              <a:spcAft>
-                <a:spcPts val="1000"/>
-              </a:spcAft>
-            </a:pPr>
-            <a:r>
-              <a:rPr sz="2200" b="0" i="0">
-                <a:solidFill>
-                  <a:srgbClr val="1A1A1A"/>
-                </a:solidFill>
-                <a:latin typeface="Calibri"/>
-              </a:rPr>
-              <a:t>●  주민등록번호</a:t>
-            </a:r>
-          </a:p>
-          <a:p>
-            <a:pPr algn="l">
-              <a:lnSpc>
-                <a:spcPct val="110000"/>
-              </a:lnSpc>
-              <a:spcAft>
-                <a:spcPts val="1000"/>
-              </a:spcAft>
-            </a:pPr>
-            <a:r>
-              <a:rPr sz="2200" b="0" i="0">
-                <a:solidFill>
-                  <a:srgbClr val="1A1A1A"/>
-                </a:solidFill>
-                <a:latin typeface="Calibri"/>
-              </a:rPr>
-              <a:t>●  사번</a:t>
-            </a:r>
-          </a:p>
-          <a:p>
-            <a:pPr algn="l">
-              <a:lnSpc>
-                <a:spcPct val="110000"/>
-              </a:lnSpc>
-              <a:spcAft>
-                <a:spcPts val="1000"/>
-              </a:spcAft>
-            </a:pPr>
-            <a:r>
-              <a:rPr sz="2200" b="0" i="0">
-                <a:solidFill>
-                  <a:srgbClr val="1A1A1A"/>
-                </a:solidFill>
-                <a:latin typeface="Calibri"/>
-              </a:rPr>
-              <a:t>●  계좌번호</a:t>
-            </a:r>
-          </a:p>
-          <a:p>
-            <a:pPr algn="l">
-              <a:lnSpc>
-                <a:spcPct val="110000"/>
-              </a:lnSpc>
-              <a:spcAft>
-                <a:spcPts val="1000"/>
-              </a:spcAft>
-            </a:pPr>
-            <a:r>
-              <a:rPr sz="2200" b="0" i="0">
-                <a:solidFill>
-                  <a:srgbClr val="1A1A1A"/>
-                </a:solidFill>
-                <a:latin typeface="Calibri"/>
-              </a:rPr>
-              <a:t>●  전화번호·이메일</a:t>
-            </a:r>
-          </a:p>
-          <a:p>
-            <a:pPr algn="l">
-              <a:lnSpc>
-                <a:spcPct val="110000"/>
-              </a:lnSpc>
-              <a:spcAft>
-                <a:spcPts val="1000"/>
-              </a:spcAft>
-            </a:pPr>
-            <a:r>
-              <a:rPr sz="2200" b="0" i="0">
-                <a:solidFill>
-                  <a:srgbClr val="1A1A1A"/>
-                </a:solidFill>
-                <a:latin typeface="Calibri"/>
-              </a:rPr>
-              <a:t>●  카드·사업자등록번호·IP</a:t>
-            </a:r>
-          </a:p>
-        </p:txBody>
-      </p:sp>
-      <p:sp>
-        <p:nvSpPr>
-          <p:cNvPr id="7" name="TextBox 6"/>
-          <p:cNvSpPr txBox="1"/>
-          <p:nvPr/>
-        </p:nvSpPr>
-        <p:spPr>
-          <a:xfrm>
-            <a:off x="6370167" y="1737360"/>
-            <a:ext cx="5181447" cy="457200"/>
-          </a:xfrm>
-          <a:prstGeom prst="rect">
-            <a:avLst/>
-          </a:prstGeom>
-          <a:noFill/>
-        </p:spPr>
-        <p:txBody>
-          <a:bodyPr wrap="square" anchor="t" lIns="0" rIns="0" tIns="0" bIns="0">
-            <a:spAutoFit/>
-          </a:bodyPr>
-          <a:lstStyle/>
-          <a:p>
-            <a:pPr algn="l">
-              <a:lnSpc>
-                <a:spcPct val="105000"/>
-              </a:lnSpc>
-            </a:pPr>
-            <a:r>
-              <a:rPr sz="2600" b="1" i="0">
-                <a:solidFill>
-                  <a:srgbClr val="595959"/>
-                </a:solidFill>
-                <a:latin typeface="Calibri"/>
-              </a:rPr>
-              <a:t>원본 유지 (분석용)</a:t>
-            </a:r>
-          </a:p>
-        </p:txBody>
-      </p:sp>
-      <p:sp>
-        <p:nvSpPr>
-          <p:cNvPr id="8" name="TextBox 7"/>
-          <p:cNvSpPr txBox="1"/>
-          <p:nvPr/>
-        </p:nvSpPr>
-        <p:spPr>
-          <a:xfrm>
-            <a:off x="6370167" y="2286000"/>
-            <a:ext cx="5181447" cy="3931920"/>
-          </a:xfrm>
-          <a:prstGeom prst="rect">
-            <a:avLst/>
-          </a:prstGeom>
-          <a:noFill/>
-        </p:spPr>
-        <p:txBody>
-          <a:bodyPr wrap="square" anchor="t" lIns="0" rIns="0" tIns="0" bIns="0">
-            <a:spAutoFit/>
-          </a:bodyPr>
-          <a:lstStyle/>
-          <a:p>
-            <a:pPr algn="l">
-              <a:lnSpc>
-                <a:spcPct val="110000"/>
-              </a:lnSpc>
-              <a:spcAft>
-                <a:spcPts val="1000"/>
-              </a:spcAft>
-            </a:pPr>
-            <a:r>
-              <a:rPr sz="2200" b="0" i="0">
-                <a:solidFill>
-                  <a:srgbClr val="1A1A1A"/>
-                </a:solidFill>
-                <a:latin typeface="Calibri"/>
-              </a:rPr>
-              <a:t>●  연봉·급여</a:t>
-            </a:r>
-          </a:p>
-          <a:p>
-            <a:pPr algn="l">
-              <a:lnSpc>
-                <a:spcPct val="110000"/>
-              </a:lnSpc>
-              <a:spcAft>
-                <a:spcPts val="1000"/>
-              </a:spcAft>
-            </a:pPr>
-            <a:r>
-              <a:rPr sz="2200" b="0" i="0">
-                <a:solidFill>
-                  <a:srgbClr val="1A1A1A"/>
-                </a:solidFill>
-                <a:latin typeface="Calibri"/>
-              </a:rPr>
-              <a:t>●  근태(지각·결근·연차)</a:t>
-            </a:r>
-          </a:p>
-          <a:p>
-            <a:pPr algn="l">
-              <a:lnSpc>
-                <a:spcPct val="110000"/>
-              </a:lnSpc>
-              <a:spcAft>
-                <a:spcPts val="1000"/>
-              </a:spcAft>
-            </a:pPr>
-            <a:r>
-              <a:rPr sz="2200" b="0" i="0">
-                <a:solidFill>
-                  <a:srgbClr val="1A1A1A"/>
-                </a:solidFill>
-                <a:latin typeface="Calibri"/>
-              </a:rPr>
-              <a:t>●  부서·직급</a:t>
-            </a:r>
-          </a:p>
-          <a:p>
-            <a:pPr algn="l">
-              <a:lnSpc>
-                <a:spcPct val="110000"/>
-              </a:lnSpc>
-              <a:spcAft>
-                <a:spcPts val="1000"/>
-              </a:spcAft>
-            </a:pPr>
-            <a:r>
-              <a:rPr sz="2200" b="0" i="0">
-                <a:solidFill>
-                  <a:srgbClr val="1A1A1A"/>
-                </a:solidFill>
-                <a:latin typeface="Calibri"/>
-              </a:rPr>
-              <a:t>●  → 평균·합계·분포를 직접 계산</a:t>
-            </a:r>
-          </a:p>
-          <a:p>
-            <a:pPr algn="l">
-              <a:lnSpc>
-                <a:spcPct val="110000"/>
-              </a:lnSpc>
-              <a:spcAft>
-                <a:spcPts val="1000"/>
-              </a:spcAft>
-            </a:pPr>
-            <a:r>
-              <a:rPr sz="2200" b="0" i="0">
-                <a:solidFill>
-                  <a:srgbClr val="1A1A1A"/>
-                </a:solidFill>
-                <a:latin typeface="Calibri"/>
-              </a:rPr>
-              <a:t>●  → 누구의 값인지는 알 수 없음</a:t>
-            </a:r>
-          </a:p>
-        </p:txBody>
-      </p:sp>
-      <p:sp>
-        <p:nvSpPr>
-          <p:cNvPr id="9" name="TextBox 8"/>
-          <p:cNvSpPr txBox="1"/>
-          <p:nvPr/>
-        </p:nvSpPr>
-        <p:spPr>
-          <a:xfrm>
-            <a:off x="640080" y="6400800"/>
-            <a:ext cx="9997135" cy="274320"/>
-          </a:xfrm>
-          <a:prstGeom prst="rect">
-            <a:avLst/>
-          </a:prstGeom>
-          <a:noFill/>
-        </p:spPr>
-        <p:txBody>
-          <a:bodyPr wrap="square" anchor="t" lIns="0" rIns="0" tIns="0" bIns="0">
-            <a:spAutoFit/>
-          </a:bodyPr>
-          <a:lstStyle/>
-          <a:p>
-            <a:pPr algn="l">
-              <a:lnSpc>
-                <a:spcPct val="105000"/>
-              </a:lnSpc>
-            </a:pPr>
-            <a:r>
               <a:rPr sz="1000" b="0" i="0">
                 <a:solidFill>
                   <a:srgbClr val="7F7F7F"/>
@@ -5733,7 +5952,7 @@
       </p:sp>
       <p:sp>
         <p:nvSpPr>
-          <p:cNvPr id="10" name="TextBox 9"/>
+          <p:cNvPr id="26" name="TextBox 25"/>
           <p:cNvSpPr txBox="1"/>
           <p:nvPr/>
         </p:nvSpPr>
@@ -5772,7 +5991,7 @@
       </p:sp>
       <p:sp>
         <p:nvSpPr>
-          <p:cNvPr id="11" name="TextBox 10"/>
+          <p:cNvPr id="27" name="TextBox 26"/>
           <p:cNvSpPr txBox="1"/>
           <p:nvPr/>
         </p:nvSpPr>
@@ -5905,7 +6124,7 @@
                 </a:solidFill>
                 <a:latin typeface="Calibri"/>
               </a:rPr>
-              <a:t>사용 예시 · 연봉 안내 메일</a:t>
+              <a:t>기대 효과 · 유의점</a:t>
             </a:r>
           </a:p>
         </p:txBody>
@@ -5944,109 +6163,21 @@
                 </a:solidFill>
                 <a:latin typeface="Calibri"/>
               </a:rPr>
-              <a:t>작업본은 토큰, 최종본만 실명</a:t>
-            </a:r>
-          </a:p>
-        </p:txBody>
-      </p:sp>
-      <p:sp>
-        <p:nvSpPr>
-          <p:cNvPr id="5" name="Rectangle 4"/>
-          <p:cNvSpPr/>
-          <p:nvPr/>
-        </p:nvSpPr>
-        <p:spPr>
-          <a:xfrm>
-            <a:off x="640080" y="1737360"/>
-            <a:ext cx="5227167" cy="4480560"/>
-          </a:xfrm>
-          <a:prstGeom prst="rect">
-            <a:avLst/>
-          </a:prstGeom>
-          <a:solidFill>
-            <a:srgbClr val="F2F2F2"/>
-          </a:solidFill>
-          <a:ln>
-            <a:noFill/>
-          </a:ln>
-          <a:effectLst/>
-        </p:spPr>
-        <p:style>
-          <a:lnRef idx="1">
-            <a:schemeClr val="accent1"/>
-          </a:lnRef>
-          <a:fillRef idx="3">
-            <a:schemeClr val="accent1"/>
-          </a:fillRef>
-          <a:effectRef idx="2">
-            <a:schemeClr val="accent1"/>
-          </a:effectRef>
-          <a:fontRef idx="minor">
-            <a:schemeClr val="lt1"/>
-          </a:fontRef>
-        </p:style>
-        <p:txBody>
-          <a:bodyPr rtlCol="0" anchor="ctr"/>
-          <a:lstStyle/>
-          <a:p>
-            <a:pPr algn="ctr"/>
-          </a:p>
-        </p:txBody>
-      </p:sp>
-      <p:sp>
-        <p:nvSpPr>
-          <p:cNvPr id="6" name="Rectangle 5"/>
-          <p:cNvSpPr/>
-          <p:nvPr/>
-        </p:nvSpPr>
-        <p:spPr>
-          <a:xfrm>
-            <a:off x="640080" y="1737360"/>
-            <a:ext cx="5227167" cy="640080"/>
-          </a:xfrm>
-          <a:prstGeom prst="rect">
-            <a:avLst/>
-          </a:prstGeom>
-          <a:solidFill>
-            <a:srgbClr val="111111"/>
-          </a:solidFill>
-          <a:ln>
-            <a:noFill/>
-          </a:ln>
-          <a:effectLst/>
-        </p:spPr>
-        <p:style>
-          <a:lnRef idx="1">
-            <a:schemeClr val="accent1"/>
-          </a:lnRef>
-          <a:fillRef idx="3">
-            <a:schemeClr val="accent1"/>
-          </a:fillRef>
-          <a:effectRef idx="2">
-            <a:schemeClr val="accent1"/>
-          </a:effectRef>
-          <a:fontRef idx="minor">
-            <a:schemeClr val="lt1"/>
-          </a:fontRef>
-        </p:style>
-        <p:txBody>
-          <a:bodyPr rtlCol="0" anchor="ctr"/>
-          <a:lstStyle/>
-          <a:p>
-            <a:pPr algn="ctr"/>
-          </a:p>
-        </p:txBody>
-      </p:sp>
-      <p:sp>
-        <p:nvSpPr>
-          <p:cNvPr id="7" name="TextBox 6"/>
+              <a:t>인사팀에게 좋은 점, 그리고 알아둘 점</a:t>
+            </a:r>
+          </a:p>
+        </p:txBody>
+      </p:sp>
+      <p:sp>
+        <p:nvSpPr>
+          <p:cNvPr id="5" name="TextBox 4"/>
           <p:cNvSpPr txBox="1"/>
           <p:nvPr/>
         </p:nvSpPr>
         <p:spPr>
           <a:xfrm>
-            <a:off x="914400" y="1737360"/>
-            <a:ext cx="4678527" cy="640080"/>
+            <a:off x="640080" y="1554480"/>
+            <a:ext cx="10911535" cy="640080"/>
           </a:xfrm>
           <a:prstGeom prst="rect">
             <a:avLst/>
@@ -6054,38 +6185,38 @@
           <a:noFill/>
         </p:spPr>
         <p:txBody>
-          <a:bodyPr wrap="square" anchor="ctr" lIns="0" rIns="0" tIns="0" bIns="0">
+          <a:bodyPr wrap="square" anchor="t" lIns="0" rIns="0" tIns="0" bIns="0">
             <a:spAutoFit/>
           </a:bodyPr>
           <a:lstStyle/>
           <a:p>
             <a:pPr algn="l">
               <a:lnSpc>
-                <a:spcPct val="105000"/>
+                <a:spcPct val="110000"/>
               </a:lnSpc>
             </a:pPr>
             <a:r>
-              <a:rPr sz="2600" b="1" i="0">
-                <a:solidFill>
-                  <a:srgbClr val="FFFFFF"/>
+              <a:rPr sz="2400" b="0" i="1">
+                <a:solidFill>
+                  <a:srgbClr val="595959"/>
                 </a:solidFill>
                 <a:latin typeface="Calibri"/>
               </a:rPr>
-              <a:t>AI가 보는 작업본 (토큰)</a:t>
-            </a:r>
-          </a:p>
-        </p:txBody>
-      </p:sp>
-      <p:sp>
-        <p:nvSpPr>
-          <p:cNvPr id="8" name="TextBox 7"/>
+              <a:t>평소처럼 일하되, 신원은 가려진 채로.</a:t>
+            </a:r>
+          </a:p>
+        </p:txBody>
+      </p:sp>
+      <p:sp>
+        <p:nvSpPr>
+          <p:cNvPr id="6" name="TextBox 5"/>
           <p:cNvSpPr txBox="1"/>
           <p:nvPr/>
         </p:nvSpPr>
         <p:spPr>
           <a:xfrm>
-            <a:off x="914400" y="2606040"/>
-            <a:ext cx="4678527" cy="3383280"/>
+            <a:off x="640080" y="2286000"/>
+            <a:ext cx="10911535" cy="3931920"/>
           </a:xfrm>
           <a:prstGeom prst="rect">
             <a:avLst/>
@@ -6107,13 +6238,13 @@
               </a:spcAft>
             </a:pPr>
             <a:r>
-              <a:rPr sz="2200" b="0" i="0">
+              <a:rPr sz="2200" b="1" i="0">
                 <a:solidFill>
                   <a:srgbClr val="1A1A1A"/>
                 </a:solidFill>
                 <a:latin typeface="Calibri"/>
               </a:rPr>
-              <a:t>●  받는사람: [[NAME:17f2…]]</a:t>
+              <a:t>●  안전 — 식별자 AI 노출 0건 · 통계 가능 — 연봉·근태가 원본</a:t>
             </a:r>
           </a:p>
           <a:p>
@@ -6132,7 +6263,7 @@
                 </a:solidFill>
                 <a:latin typeface="Calibri"/>
               </a:rPr>
-              <a:t>●  2026년 확정 연봉은 3,194만원</a:t>
+              <a:t>●  간편 — 키 없이 '비식별화 → 재식별' 두 단계 · 문서(.txt/.md)도 지원</a:t>
             </a:r>
           </a:p>
           <a:p>
@@ -6151,159 +6282,9 @@
                 </a:solidFill>
                 <a:latin typeface="Calibri"/>
               </a:rPr>
-              <a:t>●  → 실제 이름·주민·계좌 없음</a:t>
-            </a:r>
-          </a:p>
-        </p:txBody>
-      </p:sp>
-      <p:sp>
-        <p:nvSpPr>
-          <p:cNvPr id="9" name="Rectangle 8"/>
-          <p:cNvSpPr/>
-          <p:nvPr/>
-        </p:nvSpPr>
-        <p:spPr>
-          <a:xfrm>
-            <a:off x="6324447" y="1737360"/>
-            <a:ext cx="5227167" cy="4480560"/>
-          </a:xfrm>
-          <a:prstGeom prst="rect">
-            <a:avLst/>
-          </a:prstGeom>
-          <a:solidFill>
-            <a:srgbClr val="F2F2F2"/>
-          </a:solidFill>
-          <a:ln>
-            <a:noFill/>
-          </a:ln>
-          <a:effectLst/>
-        </p:spPr>
-        <p:style>
-          <a:lnRef idx="1">
-            <a:schemeClr val="accent1"/>
-          </a:lnRef>
-          <a:fillRef idx="3">
-            <a:schemeClr val="accent1"/>
-          </a:fillRef>
-          <a:effectRef idx="2">
-            <a:schemeClr val="accent1"/>
-          </a:effectRef>
-          <a:fontRef idx="minor">
-            <a:schemeClr val="lt1"/>
-          </a:fontRef>
-        </p:style>
-        <p:txBody>
-          <a:bodyPr rtlCol="0" anchor="ctr"/>
-          <a:lstStyle/>
-          <a:p>
-            <a:pPr algn="ctr"/>
-          </a:p>
-        </p:txBody>
-      </p:sp>
-      <p:sp>
-        <p:nvSpPr>
-          <p:cNvPr id="10" name="Rectangle 9"/>
-          <p:cNvSpPr/>
-          <p:nvPr/>
-        </p:nvSpPr>
-        <p:spPr>
-          <a:xfrm>
-            <a:off x="6324447" y="1737360"/>
-            <a:ext cx="5227167" cy="640080"/>
-          </a:xfrm>
-          <a:prstGeom prst="rect">
-            <a:avLst/>
-          </a:prstGeom>
-          <a:solidFill>
-            <a:srgbClr val="2F5597"/>
-          </a:solidFill>
-          <a:ln>
-            <a:noFill/>
-          </a:ln>
-          <a:effectLst/>
-        </p:spPr>
-        <p:style>
-          <a:lnRef idx="1">
-            <a:schemeClr val="accent1"/>
-          </a:lnRef>
-          <a:fillRef idx="3">
-            <a:schemeClr val="accent1"/>
-          </a:fillRef>
-          <a:effectRef idx="2">
-            <a:schemeClr val="accent1"/>
-          </a:effectRef>
-          <a:fontRef idx="minor">
-            <a:schemeClr val="lt1"/>
-          </a:fontRef>
-        </p:style>
-        <p:txBody>
-          <a:bodyPr rtlCol="0" anchor="ctr"/>
-          <a:lstStyle/>
-          <a:p>
-            <a:pPr algn="ctr"/>
-          </a:p>
-        </p:txBody>
-      </p:sp>
-      <p:sp>
-        <p:nvSpPr>
-          <p:cNvPr id="11" name="TextBox 10"/>
-          <p:cNvSpPr txBox="1"/>
-          <p:nvPr/>
-        </p:nvSpPr>
-        <p:spPr>
-          <a:xfrm>
-            <a:off x="6598767" y="1737360"/>
-            <a:ext cx="4678527" cy="640080"/>
-          </a:xfrm>
-          <a:prstGeom prst="rect">
-            <a:avLst/>
-          </a:prstGeom>
-          <a:noFill/>
-        </p:spPr>
-        <p:txBody>
-          <a:bodyPr wrap="square" anchor="ctr" lIns="0" rIns="0" tIns="0" bIns="0">
-            <a:spAutoFit/>
-          </a:bodyPr>
-          <a:lstStyle/>
-          <a:p>
-            <a:pPr algn="l">
-              <a:lnSpc>
-                <a:spcPct val="105000"/>
-              </a:lnSpc>
-            </a:pPr>
-            <a:r>
-              <a:rPr sz="2600" b="1" i="0">
-                <a:solidFill>
-                  <a:srgbClr val="FFFFFF"/>
-                </a:solidFill>
-                <a:latin typeface="Calibri"/>
-              </a:rPr>
-              <a:t>담당자만 보는 최종본 (재식별)</a:t>
-            </a:r>
-          </a:p>
-        </p:txBody>
-      </p:sp>
-      <p:sp>
-        <p:nvSpPr>
-          <p:cNvPr id="12" name="TextBox 11"/>
-          <p:cNvSpPr txBox="1"/>
-          <p:nvPr/>
-        </p:nvSpPr>
-        <p:spPr>
-          <a:xfrm>
-            <a:off x="6598767" y="2606040"/>
-            <a:ext cx="4678527" cy="3383280"/>
-          </a:xfrm>
-          <a:prstGeom prst="rect">
-            <a:avLst/>
-          </a:prstGeom>
-          <a:noFill/>
-        </p:spPr>
-        <p:txBody>
-          <a:bodyPr wrap="square" anchor="t" lIns="0" rIns="0" tIns="0" bIns="0">
-            <a:spAutoFit/>
-          </a:bodyPr>
-          <a:lstStyle/>
+              <a:t>●  유의 — 숫자 값은 (이름과 분리된 채) 보입니다; 개별 숫자도 숨겨야 하면 집계값만 전달</a:t>
+            </a:r>
+          </a:p>
           <a:p>
             <a:pPr algn="l">
               <a:lnSpc>
@@ -6320,52 +6301,14 @@
                 </a:solidFill>
                 <a:latin typeface="Calibri"/>
               </a:rPr>
-              <a:t>●  받는사람: 신다은</a:t>
-            </a:r>
-          </a:p>
-          <a:p>
-            <a:pPr algn="l">
-              <a:lnSpc>
-                <a:spcPct val="110000"/>
-              </a:lnSpc>
-              <a:spcAft>
-                <a:spcPts val="1000"/>
-              </a:spcAft>
-            </a:pPr>
-            <a:r>
-              <a:rPr sz="2200" b="0" i="0">
-                <a:solidFill>
-                  <a:srgbClr val="1A1A1A"/>
-                </a:solidFill>
-                <a:latin typeface="Calibri"/>
-              </a:rPr>
-              <a:t>●  2026년 확정 연봉은 3,194만원</a:t>
-            </a:r>
-          </a:p>
-          <a:p>
-            <a:pPr algn="l">
-              <a:lnSpc>
-                <a:spcPct val="110000"/>
-              </a:lnSpc>
-              <a:spcAft>
-                <a:spcPts val="1000"/>
-              </a:spcAft>
-            </a:pPr>
-            <a:r>
-              <a:rPr sz="2200" b="0" i="0">
-                <a:solidFill>
-                  <a:srgbClr val="1A1A1A"/>
-                </a:solidFill>
-                <a:latin typeface="Calibri"/>
-              </a:rPr>
-              <a:t>●  → 인가된 담당자에게만</a:t>
-            </a:r>
-          </a:p>
-        </p:txBody>
-      </p:sp>
-      <p:sp>
-        <p:nvSpPr>
-          <p:cNvPr id="13" name="TextBox 12"/>
+              <a:t>●  유의 — 복원 대응표(map)는 평문이라 원본처럼 안전 보관 필요</a:t>
+            </a:r>
+          </a:p>
+        </p:txBody>
+      </p:sp>
+      <p:sp>
+        <p:nvSpPr>
+          <p:cNvPr id="7" name="TextBox 6"/>
           <p:cNvSpPr txBox="1"/>
           <p:nvPr/>
         </p:nvSpPr>
@@ -6404,7 +6347,7 @@
       </p:sp>
       <p:sp>
         <p:nvSpPr>
-          <p:cNvPr id="14" name="TextBox 13"/>
+          <p:cNvPr id="8" name="TextBox 7"/>
           <p:cNvSpPr txBox="1"/>
           <p:nvPr/>
         </p:nvSpPr>
@@ -6443,7 +6386,7 @@
       </p:sp>
       <p:sp>
         <p:nvSpPr>
-          <p:cNvPr id="15" name="TextBox 14"/>
+          <p:cNvPr id="9" name="TextBox 8"/>
           <p:cNvSpPr txBox="1"/>
           <p:nvPr/>
         </p:nvSpPr>
@@ -6507,7 +6450,7 @@
         <p:spPr>
           <a:xfrm>
             <a:off x="0" y="0"/>
-            <a:ext cx="12191695" cy="914400"/>
+            <a:ext cx="12191695" cy="6858000"/>
           </a:xfrm>
           <a:prstGeom prst="rect">
             <a:avLst/>
@@ -6544,175 +6487,14 @@
       </p:sp>
       <p:sp>
         <p:nvSpPr>
-          <p:cNvPr id="3" name="TextBox 2"/>
-          <p:cNvSpPr txBox="1"/>
-          <p:nvPr/>
-        </p:nvSpPr>
-        <p:spPr>
-          <a:xfrm>
-            <a:off x="640080" y="118872"/>
-            <a:ext cx="8168335" cy="219456"/>
-          </a:xfrm>
-          <a:prstGeom prst="rect">
-            <a:avLst/>
-          </a:prstGeom>
-          <a:noFill/>
-        </p:spPr>
-        <p:txBody>
-          <a:bodyPr wrap="square" anchor="t" lIns="0" rIns="0" tIns="0" bIns="0">
-            <a:spAutoFit/>
-          </a:bodyPr>
-          <a:lstStyle/>
-          <a:p>
-            <a:pPr algn="l">
-              <a:lnSpc>
-                <a:spcPct val="105000"/>
-              </a:lnSpc>
-            </a:pPr>
-            <a:r>
-              <a:rPr sz="1100" b="1" i="0">
-                <a:solidFill>
-                  <a:srgbClr val="FFFFFF"/>
-                </a:solidFill>
-                <a:latin typeface="Calibri"/>
-              </a:rPr>
-              <a:t>검증 결과</a:t>
-            </a:r>
-          </a:p>
-        </p:txBody>
-      </p:sp>
-      <p:sp>
-        <p:nvSpPr>
-          <p:cNvPr id="4" name="TextBox 3"/>
-          <p:cNvSpPr txBox="1"/>
-          <p:nvPr/>
-        </p:nvSpPr>
-        <p:spPr>
-          <a:xfrm>
-            <a:off x="640080" y="347472"/>
-            <a:ext cx="8168335" cy="493776"/>
-          </a:xfrm>
-          <a:prstGeom prst="rect">
-            <a:avLst/>
-          </a:prstGeom>
-          <a:noFill/>
-        </p:spPr>
-        <p:txBody>
-          <a:bodyPr wrap="square" anchor="t" lIns="0" rIns="0" tIns="0" bIns="0">
-            <a:spAutoFit/>
-          </a:bodyPr>
-          <a:lstStyle/>
-          <a:p>
-            <a:pPr algn="l">
-              <a:lnSpc>
-                <a:spcPct val="105000"/>
-              </a:lnSpc>
-            </a:pPr>
-            <a:r>
-              <a:rPr sz="3000" b="1" i="0">
-                <a:solidFill>
-                  <a:srgbClr val="FFFFFF"/>
-                </a:solidFill>
-                <a:latin typeface="Calibri"/>
-              </a:rPr>
-              <a:t>통계도, 개인별 업무도 — 누출 없이 둘 다</a:t>
-            </a:r>
-          </a:p>
-        </p:txBody>
-      </p:sp>
-      <p:sp>
-        <p:nvSpPr>
-          <p:cNvPr id="5" name="TextBox 4"/>
-          <p:cNvSpPr txBox="1"/>
-          <p:nvPr/>
-        </p:nvSpPr>
-        <p:spPr>
-          <a:xfrm>
-            <a:off x="640080" y="1024128"/>
-            <a:ext cx="10911535" cy="457200"/>
-          </a:xfrm>
-          <a:prstGeom prst="rect">
-            <a:avLst/>
-          </a:prstGeom>
-          <a:noFill/>
-        </p:spPr>
-        <p:txBody>
-          <a:bodyPr wrap="square" anchor="t" lIns="0" rIns="0" tIns="0" bIns="0">
-            <a:spAutoFit/>
-          </a:bodyPr>
-          <a:lstStyle/>
-          <a:p>
-            <a:pPr algn="l">
-              <a:lnSpc>
-                <a:spcPct val="105000"/>
-              </a:lnSpc>
-            </a:pPr>
-            <a:r>
-              <a:rPr sz="2600" b="0" i="1">
-                <a:solidFill>
-                  <a:srgbClr val="595959"/>
-                </a:solidFill>
-                <a:latin typeface="Calibri"/>
-              </a:rPr>
-              <a:t>다양한 데이터·시나리오를 실제로 돌려 확인</a:t>
-            </a:r>
-          </a:p>
-        </p:txBody>
-      </p:sp>
-      <p:sp>
-        <p:nvSpPr>
-          <p:cNvPr id="6" name="Rectangle 5"/>
+          <p:cNvPr id="3" name="Rectangle 2"/>
           <p:cNvSpPr/>
           <p:nvPr/>
         </p:nvSpPr>
         <p:spPr>
           <a:xfrm>
-            <a:off x="640080" y="2103120"/>
-            <a:ext cx="2453563" cy="2560320"/>
-          </a:xfrm>
-          <a:prstGeom prst="rect">
-            <a:avLst/>
-          </a:prstGeom>
-          <a:solidFill>
-            <a:srgbClr val="F2F2F2"/>
-          </a:solidFill>
-          <a:ln>
-            <a:noFill/>
-          </a:ln>
-          <a:effectLst/>
-        </p:spPr>
-        <p:style>
-          <a:lnRef idx="1">
-            <a:schemeClr val="accent1"/>
-          </a:lnRef>
-          <a:fillRef idx="3">
-            <a:schemeClr val="accent1"/>
-          </a:fillRef>
-          <a:effectRef idx="2">
-            <a:schemeClr val="accent1"/>
-          </a:effectRef>
-          <a:fontRef idx="minor">
-            <a:schemeClr val="lt1"/>
-          </a:fontRef>
-        </p:style>
-        <p:txBody>
-          <a:bodyPr rtlCol="0" anchor="ctr"/>
-          <a:lstStyle/>
-          <a:p>
-            <a:pPr algn="ctr"/>
-          </a:p>
-        </p:txBody>
-      </p:sp>
-      <p:sp>
-        <p:nvSpPr>
-          <p:cNvPr id="7" name="Rectangle 6"/>
-          <p:cNvSpPr/>
-          <p:nvPr/>
-        </p:nvSpPr>
-        <p:spPr>
-          <a:xfrm>
-            <a:off x="640080" y="2103120"/>
-            <a:ext cx="2453563" cy="109728"/>
+            <a:off x="0" y="6492240"/>
+            <a:ext cx="12191695" cy="365760"/>
           </a:xfrm>
           <a:prstGeom prst="rect">
             <a:avLst/>
@@ -6749,14 +6531,14 @@
       </p:sp>
       <p:sp>
         <p:nvSpPr>
-          <p:cNvPr id="8" name="TextBox 7"/>
+          <p:cNvPr id="4" name="TextBox 3"/>
           <p:cNvSpPr txBox="1"/>
           <p:nvPr/>
         </p:nvSpPr>
         <p:spPr>
           <a:xfrm>
-            <a:off x="640080" y="2560320"/>
-            <a:ext cx="2453563" cy="1005840"/>
+            <a:off x="640080" y="2377440"/>
+            <a:ext cx="10911535" cy="1463040"/>
           </a:xfrm>
           <a:prstGeom prst="rect">
             <a:avLst/>
@@ -6775,27 +6557,27 @@
               </a:lnSpc>
             </a:pPr>
             <a:r>
-              <a:rPr sz="4800" b="1" i="0">
-                <a:solidFill>
-                  <a:srgbClr val="111111"/>
+              <a:rPr sz="5000" b="1" i="0">
+                <a:solidFill>
+                  <a:srgbClr val="FFFFFF"/>
                 </a:solidFill>
                 <a:latin typeface="Calibri"/>
               </a:rPr>
-              <a:t>0건</a:t>
-            </a:r>
-          </a:p>
-        </p:txBody>
-      </p:sp>
-      <p:sp>
-        <p:nvSpPr>
-          <p:cNvPr id="9" name="TextBox 8"/>
+              <a:t>시작하기</a:t>
+            </a:r>
+          </a:p>
+        </p:txBody>
+      </p:sp>
+      <p:sp>
+        <p:nvSpPr>
+          <p:cNvPr id="5" name="TextBox 4"/>
           <p:cNvSpPr txBox="1"/>
           <p:nvPr/>
         </p:nvSpPr>
         <p:spPr>
           <a:xfrm>
-            <a:off x="640080" y="3611880"/>
-            <a:ext cx="2453563" cy="457200"/>
+            <a:off x="640080" y="3931920"/>
+            <a:ext cx="10911535" cy="1097280"/>
           </a:xfrm>
           <a:prstGeom prst="rect">
             <a:avLst/>
@@ -6810,1766 +6592,17 @@
           <a:p>
             <a:pPr algn="ctr">
               <a:lnSpc>
-                <a:spcPct val="105000"/>
+                <a:spcPct val="120000"/>
               </a:lnSpc>
             </a:pPr>
             <a:r>
-              <a:rPr sz="2200" b="1" i="0">
-                <a:solidFill>
-                  <a:srgbClr val="1A1A1A"/>
+              <a:rPr sz="2400" b="0" i="0">
+                <a:solidFill>
+                  <a:srgbClr val="FFFFFF"/>
                 </a:solidFill>
                 <a:latin typeface="Calibri"/>
               </a:rPr>
-              <a:t>식별자 누출</a:t>
-            </a:r>
-          </a:p>
-        </p:txBody>
-      </p:sp>
-      <p:sp>
-        <p:nvSpPr>
-          <p:cNvPr id="10" name="TextBox 9"/>
-          <p:cNvSpPr txBox="1"/>
-          <p:nvPr/>
-        </p:nvSpPr>
-        <p:spPr>
-          <a:xfrm>
-            <a:off x="822960" y="4023360"/>
-            <a:ext cx="2087803" cy="548640"/>
-          </a:xfrm>
-          <a:prstGeom prst="rect">
-            <a:avLst/>
-          </a:prstGeom>
-          <a:noFill/>
-        </p:spPr>
-        <p:txBody>
-          <a:bodyPr wrap="square" anchor="t" lIns="0" rIns="0" tIns="0" bIns="0">
-            <a:spAutoFit/>
-          </a:bodyPr>
-          <a:lstStyle/>
-          <a:p>
-            <a:pPr algn="ctr">
-              <a:lnSpc>
-                <a:spcPct val="100000"/>
-              </a:lnSpc>
-            </a:pPr>
-            <a:r>
-              <a:rPr sz="1200" b="0" i="0">
-                <a:solidFill>
-                  <a:srgbClr val="7F7F7F"/>
-                </a:solidFill>
-                <a:latin typeface="Calibri"/>
-              </a:rPr>
-              <a:t>작업 내내</a:t>
-            </a:r>
-          </a:p>
-        </p:txBody>
-      </p:sp>
-      <p:sp>
-        <p:nvSpPr>
-          <p:cNvPr id="11" name="Rectangle 10"/>
-          <p:cNvSpPr/>
-          <p:nvPr/>
-        </p:nvSpPr>
-        <p:spPr>
-          <a:xfrm>
-            <a:off x="3459403" y="2103120"/>
-            <a:ext cx="2453563" cy="2560320"/>
-          </a:xfrm>
-          <a:prstGeom prst="rect">
-            <a:avLst/>
-          </a:prstGeom>
-          <a:solidFill>
-            <a:srgbClr val="F2F2F2"/>
-          </a:solidFill>
-          <a:ln>
-            <a:noFill/>
-          </a:ln>
-          <a:effectLst/>
-        </p:spPr>
-        <p:style>
-          <a:lnRef idx="1">
-            <a:schemeClr val="accent1"/>
-          </a:lnRef>
-          <a:fillRef idx="3">
-            <a:schemeClr val="accent1"/>
-          </a:fillRef>
-          <a:effectRef idx="2">
-            <a:schemeClr val="accent1"/>
-          </a:effectRef>
-          <a:fontRef idx="minor">
-            <a:schemeClr val="lt1"/>
-          </a:fontRef>
-        </p:style>
-        <p:txBody>
-          <a:bodyPr rtlCol="0" anchor="ctr"/>
-          <a:lstStyle/>
-          <a:p>
-            <a:pPr algn="ctr"/>
-          </a:p>
-        </p:txBody>
-      </p:sp>
-      <p:sp>
-        <p:nvSpPr>
-          <p:cNvPr id="12" name="Rectangle 11"/>
-          <p:cNvSpPr/>
-          <p:nvPr/>
-        </p:nvSpPr>
-        <p:spPr>
-          <a:xfrm>
-            <a:off x="3459403" y="2103120"/>
-            <a:ext cx="2453563" cy="109728"/>
-          </a:xfrm>
-          <a:prstGeom prst="rect">
-            <a:avLst/>
-          </a:prstGeom>
-          <a:solidFill>
-            <a:srgbClr val="2F5597"/>
-          </a:solidFill>
-          <a:ln>
-            <a:noFill/>
-          </a:ln>
-          <a:effectLst/>
-        </p:spPr>
-        <p:style>
-          <a:lnRef idx="1">
-            <a:schemeClr val="accent1"/>
-          </a:lnRef>
-          <a:fillRef idx="3">
-            <a:schemeClr val="accent1"/>
-          </a:fillRef>
-          <a:effectRef idx="2">
-            <a:schemeClr val="accent1"/>
-          </a:effectRef>
-          <a:fontRef idx="minor">
-            <a:schemeClr val="lt1"/>
-          </a:fontRef>
-        </p:style>
-        <p:txBody>
-          <a:bodyPr rtlCol="0" anchor="ctr"/>
-          <a:lstStyle/>
-          <a:p>
-            <a:pPr algn="ctr"/>
-          </a:p>
-        </p:txBody>
-      </p:sp>
-      <p:sp>
-        <p:nvSpPr>
-          <p:cNvPr id="13" name="TextBox 12"/>
-          <p:cNvSpPr txBox="1"/>
-          <p:nvPr/>
-        </p:nvSpPr>
-        <p:spPr>
-          <a:xfrm>
-            <a:off x="3459403" y="2560320"/>
-            <a:ext cx="2453563" cy="1005840"/>
-          </a:xfrm>
-          <a:prstGeom prst="rect">
-            <a:avLst/>
-          </a:prstGeom>
-          <a:noFill/>
-        </p:spPr>
-        <p:txBody>
-          <a:bodyPr wrap="square" anchor="t" lIns="0" rIns="0" tIns="0" bIns="0">
-            <a:spAutoFit/>
-          </a:bodyPr>
-          <a:lstStyle/>
-          <a:p>
-            <a:pPr algn="ctr">
-              <a:lnSpc>
-                <a:spcPct val="105000"/>
-              </a:lnSpc>
-            </a:pPr>
-            <a:r>
-              <a:rPr sz="4800" b="1" i="0">
-                <a:solidFill>
-                  <a:srgbClr val="111111"/>
-                </a:solidFill>
-                <a:latin typeface="Calibri"/>
-              </a:rPr>
-              <a:t>24/24</a:t>
-            </a:r>
-          </a:p>
-        </p:txBody>
-      </p:sp>
-      <p:sp>
-        <p:nvSpPr>
-          <p:cNvPr id="14" name="TextBox 13"/>
-          <p:cNvSpPr txBox="1"/>
-          <p:nvPr/>
-        </p:nvSpPr>
-        <p:spPr>
-          <a:xfrm>
-            <a:off x="3459403" y="3611880"/>
-            <a:ext cx="2453563" cy="457200"/>
-          </a:xfrm>
-          <a:prstGeom prst="rect">
-            <a:avLst/>
-          </a:prstGeom>
-          <a:noFill/>
-        </p:spPr>
-        <p:txBody>
-          <a:bodyPr wrap="square" anchor="t" lIns="0" rIns="0" tIns="0" bIns="0">
-            <a:spAutoFit/>
-          </a:bodyPr>
-          <a:lstStyle/>
-          <a:p>
-            <a:pPr algn="ctr">
-              <a:lnSpc>
-                <a:spcPct val="105000"/>
-              </a:lnSpc>
-            </a:pPr>
-            <a:r>
-              <a:rPr sz="2200" b="1" i="0">
-                <a:solidFill>
-                  <a:srgbClr val="1A1A1A"/>
-                </a:solidFill>
-                <a:latin typeface="Calibri"/>
-              </a:rPr>
-              <a:t>시나리오 통과</a:t>
-            </a:r>
-          </a:p>
-        </p:txBody>
-      </p:sp>
-      <p:sp>
-        <p:nvSpPr>
-          <p:cNvPr id="15" name="TextBox 14"/>
-          <p:cNvSpPr txBox="1"/>
-          <p:nvPr/>
-        </p:nvSpPr>
-        <p:spPr>
-          <a:xfrm>
-            <a:off x="3642283" y="4023360"/>
-            <a:ext cx="2087803" cy="548640"/>
-          </a:xfrm>
-          <a:prstGeom prst="rect">
-            <a:avLst/>
-          </a:prstGeom>
-          <a:noFill/>
-        </p:spPr>
-        <p:txBody>
-          <a:bodyPr wrap="square" anchor="t" lIns="0" rIns="0" tIns="0" bIns="0">
-            <a:spAutoFit/>
-          </a:bodyPr>
-          <a:lstStyle/>
-          <a:p>
-            <a:pPr algn="ctr">
-              <a:lnSpc>
-                <a:spcPct val="100000"/>
-              </a:lnSpc>
-            </a:pPr>
-            <a:r>
-              <a:rPr sz="1200" b="0" i="0">
-                <a:solidFill>
-                  <a:srgbClr val="7F7F7F"/>
-                </a:solidFill>
-                <a:latin typeface="Calibri"/>
-              </a:rPr>
-              <a:t>통계 + HR 업무</a:t>
-            </a:r>
-          </a:p>
-        </p:txBody>
-      </p:sp>
-      <p:sp>
-        <p:nvSpPr>
-          <p:cNvPr id="16" name="Rectangle 15"/>
-          <p:cNvSpPr/>
-          <p:nvPr/>
-        </p:nvSpPr>
-        <p:spPr>
-          <a:xfrm>
-            <a:off x="6278727" y="2103120"/>
-            <a:ext cx="2453563" cy="2560320"/>
-          </a:xfrm>
-          <a:prstGeom prst="rect">
-            <a:avLst/>
-          </a:prstGeom>
-          <a:solidFill>
-            <a:srgbClr val="F2F2F2"/>
-          </a:solidFill>
-          <a:ln>
-            <a:noFill/>
-          </a:ln>
-          <a:effectLst/>
-        </p:spPr>
-        <p:style>
-          <a:lnRef idx="1">
-            <a:schemeClr val="accent1"/>
-          </a:lnRef>
-          <a:fillRef idx="3">
-            <a:schemeClr val="accent1"/>
-          </a:fillRef>
-          <a:effectRef idx="2">
-            <a:schemeClr val="accent1"/>
-          </a:effectRef>
-          <a:fontRef idx="minor">
-            <a:schemeClr val="lt1"/>
-          </a:fontRef>
-        </p:style>
-        <p:txBody>
-          <a:bodyPr rtlCol="0" anchor="ctr"/>
-          <a:lstStyle/>
-          <a:p>
-            <a:pPr algn="ctr"/>
-          </a:p>
-        </p:txBody>
-      </p:sp>
-      <p:sp>
-        <p:nvSpPr>
-          <p:cNvPr id="17" name="Rectangle 16"/>
-          <p:cNvSpPr/>
-          <p:nvPr/>
-        </p:nvSpPr>
-        <p:spPr>
-          <a:xfrm>
-            <a:off x="6278727" y="2103120"/>
-            <a:ext cx="2453563" cy="109728"/>
-          </a:xfrm>
-          <a:prstGeom prst="rect">
-            <a:avLst/>
-          </a:prstGeom>
-          <a:solidFill>
-            <a:srgbClr val="2F5597"/>
-          </a:solidFill>
-          <a:ln>
-            <a:noFill/>
-          </a:ln>
-          <a:effectLst/>
-        </p:spPr>
-        <p:style>
-          <a:lnRef idx="1">
-            <a:schemeClr val="accent1"/>
-          </a:lnRef>
-          <a:fillRef idx="3">
-            <a:schemeClr val="accent1"/>
-          </a:fillRef>
-          <a:effectRef idx="2">
-            <a:schemeClr val="accent1"/>
-          </a:effectRef>
-          <a:fontRef idx="minor">
-            <a:schemeClr val="lt1"/>
-          </a:fontRef>
-        </p:style>
-        <p:txBody>
-          <a:bodyPr rtlCol="0" anchor="ctr"/>
-          <a:lstStyle/>
-          <a:p>
-            <a:pPr algn="ctr"/>
-          </a:p>
-        </p:txBody>
-      </p:sp>
-      <p:sp>
-        <p:nvSpPr>
-          <p:cNvPr id="18" name="TextBox 17"/>
-          <p:cNvSpPr txBox="1"/>
-          <p:nvPr/>
-        </p:nvSpPr>
-        <p:spPr>
-          <a:xfrm>
-            <a:off x="6278727" y="2560320"/>
-            <a:ext cx="2453563" cy="1005840"/>
-          </a:xfrm>
-          <a:prstGeom prst="rect">
-            <a:avLst/>
-          </a:prstGeom>
-          <a:noFill/>
-        </p:spPr>
-        <p:txBody>
-          <a:bodyPr wrap="square" anchor="t" lIns="0" rIns="0" tIns="0" bIns="0">
-            <a:spAutoFit/>
-          </a:bodyPr>
-          <a:lstStyle/>
-          <a:p>
-            <a:pPr algn="ctr">
-              <a:lnSpc>
-                <a:spcPct val="105000"/>
-              </a:lnSpc>
-            </a:pPr>
-            <a:r>
-              <a:rPr sz="4800" b="1" i="0">
-                <a:solidFill>
-                  <a:srgbClr val="111111"/>
-                </a:solidFill>
-                <a:latin typeface="Calibri"/>
-              </a:rPr>
-              <a:t>100%</a:t>
-            </a:r>
-          </a:p>
-        </p:txBody>
-      </p:sp>
-      <p:sp>
-        <p:nvSpPr>
-          <p:cNvPr id="19" name="TextBox 18"/>
-          <p:cNvSpPr txBox="1"/>
-          <p:nvPr/>
-        </p:nvSpPr>
-        <p:spPr>
-          <a:xfrm>
-            <a:off x="6278727" y="3611880"/>
-            <a:ext cx="2453563" cy="457200"/>
-          </a:xfrm>
-          <a:prstGeom prst="rect">
-            <a:avLst/>
-          </a:prstGeom>
-          <a:noFill/>
-        </p:spPr>
-        <p:txBody>
-          <a:bodyPr wrap="square" anchor="t" lIns="0" rIns="0" tIns="0" bIns="0">
-            <a:spAutoFit/>
-          </a:bodyPr>
-          <a:lstStyle/>
-          <a:p>
-            <a:pPr algn="ctr">
-              <a:lnSpc>
-                <a:spcPct val="105000"/>
-              </a:lnSpc>
-            </a:pPr>
-            <a:r>
-              <a:rPr sz="2200" b="1" i="0">
-                <a:solidFill>
-                  <a:srgbClr val="1A1A1A"/>
-                </a:solidFill>
-                <a:latin typeface="Calibri"/>
-              </a:rPr>
-              <a:t>통계 정확도</a:t>
-            </a:r>
-          </a:p>
-        </p:txBody>
-      </p:sp>
-      <p:sp>
-        <p:nvSpPr>
-          <p:cNvPr id="20" name="TextBox 19"/>
-          <p:cNvSpPr txBox="1"/>
-          <p:nvPr/>
-        </p:nvSpPr>
-        <p:spPr>
-          <a:xfrm>
-            <a:off x="6461607" y="4023360"/>
-            <a:ext cx="2087803" cy="548640"/>
-          </a:xfrm>
-          <a:prstGeom prst="rect">
-            <a:avLst/>
-          </a:prstGeom>
-          <a:noFill/>
-        </p:spPr>
-        <p:txBody>
-          <a:bodyPr wrap="square" anchor="t" lIns="0" rIns="0" tIns="0" bIns="0">
-            <a:spAutoFit/>
-          </a:bodyPr>
-          <a:lstStyle/>
-          <a:p>
-            <a:pPr algn="ctr">
-              <a:lnSpc>
-                <a:spcPct val="100000"/>
-              </a:lnSpc>
-            </a:pPr>
-            <a:r>
-              <a:rPr sz="1200" b="0" i="0">
-                <a:solidFill>
-                  <a:srgbClr val="7F7F7F"/>
-                </a:solidFill>
-                <a:latin typeface="Calibri"/>
-              </a:rPr>
-              <a:t>비식별 파일서 직접 산출</a:t>
-            </a:r>
-          </a:p>
-        </p:txBody>
-      </p:sp>
-      <p:sp>
-        <p:nvSpPr>
-          <p:cNvPr id="21" name="Rectangle 20"/>
-          <p:cNvSpPr/>
-          <p:nvPr/>
-        </p:nvSpPr>
-        <p:spPr>
-          <a:xfrm>
-            <a:off x="9098051" y="2103120"/>
-            <a:ext cx="2453563" cy="2560320"/>
-          </a:xfrm>
-          <a:prstGeom prst="rect">
-            <a:avLst/>
-          </a:prstGeom>
-          <a:solidFill>
-            <a:srgbClr val="F2F2F2"/>
-          </a:solidFill>
-          <a:ln>
-            <a:noFill/>
-          </a:ln>
-          <a:effectLst/>
-        </p:spPr>
-        <p:style>
-          <a:lnRef idx="1">
-            <a:schemeClr val="accent1"/>
-          </a:lnRef>
-          <a:fillRef idx="3">
-            <a:schemeClr val="accent1"/>
-          </a:fillRef>
-          <a:effectRef idx="2">
-            <a:schemeClr val="accent1"/>
-          </a:effectRef>
-          <a:fontRef idx="minor">
-            <a:schemeClr val="lt1"/>
-          </a:fontRef>
-        </p:style>
-        <p:txBody>
-          <a:bodyPr rtlCol="0" anchor="ctr"/>
-          <a:lstStyle/>
-          <a:p>
-            <a:pPr algn="ctr"/>
-          </a:p>
-        </p:txBody>
-      </p:sp>
-      <p:sp>
-        <p:nvSpPr>
-          <p:cNvPr id="22" name="Rectangle 21"/>
-          <p:cNvSpPr/>
-          <p:nvPr/>
-        </p:nvSpPr>
-        <p:spPr>
-          <a:xfrm>
-            <a:off x="9098051" y="2103120"/>
-            <a:ext cx="2453563" cy="109728"/>
-          </a:xfrm>
-          <a:prstGeom prst="rect">
-            <a:avLst/>
-          </a:prstGeom>
-          <a:solidFill>
-            <a:srgbClr val="2F5597"/>
-          </a:solidFill>
-          <a:ln>
-            <a:noFill/>
-          </a:ln>
-          <a:effectLst/>
-        </p:spPr>
-        <p:style>
-          <a:lnRef idx="1">
-            <a:schemeClr val="accent1"/>
-          </a:lnRef>
-          <a:fillRef idx="3">
-            <a:schemeClr val="accent1"/>
-          </a:fillRef>
-          <a:effectRef idx="2">
-            <a:schemeClr val="accent1"/>
-          </a:effectRef>
-          <a:fontRef idx="minor">
-            <a:schemeClr val="lt1"/>
-          </a:fontRef>
-        </p:style>
-        <p:txBody>
-          <a:bodyPr rtlCol="0" anchor="ctr"/>
-          <a:lstStyle/>
-          <a:p>
-            <a:pPr algn="ctr"/>
-          </a:p>
-        </p:txBody>
-      </p:sp>
-      <p:sp>
-        <p:nvSpPr>
-          <p:cNvPr id="23" name="TextBox 22"/>
-          <p:cNvSpPr txBox="1"/>
-          <p:nvPr/>
-        </p:nvSpPr>
-        <p:spPr>
-          <a:xfrm>
-            <a:off x="9098051" y="2560320"/>
-            <a:ext cx="2453563" cy="1005840"/>
-          </a:xfrm>
-          <a:prstGeom prst="rect">
-            <a:avLst/>
-          </a:prstGeom>
-          <a:noFill/>
-        </p:spPr>
-        <p:txBody>
-          <a:bodyPr wrap="square" anchor="t" lIns="0" rIns="0" tIns="0" bIns="0">
-            <a:spAutoFit/>
-          </a:bodyPr>
-          <a:lstStyle/>
-          <a:p>
-            <a:pPr algn="ctr">
-              <a:lnSpc>
-                <a:spcPct val="105000"/>
-              </a:lnSpc>
-            </a:pPr>
-            <a:r>
-              <a:rPr sz="4800" b="1" i="0">
-                <a:solidFill>
-                  <a:srgbClr val="111111"/>
-                </a:solidFill>
-                <a:latin typeface="Calibri"/>
-              </a:rPr>
-              <a:t>250명+</a:t>
-            </a:r>
-          </a:p>
-        </p:txBody>
-      </p:sp>
-      <p:sp>
-        <p:nvSpPr>
-          <p:cNvPr id="24" name="TextBox 23"/>
-          <p:cNvSpPr txBox="1"/>
-          <p:nvPr/>
-        </p:nvSpPr>
-        <p:spPr>
-          <a:xfrm>
-            <a:off x="9098051" y="3611880"/>
-            <a:ext cx="2453563" cy="457200"/>
-          </a:xfrm>
-          <a:prstGeom prst="rect">
-            <a:avLst/>
-          </a:prstGeom>
-          <a:noFill/>
-        </p:spPr>
-        <p:txBody>
-          <a:bodyPr wrap="square" anchor="t" lIns="0" rIns="0" tIns="0" bIns="0">
-            <a:spAutoFit/>
-          </a:bodyPr>
-          <a:lstStyle/>
-          <a:p>
-            <a:pPr algn="ctr">
-              <a:lnSpc>
-                <a:spcPct val="105000"/>
-              </a:lnSpc>
-            </a:pPr>
-            <a:r>
-              <a:rPr sz="2200" b="1" i="0">
-                <a:solidFill>
-                  <a:srgbClr val="1A1A1A"/>
-                </a:solidFill>
-                <a:latin typeface="Calibri"/>
-              </a:rPr>
-              <a:t>검증 데이터</a:t>
-            </a:r>
-          </a:p>
-        </p:txBody>
-      </p:sp>
-      <p:sp>
-        <p:nvSpPr>
-          <p:cNvPr id="25" name="TextBox 24"/>
-          <p:cNvSpPr txBox="1"/>
-          <p:nvPr/>
-        </p:nvSpPr>
-        <p:spPr>
-          <a:xfrm>
-            <a:off x="9280931" y="4023360"/>
-            <a:ext cx="2087803" cy="548640"/>
-          </a:xfrm>
-          <a:prstGeom prst="rect">
-            <a:avLst/>
-          </a:prstGeom>
-          <a:noFill/>
-        </p:spPr>
-        <p:txBody>
-          <a:bodyPr wrap="square" anchor="t" lIns="0" rIns="0" tIns="0" bIns="0">
-            <a:spAutoFit/>
-          </a:bodyPr>
-          <a:lstStyle/>
-          <a:p>
-            <a:pPr algn="ctr">
-              <a:lnSpc>
-                <a:spcPct val="100000"/>
-              </a:lnSpc>
-            </a:pPr>
-            <a:r>
-              <a:rPr sz="1200" b="0" i="0">
-                <a:solidFill>
-                  <a:srgbClr val="7F7F7F"/>
-                </a:solidFill>
-                <a:latin typeface="Calibri"/>
-              </a:rPr>
-              <a:t>다른 규모·문서 포함</a:t>
-            </a:r>
-          </a:p>
-        </p:txBody>
-      </p:sp>
-      <p:sp>
-        <p:nvSpPr>
-          <p:cNvPr id="26" name="TextBox 25"/>
-          <p:cNvSpPr txBox="1"/>
-          <p:nvPr/>
-        </p:nvSpPr>
-        <p:spPr>
-          <a:xfrm>
-            <a:off x="640080" y="6400800"/>
-            <a:ext cx="9997135" cy="274320"/>
-          </a:xfrm>
-          <a:prstGeom prst="rect">
-            <a:avLst/>
-          </a:prstGeom>
-          <a:noFill/>
-        </p:spPr>
-        <p:txBody>
-          <a:bodyPr wrap="square" anchor="t" lIns="0" rIns="0" tIns="0" bIns="0">
-            <a:spAutoFit/>
-          </a:bodyPr>
-          <a:lstStyle/>
-          <a:p>
-            <a:pPr algn="l">
-              <a:lnSpc>
-                <a:spcPct val="105000"/>
-              </a:lnSpc>
-            </a:pPr>
-            <a:r>
-              <a:rPr sz="1000" b="0" i="0">
-                <a:solidFill>
-                  <a:srgbClr val="7F7F7F"/>
-                </a:solidFill>
-                <a:latin typeface="Calibri"/>
-              </a:rPr>
-              <a:t>대외비 · Confidential · 인사팀 대상 설명자료</a:t>
-            </a:r>
-          </a:p>
-        </p:txBody>
-      </p:sp>
-      <p:sp>
-        <p:nvSpPr>
-          <p:cNvPr id="27" name="TextBox 26"/>
-          <p:cNvSpPr txBox="1"/>
-          <p:nvPr/>
-        </p:nvSpPr>
-        <p:spPr>
-          <a:xfrm>
-            <a:off x="10454335" y="6291072"/>
-            <a:ext cx="1097280" cy="384048"/>
-          </a:xfrm>
-          <a:prstGeom prst="rect">
-            <a:avLst/>
-          </a:prstGeom>
-          <a:noFill/>
-        </p:spPr>
-        <p:txBody>
-          <a:bodyPr wrap="square" anchor="t" lIns="0" rIns="0" tIns="0" bIns="0">
-            <a:spAutoFit/>
-          </a:bodyPr>
-          <a:lstStyle/>
-          <a:p>
-            <a:pPr algn="r">
-              <a:lnSpc>
-                <a:spcPct val="105000"/>
-              </a:lnSpc>
-            </a:pPr>
-            <a:r>
-              <a:rPr sz="1600" b="0" i="0">
-                <a:solidFill>
-                  <a:srgbClr val="7F7F7F"/>
-                </a:solidFill>
-                <a:latin typeface="Calibri"/>
-              </a:rPr>
-              <a:t>7</a:t>
-            </a:r>
-          </a:p>
-        </p:txBody>
-      </p:sp>
-      <p:sp>
-        <p:nvSpPr>
-          <p:cNvPr id="28" name="TextBox 27"/>
-          <p:cNvSpPr txBox="1"/>
-          <p:nvPr/>
-        </p:nvSpPr>
-        <p:spPr>
-          <a:xfrm>
-            <a:off x="8808415" y="182880"/>
-            <a:ext cx="2743200" cy="548640"/>
-          </a:xfrm>
-          <a:prstGeom prst="rect">
-            <a:avLst/>
-          </a:prstGeom>
-          <a:noFill/>
-        </p:spPr>
-        <p:txBody>
-          <a:bodyPr wrap="square" anchor="t" lIns="0" rIns="0" tIns="0" bIns="0">
-            <a:spAutoFit/>
-          </a:bodyPr>
-          <a:lstStyle/>
-          <a:p>
-            <a:pPr algn="r">
-              <a:lnSpc>
-                <a:spcPct val="105000"/>
-              </a:lnSpc>
-            </a:pPr>
-            <a:r>
-              <a:rPr sz="1800" b="1" i="0">
-                <a:solidFill>
-                  <a:srgbClr val="FFFFFF"/>
-                </a:solidFill>
-                <a:latin typeface="Calibri"/>
-              </a:rPr>
-              <a:t>Confidential</a:t>
-            </a:r>
-          </a:p>
-        </p:txBody>
-      </p:sp>
-    </p:spTree>
-  </p:cSld>
-  <p:clrMapOvr>
-    <a:masterClrMapping/>
-  </p:clrMapOvr>
-</p:sld>
-</file>
-
-<file path=ppt/slides/slide8.xml><?xml version="1.0" encoding="utf-8"?>
-<p:sld xmlns:a="http://schemas.openxmlformats.org/drawingml/2006/main" xmlns:p="http://schemas.openxmlformats.org/presentationml/2006/main" xmlns:r="http://schemas.openxmlformats.org/officeDocument/2006/relationships">
-  <p:cSld>
-    <p:spTree>
-      <p:nvGrpSpPr>
-        <p:cNvPr id="1" name=""/>
-        <p:cNvGrpSpPr/>
-        <p:nvPr/>
-      </p:nvGrpSpPr>
-      <p:grpSpPr/>
-      <p:sp>
-        <p:nvSpPr>
-          <p:cNvPr id="2" name="Rectangle 1"/>
-          <p:cNvSpPr/>
-          <p:nvPr/>
-        </p:nvSpPr>
-        <p:spPr>
-          <a:xfrm>
-            <a:off x="0" y="0"/>
-            <a:ext cx="12191695" cy="914400"/>
-          </a:xfrm>
-          <a:prstGeom prst="rect">
-            <a:avLst/>
-          </a:prstGeom>
-          <a:solidFill>
-            <a:srgbClr val="111111"/>
-          </a:solidFill>
-          <a:ln>
-            <a:noFill/>
-          </a:ln>
-          <a:effectLst/>
-        </p:spPr>
-        <p:style>
-          <a:lnRef idx="1">
-            <a:schemeClr val="accent1"/>
-          </a:lnRef>
-          <a:fillRef idx="3">
-            <a:schemeClr val="accent1"/>
-          </a:fillRef>
-          <a:effectRef idx="2">
-            <a:schemeClr val="accent1"/>
-          </a:effectRef>
-          <a:fontRef idx="minor">
-            <a:schemeClr val="lt1"/>
-          </a:fontRef>
-        </p:style>
-        <p:txBody>
-          <a:bodyPr rtlCol="0" anchor="ctr"/>
-          <a:lstStyle/>
-          <a:p>
-            <a:pPr algn="ctr"/>
-          </a:p>
-        </p:txBody>
-      </p:sp>
-      <p:sp>
-        <p:nvSpPr>
-          <p:cNvPr id="3" name="TextBox 2"/>
-          <p:cNvSpPr txBox="1"/>
-          <p:nvPr/>
-        </p:nvSpPr>
-        <p:spPr>
-          <a:xfrm>
-            <a:off x="640080" y="118872"/>
-            <a:ext cx="8168335" cy="219456"/>
-          </a:xfrm>
-          <a:prstGeom prst="rect">
-            <a:avLst/>
-          </a:prstGeom>
-          <a:noFill/>
-        </p:spPr>
-        <p:txBody>
-          <a:bodyPr wrap="square" anchor="t" lIns="0" rIns="0" tIns="0" bIns="0">
-            <a:spAutoFit/>
-          </a:bodyPr>
-          <a:lstStyle/>
-          <a:p>
-            <a:pPr algn="l">
-              <a:lnSpc>
-                <a:spcPct val="105000"/>
-              </a:lnSpc>
-            </a:pPr>
-            <a:r>
-              <a:rPr sz="1100" b="1" i="0">
-                <a:solidFill>
-                  <a:srgbClr val="FFFFFF"/>
-                </a:solidFill>
-                <a:latin typeface="Calibri"/>
-              </a:rPr>
-              <a:t>통계 예시 (개인정보 미포함)</a:t>
-            </a:r>
-          </a:p>
-        </p:txBody>
-      </p:sp>
-      <p:sp>
-        <p:nvSpPr>
-          <p:cNvPr id="4" name="TextBox 3"/>
-          <p:cNvSpPr txBox="1"/>
-          <p:nvPr/>
-        </p:nvSpPr>
-        <p:spPr>
-          <a:xfrm>
-            <a:off x="640080" y="347472"/>
-            <a:ext cx="8168335" cy="493776"/>
-          </a:xfrm>
-          <a:prstGeom prst="rect">
-            <a:avLst/>
-          </a:prstGeom>
-          <a:noFill/>
-        </p:spPr>
-        <p:txBody>
-          <a:bodyPr wrap="square" anchor="t" lIns="0" rIns="0" tIns="0" bIns="0">
-            <a:spAutoFit/>
-          </a:bodyPr>
-          <a:lstStyle/>
-          <a:p>
-            <a:pPr algn="l">
-              <a:lnSpc>
-                <a:spcPct val="105000"/>
-              </a:lnSpc>
-            </a:pPr>
-            <a:r>
-              <a:rPr sz="3000" b="1" i="0">
-                <a:solidFill>
-                  <a:srgbClr val="FFFFFF"/>
-                </a:solidFill>
-                <a:latin typeface="Calibri"/>
-              </a:rPr>
-              <a:t>부서별 평균 연봉도 그대로 나옵니다</a:t>
-            </a:r>
-          </a:p>
-        </p:txBody>
-      </p:sp>
-      <p:sp>
-        <p:nvSpPr>
-          <p:cNvPr id="5" name="TextBox 4"/>
-          <p:cNvSpPr txBox="1"/>
-          <p:nvPr/>
-        </p:nvSpPr>
-        <p:spPr>
-          <a:xfrm>
-            <a:off x="640080" y="1024128"/>
-            <a:ext cx="10911535" cy="457200"/>
-          </a:xfrm>
-          <a:prstGeom prst="rect">
-            <a:avLst/>
-          </a:prstGeom>
-          <a:noFill/>
-        </p:spPr>
-        <p:txBody>
-          <a:bodyPr wrap="square" anchor="t" lIns="0" rIns="0" tIns="0" bIns="0">
-            <a:spAutoFit/>
-          </a:bodyPr>
-          <a:lstStyle/>
-          <a:p>
-            <a:pPr algn="l">
-              <a:lnSpc>
-                <a:spcPct val="105000"/>
-              </a:lnSpc>
-            </a:pPr>
-            <a:r>
-              <a:rPr sz="2600" b="0" i="1">
-                <a:solidFill>
-                  <a:srgbClr val="595959"/>
-                </a:solidFill>
-                <a:latin typeface="Calibri"/>
-              </a:rPr>
-              <a:t>비식별 파일에서 직접 산출 — 이름·주민·계좌는 토큰이라 결과에 없음</a:t>
-            </a:r>
-          </a:p>
-        </p:txBody>
-      </p:sp>
-      <p:graphicFrame>
-        <p:nvGraphicFramePr>
-          <p:cNvPr id="6" name="Table 5"/>
-          <p:cNvGraphicFramePr>
-            <a:graphicFrameLocks noGrp="1"/>
-          </p:cNvGraphicFramePr>
-          <p:nvPr/>
-        </p:nvGraphicFramePr>
-        <p:xfrm>
-          <a:off x="640080" y="1828800"/>
-          <a:ext cx="10911535" cy="3474720"/>
-        </p:xfrm>
-        <a:graphic>
-          <a:graphicData uri="http://schemas.openxmlformats.org/drawingml/2006/table">
-            <a:tbl>
-              <a:tblPr firstRow="1" bandRow="1">
-                <a:tableStyleId>{5C22544A-7EE6-4342-B048-85BDC9FD1C3A}</a:tableStyleId>
-              </a:tblPr>
-              <a:tblGrid>
-                <a:gridCol w="3637178"/>
-                <a:gridCol w="3637178"/>
-                <a:gridCol w="3637179"/>
-              </a:tblGrid>
-              <a:tr h="496388">
-                <a:tc>
-                  <a:txBody>
-                    <a:bodyPr/>
-                    <a:lstStyle/>
-                    <a:p>
-                      <a:r>
-                        <a:rPr sz="1900" b="1">
-                          <a:solidFill>
-                            <a:srgbClr val="FFFFFF"/>
-                          </a:solidFill>
-                          <a:latin typeface="Calibri"/>
-                        </a:rPr>
-                        <a:t>부서</a:t>
-                      </a:r>
-                    </a:p>
-                  </a:txBody>
-                  <a:tcPr anchor="ctr" marL="109728" marR="109728" marT="36576" marB="36576">
-                    <a:solidFill>
-                      <a:srgbClr val="111111"/>
-                    </a:solidFill>
-                  </a:tcPr>
-                </a:tc>
-                <a:tc>
-                  <a:txBody>
-                    <a:bodyPr/>
-                    <a:lstStyle/>
-                    <a:p>
-                      <a:r>
-                        <a:rPr sz="1900" b="1">
-                          <a:solidFill>
-                            <a:srgbClr val="FFFFFF"/>
-                          </a:solidFill>
-                          <a:latin typeface="Calibri"/>
-                        </a:rPr>
-                        <a:t>인원</a:t>
-                      </a:r>
-                    </a:p>
-                  </a:txBody>
-                  <a:tcPr anchor="ctr" marL="109728" marR="109728" marT="36576" marB="36576">
-                    <a:solidFill>
-                      <a:srgbClr val="111111"/>
-                    </a:solidFill>
-                  </a:tcPr>
-                </a:tc>
-                <a:tc>
-                  <a:txBody>
-                    <a:bodyPr/>
-                    <a:lstStyle/>
-                    <a:p>
-                      <a:r>
-                        <a:rPr sz="1900" b="1">
-                          <a:solidFill>
-                            <a:srgbClr val="FFFFFF"/>
-                          </a:solidFill>
-                          <a:latin typeface="Calibri"/>
-                        </a:rPr>
-                        <a:t>평균 연봉(만원)</a:t>
-                      </a:r>
-                    </a:p>
-                  </a:txBody>
-                  <a:tcPr anchor="ctr" marL="109728" marR="109728" marT="36576" marB="36576">
-                    <a:solidFill>
-                      <a:srgbClr val="111111"/>
-                    </a:solidFill>
-                  </a:tcPr>
-                </a:tc>
-              </a:tr>
-              <a:tr h="496388">
-                <a:tc>
-                  <a:txBody>
-                    <a:bodyPr/>
-                    <a:lstStyle/>
-                    <a:p>
-                      <a:r>
-                        <a:rPr sz="1900" b="0">
-                          <a:solidFill>
-                            <a:srgbClr val="1A1A1A"/>
-                          </a:solidFill>
-                          <a:latin typeface="Calibri"/>
-                        </a:rPr>
-                        <a:t>재무팀</a:t>
-                      </a:r>
-                    </a:p>
-                  </a:txBody>
-                  <a:tcPr anchor="ctr" marL="109728" marR="109728" marT="36576" marB="36576">
-                    <a:solidFill>
-                      <a:srgbClr val="FFFFFF"/>
-                    </a:solidFill>
-                  </a:tcPr>
-                </a:tc>
-                <a:tc>
-                  <a:txBody>
-                    <a:bodyPr/>
-                    <a:lstStyle/>
-                    <a:p>
-                      <a:r>
-                        <a:rPr sz="1900" b="0">
-                          <a:solidFill>
-                            <a:srgbClr val="1A1A1A"/>
-                          </a:solidFill>
-                          <a:latin typeface="Calibri"/>
-                        </a:rPr>
-                        <a:t>47</a:t>
-                      </a:r>
-                    </a:p>
-                  </a:txBody>
-                  <a:tcPr anchor="ctr" marL="109728" marR="109728" marT="36576" marB="36576">
-                    <a:solidFill>
-                      <a:srgbClr val="FFFFFF"/>
-                    </a:solidFill>
-                  </a:tcPr>
-                </a:tc>
-                <a:tc>
-                  <a:txBody>
-                    <a:bodyPr/>
-                    <a:lstStyle/>
-                    <a:p>
-                      <a:r>
-                        <a:rPr sz="1900" b="0">
-                          <a:solidFill>
-                            <a:srgbClr val="1A1A1A"/>
-                          </a:solidFill>
-                          <a:latin typeface="Calibri"/>
-                        </a:rPr>
-                        <a:t>6,396</a:t>
-                      </a:r>
-                    </a:p>
-                  </a:txBody>
-                  <a:tcPr anchor="ctr" marL="109728" marR="109728" marT="36576" marB="36576">
-                    <a:solidFill>
-                      <a:srgbClr val="FFFFFF"/>
-                    </a:solidFill>
-                  </a:tcPr>
-                </a:tc>
-              </a:tr>
-              <a:tr h="496388">
-                <a:tc>
-                  <a:txBody>
-                    <a:bodyPr/>
-                    <a:lstStyle/>
-                    <a:p>
-                      <a:r>
-                        <a:rPr sz="1900" b="0">
-                          <a:solidFill>
-                            <a:srgbClr val="1A1A1A"/>
-                          </a:solidFill>
-                          <a:latin typeface="Calibri"/>
-                        </a:rPr>
-                        <a:t>개발팀</a:t>
-                      </a:r>
-                    </a:p>
-                  </a:txBody>
-                  <a:tcPr anchor="ctr" marL="109728" marR="109728" marT="36576" marB="36576">
-                    <a:solidFill>
-                      <a:srgbClr val="F2F2F2"/>
-                    </a:solidFill>
-                  </a:tcPr>
-                </a:tc>
-                <a:tc>
-                  <a:txBody>
-                    <a:bodyPr/>
-                    <a:lstStyle/>
-                    <a:p>
-                      <a:r>
-                        <a:rPr sz="1900" b="0">
-                          <a:solidFill>
-                            <a:srgbClr val="1A1A1A"/>
-                          </a:solidFill>
-                          <a:latin typeface="Calibri"/>
-                        </a:rPr>
-                        <a:t>32</a:t>
-                      </a:r>
-                    </a:p>
-                  </a:txBody>
-                  <a:tcPr anchor="ctr" marL="109728" marR="109728" marT="36576" marB="36576">
-                    <a:solidFill>
-                      <a:srgbClr val="F2F2F2"/>
-                    </a:solidFill>
-                  </a:tcPr>
-                </a:tc>
-                <a:tc>
-                  <a:txBody>
-                    <a:bodyPr/>
-                    <a:lstStyle/>
-                    <a:p>
-                      <a:r>
-                        <a:rPr sz="1900" b="0">
-                          <a:solidFill>
-                            <a:srgbClr val="1A1A1A"/>
-                          </a:solidFill>
-                          <a:latin typeface="Calibri"/>
-                        </a:rPr>
-                        <a:t>6,242</a:t>
-                      </a:r>
-                    </a:p>
-                  </a:txBody>
-                  <a:tcPr anchor="ctr" marL="109728" marR="109728" marT="36576" marB="36576">
-                    <a:solidFill>
-                      <a:srgbClr val="F2F2F2"/>
-                    </a:solidFill>
-                  </a:tcPr>
-                </a:tc>
-              </a:tr>
-              <a:tr h="496388">
-                <a:tc>
-                  <a:txBody>
-                    <a:bodyPr/>
-                    <a:lstStyle/>
-                    <a:p>
-                      <a:r>
-                        <a:rPr sz="1900" b="0">
-                          <a:solidFill>
-                            <a:srgbClr val="1A1A1A"/>
-                          </a:solidFill>
-                          <a:latin typeface="Calibri"/>
-                        </a:rPr>
-                        <a:t>인사팀</a:t>
-                      </a:r>
-                    </a:p>
-                  </a:txBody>
-                  <a:tcPr anchor="ctr" marL="109728" marR="109728" marT="36576" marB="36576">
-                    <a:solidFill>
-                      <a:srgbClr val="FFFFFF"/>
-                    </a:solidFill>
-                  </a:tcPr>
-                </a:tc>
-                <a:tc>
-                  <a:txBody>
-                    <a:bodyPr/>
-                    <a:lstStyle/>
-                    <a:p>
-                      <a:r>
-                        <a:rPr sz="1900" b="0">
-                          <a:solidFill>
-                            <a:srgbClr val="1A1A1A"/>
-                          </a:solidFill>
-                          <a:latin typeface="Calibri"/>
-                        </a:rPr>
-                        <a:t>40</a:t>
-                      </a:r>
-                    </a:p>
-                  </a:txBody>
-                  <a:tcPr anchor="ctr" marL="109728" marR="109728" marT="36576" marB="36576">
-                    <a:solidFill>
-                      <a:srgbClr val="FFFFFF"/>
-                    </a:solidFill>
-                  </a:tcPr>
-                </a:tc>
-                <a:tc>
-                  <a:txBody>
-                    <a:bodyPr/>
-                    <a:lstStyle/>
-                    <a:p>
-                      <a:r>
-                        <a:rPr sz="1900" b="0">
-                          <a:solidFill>
-                            <a:srgbClr val="1A1A1A"/>
-                          </a:solidFill>
-                          <a:latin typeface="Calibri"/>
-                        </a:rPr>
-                        <a:t>6,135</a:t>
-                      </a:r>
-                    </a:p>
-                  </a:txBody>
-                  <a:tcPr anchor="ctr" marL="109728" marR="109728" marT="36576" marB="36576">
-                    <a:solidFill>
-                      <a:srgbClr val="FFFFFF"/>
-                    </a:solidFill>
-                  </a:tcPr>
-                </a:tc>
-              </a:tr>
-              <a:tr h="496388">
-                <a:tc>
-                  <a:txBody>
-                    <a:bodyPr/>
-                    <a:lstStyle/>
-                    <a:p>
-                      <a:r>
-                        <a:rPr sz="1900" b="0">
-                          <a:solidFill>
-                            <a:srgbClr val="1A1A1A"/>
-                          </a:solidFill>
-                          <a:latin typeface="Calibri"/>
-                        </a:rPr>
-                        <a:t>고객지원팀</a:t>
-                      </a:r>
-                    </a:p>
-                  </a:txBody>
-                  <a:tcPr anchor="ctr" marL="109728" marR="109728" marT="36576" marB="36576">
-                    <a:solidFill>
-                      <a:srgbClr val="F2F2F2"/>
-                    </a:solidFill>
-                  </a:tcPr>
-                </a:tc>
-                <a:tc>
-                  <a:txBody>
-                    <a:bodyPr/>
-                    <a:lstStyle/>
-                    <a:p>
-                      <a:r>
-                        <a:rPr sz="1900" b="0">
-                          <a:solidFill>
-                            <a:srgbClr val="1A1A1A"/>
-                          </a:solidFill>
-                          <a:latin typeface="Calibri"/>
-                        </a:rPr>
-                        <a:t>57</a:t>
-                      </a:r>
-                    </a:p>
-                  </a:txBody>
-                  <a:tcPr anchor="ctr" marL="109728" marR="109728" marT="36576" marB="36576">
-                    <a:solidFill>
-                      <a:srgbClr val="F2F2F2"/>
-                    </a:solidFill>
-                  </a:tcPr>
-                </a:tc>
-                <a:tc>
-                  <a:txBody>
-                    <a:bodyPr/>
-                    <a:lstStyle/>
-                    <a:p>
-                      <a:r>
-                        <a:rPr sz="1900" b="0">
-                          <a:solidFill>
-                            <a:srgbClr val="1A1A1A"/>
-                          </a:solidFill>
-                          <a:latin typeface="Calibri"/>
-                        </a:rPr>
-                        <a:t>5,962</a:t>
-                      </a:r>
-                    </a:p>
-                  </a:txBody>
-                  <a:tcPr anchor="ctr" marL="109728" marR="109728" marT="36576" marB="36576">
-                    <a:solidFill>
-                      <a:srgbClr val="F2F2F2"/>
-                    </a:solidFill>
-                  </a:tcPr>
-                </a:tc>
-              </a:tr>
-              <a:tr h="496388">
-                <a:tc>
-                  <a:txBody>
-                    <a:bodyPr/>
-                    <a:lstStyle/>
-                    <a:p>
-                      <a:r>
-                        <a:rPr sz="1900" b="0">
-                          <a:solidFill>
-                            <a:srgbClr val="1A1A1A"/>
-                          </a:solidFill>
-                          <a:latin typeface="Calibri"/>
-                        </a:rPr>
-                        <a:t>영업팀</a:t>
-                      </a:r>
-                    </a:p>
-                  </a:txBody>
-                  <a:tcPr anchor="ctr" marL="109728" marR="109728" marT="36576" marB="36576">
-                    <a:solidFill>
-                      <a:srgbClr val="FFFFFF"/>
-                    </a:solidFill>
-                  </a:tcPr>
-                </a:tc>
-                <a:tc>
-                  <a:txBody>
-                    <a:bodyPr/>
-                    <a:lstStyle/>
-                    <a:p>
-                      <a:r>
-                        <a:rPr sz="1900" b="0">
-                          <a:solidFill>
-                            <a:srgbClr val="1A1A1A"/>
-                          </a:solidFill>
-                          <a:latin typeface="Calibri"/>
-                        </a:rPr>
-                        <a:t>32</a:t>
-                      </a:r>
-                    </a:p>
-                  </a:txBody>
-                  <a:tcPr anchor="ctr" marL="109728" marR="109728" marT="36576" marB="36576">
-                    <a:solidFill>
-                      <a:srgbClr val="FFFFFF"/>
-                    </a:solidFill>
-                  </a:tcPr>
-                </a:tc>
-                <a:tc>
-                  <a:txBody>
-                    <a:bodyPr/>
-                    <a:lstStyle/>
-                    <a:p>
-                      <a:r>
-                        <a:rPr sz="1900" b="0">
-                          <a:solidFill>
-                            <a:srgbClr val="1A1A1A"/>
-                          </a:solidFill>
-                          <a:latin typeface="Calibri"/>
-                        </a:rPr>
-                        <a:t>5,799</a:t>
-                      </a:r>
-                    </a:p>
-                  </a:txBody>
-                  <a:tcPr anchor="ctr" marL="109728" marR="109728" marT="36576" marB="36576">
-                    <a:solidFill>
-                      <a:srgbClr val="FFFFFF"/>
-                    </a:solidFill>
-                  </a:tcPr>
-                </a:tc>
-              </a:tr>
-              <a:tr h="496392">
-                <a:tc>
-                  <a:txBody>
-                    <a:bodyPr/>
-                    <a:lstStyle/>
-                    <a:p>
-                      <a:r>
-                        <a:rPr sz="1900" b="0">
-                          <a:solidFill>
-                            <a:srgbClr val="1A1A1A"/>
-                          </a:solidFill>
-                          <a:latin typeface="Calibri"/>
-                        </a:rPr>
-                        <a:t>마케팅팀</a:t>
-                      </a:r>
-                    </a:p>
-                  </a:txBody>
-                  <a:tcPr anchor="ctr" marL="109728" marR="109728" marT="36576" marB="36576">
-                    <a:solidFill>
-                      <a:srgbClr val="F2F2F2"/>
-                    </a:solidFill>
-                  </a:tcPr>
-                </a:tc>
-                <a:tc>
-                  <a:txBody>
-                    <a:bodyPr/>
-                    <a:lstStyle/>
-                    <a:p>
-                      <a:r>
-                        <a:rPr sz="1900" b="0">
-                          <a:solidFill>
-                            <a:srgbClr val="1A1A1A"/>
-                          </a:solidFill>
-                          <a:latin typeface="Calibri"/>
-                        </a:rPr>
-                        <a:t>42</a:t>
-                      </a:r>
-                    </a:p>
-                  </a:txBody>
-                  <a:tcPr anchor="ctr" marL="109728" marR="109728" marT="36576" marB="36576">
-                    <a:solidFill>
-                      <a:srgbClr val="F2F2F2"/>
-                    </a:solidFill>
-                  </a:tcPr>
-                </a:tc>
-                <a:tc>
-                  <a:txBody>
-                    <a:bodyPr/>
-                    <a:lstStyle/>
-                    <a:p>
-                      <a:r>
-                        <a:rPr sz="1900" b="0">
-                          <a:solidFill>
-                            <a:srgbClr val="1A1A1A"/>
-                          </a:solidFill>
-                          <a:latin typeface="Calibri"/>
-                        </a:rPr>
-                        <a:t>5,788</a:t>
-                      </a:r>
-                    </a:p>
-                  </a:txBody>
-                  <a:tcPr anchor="ctr" marL="109728" marR="109728" marT="36576" marB="36576">
-                    <a:solidFill>
-                      <a:srgbClr val="F2F2F2"/>
-                    </a:solidFill>
-                  </a:tcPr>
-                </a:tc>
-              </a:tr>
-            </a:tbl>
-          </a:graphicData>
-        </a:graphic>
-      </p:graphicFrame>
-      <p:sp>
-        <p:nvSpPr>
-          <p:cNvPr id="7" name="TextBox 6"/>
-          <p:cNvSpPr txBox="1"/>
-          <p:nvPr/>
-        </p:nvSpPr>
-        <p:spPr>
-          <a:xfrm>
-            <a:off x="640080" y="6400800"/>
-            <a:ext cx="9997135" cy="274320"/>
-          </a:xfrm>
-          <a:prstGeom prst="rect">
-            <a:avLst/>
-          </a:prstGeom>
-          <a:noFill/>
-        </p:spPr>
-        <p:txBody>
-          <a:bodyPr wrap="square" anchor="t" lIns="0" rIns="0" tIns="0" bIns="0">
-            <a:spAutoFit/>
-          </a:bodyPr>
-          <a:lstStyle/>
-          <a:p>
-            <a:pPr algn="l">
-              <a:lnSpc>
-                <a:spcPct val="105000"/>
-              </a:lnSpc>
-            </a:pPr>
-            <a:r>
-              <a:rPr sz="1000" b="0" i="0">
-                <a:solidFill>
-                  <a:srgbClr val="7F7F7F"/>
-                </a:solidFill>
-                <a:latin typeface="Calibri"/>
-              </a:rPr>
-              <a:t>대외비 · Confidential · 인사팀 대상 설명자료</a:t>
-            </a:r>
-          </a:p>
-        </p:txBody>
-      </p:sp>
-      <p:sp>
-        <p:nvSpPr>
-          <p:cNvPr id="8" name="TextBox 7"/>
-          <p:cNvSpPr txBox="1"/>
-          <p:nvPr/>
-        </p:nvSpPr>
-        <p:spPr>
-          <a:xfrm>
-            <a:off x="10454335" y="6291072"/>
-            <a:ext cx="1097280" cy="384048"/>
-          </a:xfrm>
-          <a:prstGeom prst="rect">
-            <a:avLst/>
-          </a:prstGeom>
-          <a:noFill/>
-        </p:spPr>
-        <p:txBody>
-          <a:bodyPr wrap="square" anchor="t" lIns="0" rIns="0" tIns="0" bIns="0">
-            <a:spAutoFit/>
-          </a:bodyPr>
-          <a:lstStyle/>
-          <a:p>
-            <a:pPr algn="r">
-              <a:lnSpc>
-                <a:spcPct val="105000"/>
-              </a:lnSpc>
-            </a:pPr>
-            <a:r>
-              <a:rPr sz="1600" b="0" i="0">
-                <a:solidFill>
-                  <a:srgbClr val="7F7F7F"/>
-                </a:solidFill>
-                <a:latin typeface="Calibri"/>
-              </a:rPr>
-              <a:t>8</a:t>
-            </a:r>
-          </a:p>
-        </p:txBody>
-      </p:sp>
-      <p:sp>
-        <p:nvSpPr>
-          <p:cNvPr id="9" name="TextBox 8"/>
-          <p:cNvSpPr txBox="1"/>
-          <p:nvPr/>
-        </p:nvSpPr>
-        <p:spPr>
-          <a:xfrm>
-            <a:off x="8808415" y="182880"/>
-            <a:ext cx="2743200" cy="548640"/>
-          </a:xfrm>
-          <a:prstGeom prst="rect">
-            <a:avLst/>
-          </a:prstGeom>
-          <a:noFill/>
-        </p:spPr>
-        <p:txBody>
-          <a:bodyPr wrap="square" anchor="t" lIns="0" rIns="0" tIns="0" bIns="0">
-            <a:spAutoFit/>
-          </a:bodyPr>
-          <a:lstStyle/>
-          <a:p>
-            <a:pPr algn="r">
-              <a:lnSpc>
-                <a:spcPct val="105000"/>
-              </a:lnSpc>
-            </a:pPr>
-            <a:r>
-              <a:rPr sz="1800" b="1" i="0">
-                <a:solidFill>
-                  <a:srgbClr val="FFFFFF"/>
-                </a:solidFill>
-                <a:latin typeface="Calibri"/>
-              </a:rPr>
-              <a:t>Confidential</a:t>
-            </a:r>
-          </a:p>
-        </p:txBody>
-      </p:sp>
-    </p:spTree>
-  </p:cSld>
-  <p:clrMapOvr>
-    <a:masterClrMapping/>
-  </p:clrMapOvr>
-</p:sld>
-</file>
-
-<file path=ppt/slides/slide9.xml><?xml version="1.0" encoding="utf-8"?>
-<p:sld xmlns:a="http://schemas.openxmlformats.org/drawingml/2006/main" xmlns:p="http://schemas.openxmlformats.org/presentationml/2006/main" xmlns:r="http://schemas.openxmlformats.org/officeDocument/2006/relationships">
-  <p:cSld>
-    <p:spTree>
-      <p:nvGrpSpPr>
-        <p:cNvPr id="1" name=""/>
-        <p:cNvGrpSpPr/>
-        <p:nvPr/>
-      </p:nvGrpSpPr>
-      <p:grpSpPr/>
-      <p:sp>
-        <p:nvSpPr>
-          <p:cNvPr id="2" name="Rectangle 1"/>
-          <p:cNvSpPr/>
-          <p:nvPr/>
-        </p:nvSpPr>
-        <p:spPr>
-          <a:xfrm>
-            <a:off x="0" y="0"/>
-            <a:ext cx="12191695" cy="914400"/>
-          </a:xfrm>
-          <a:prstGeom prst="rect">
-            <a:avLst/>
-          </a:prstGeom>
-          <a:solidFill>
-            <a:srgbClr val="111111"/>
-          </a:solidFill>
-          <a:ln>
-            <a:noFill/>
-          </a:ln>
-          <a:effectLst/>
-        </p:spPr>
-        <p:style>
-          <a:lnRef idx="1">
-            <a:schemeClr val="accent1"/>
-          </a:lnRef>
-          <a:fillRef idx="3">
-            <a:schemeClr val="accent1"/>
-          </a:fillRef>
-          <a:effectRef idx="2">
-            <a:schemeClr val="accent1"/>
-          </a:effectRef>
-          <a:fontRef idx="minor">
-            <a:schemeClr val="lt1"/>
-          </a:fontRef>
-        </p:style>
-        <p:txBody>
-          <a:bodyPr rtlCol="0" anchor="ctr"/>
-          <a:lstStyle/>
-          <a:p>
-            <a:pPr algn="ctr"/>
-          </a:p>
-        </p:txBody>
-      </p:sp>
-      <p:sp>
-        <p:nvSpPr>
-          <p:cNvPr id="3" name="TextBox 2"/>
-          <p:cNvSpPr txBox="1"/>
-          <p:nvPr/>
-        </p:nvSpPr>
-        <p:spPr>
-          <a:xfrm>
-            <a:off x="640080" y="118872"/>
-            <a:ext cx="8168335" cy="219456"/>
-          </a:xfrm>
-          <a:prstGeom prst="rect">
-            <a:avLst/>
-          </a:prstGeom>
-          <a:noFill/>
-        </p:spPr>
-        <p:txBody>
-          <a:bodyPr wrap="square" anchor="t" lIns="0" rIns="0" tIns="0" bIns="0">
-            <a:spAutoFit/>
-          </a:bodyPr>
-          <a:lstStyle/>
-          <a:p>
-            <a:pPr algn="l">
-              <a:lnSpc>
-                <a:spcPct val="105000"/>
-              </a:lnSpc>
-            </a:pPr>
-            <a:r>
-              <a:rPr sz="1100" b="1" i="0">
-                <a:solidFill>
-                  <a:srgbClr val="FFFFFF"/>
-                </a:solidFill>
-                <a:latin typeface="Calibri"/>
-              </a:rPr>
-              <a:t>기대 효과</a:t>
-            </a:r>
-          </a:p>
-        </p:txBody>
-      </p:sp>
-      <p:sp>
-        <p:nvSpPr>
-          <p:cNvPr id="4" name="TextBox 3"/>
-          <p:cNvSpPr txBox="1"/>
-          <p:nvPr/>
-        </p:nvSpPr>
-        <p:spPr>
-          <a:xfrm>
-            <a:off x="640080" y="347472"/>
-            <a:ext cx="8168335" cy="493776"/>
-          </a:xfrm>
-          <a:prstGeom prst="rect">
-            <a:avLst/>
-          </a:prstGeom>
-          <a:noFill/>
-        </p:spPr>
-        <p:txBody>
-          <a:bodyPr wrap="square" anchor="t" lIns="0" rIns="0" tIns="0" bIns="0">
-            <a:spAutoFit/>
-          </a:bodyPr>
-          <a:lstStyle/>
-          <a:p>
-            <a:pPr algn="l">
-              <a:lnSpc>
-                <a:spcPct val="105000"/>
-              </a:lnSpc>
-            </a:pPr>
-            <a:r>
-              <a:rPr sz="3000" b="1" i="0">
-                <a:solidFill>
-                  <a:srgbClr val="FFFFFF"/>
-                </a:solidFill>
-                <a:latin typeface="Calibri"/>
-              </a:rPr>
-              <a:t>인사팀에게 무엇이 좋은가</a:t>
-            </a:r>
-          </a:p>
-        </p:txBody>
-      </p:sp>
-      <p:sp>
-        <p:nvSpPr>
-          <p:cNvPr id="5" name="TextBox 4"/>
-          <p:cNvSpPr txBox="1"/>
-          <p:nvPr/>
-        </p:nvSpPr>
-        <p:spPr>
-          <a:xfrm>
-            <a:off x="640080" y="1554480"/>
-            <a:ext cx="10911535" cy="640080"/>
-          </a:xfrm>
-          <a:prstGeom prst="rect">
-            <a:avLst/>
-          </a:prstGeom>
-          <a:noFill/>
-        </p:spPr>
-        <p:txBody>
-          <a:bodyPr wrap="square" anchor="t" lIns="0" rIns="0" tIns="0" bIns="0">
-            <a:spAutoFit/>
-          </a:bodyPr>
-          <a:lstStyle/>
-          <a:p>
-            <a:pPr algn="l">
-              <a:lnSpc>
-                <a:spcPct val="110000"/>
-              </a:lnSpc>
-            </a:pPr>
-            <a:r>
-              <a:rPr sz="2400" b="0" i="1">
-                <a:solidFill>
-                  <a:srgbClr val="595959"/>
-                </a:solidFill>
-                <a:latin typeface="Calibri"/>
-              </a:rPr>
-              <a:t>평소처럼 일하되, 신원은 가려진 채로.</a:t>
+              <a:t>담당자 키·도입 방법은 데이터보호 담당 부서로 문의해 주세요 · 데이터는 모두 합성(가상) 예시</a:t>
             </a:r>
           </a:p>
         </p:txBody>
@@ -8577,202 +6610,6 @@
       <p:sp>
         <p:nvSpPr>
           <p:cNvPr id="6" name="TextBox 5"/>
-          <p:cNvSpPr txBox="1"/>
-          <p:nvPr/>
-        </p:nvSpPr>
-        <p:spPr>
-          <a:xfrm>
-            <a:off x="640080" y="2286000"/>
-            <a:ext cx="10911535" cy="3931920"/>
-          </a:xfrm>
-          <a:prstGeom prst="rect">
-            <a:avLst/>
-          </a:prstGeom>
-          <a:noFill/>
-        </p:spPr>
-        <p:txBody>
-          <a:bodyPr wrap="square" anchor="t" lIns="0" rIns="0" tIns="0" bIns="0">
-            <a:spAutoFit/>
-          </a:bodyPr>
-          <a:lstStyle/>
-          <a:p>
-            <a:pPr algn="l">
-              <a:lnSpc>
-                <a:spcPct val="110000"/>
-              </a:lnSpc>
-              <a:spcAft>
-                <a:spcPts val="1000"/>
-              </a:spcAft>
-            </a:pPr>
-            <a:r>
-              <a:rPr sz="2200" b="1" i="0">
-                <a:solidFill>
-                  <a:srgbClr val="1A1A1A"/>
-                </a:solidFill>
-                <a:latin typeface="Calibri"/>
-              </a:rPr>
-              <a:t>●  안전 — 이름·주민번호·계좌가 AI에 노출 0건</a:t>
-            </a:r>
-          </a:p>
-          <a:p>
-            <a:pPr algn="l">
-              <a:lnSpc>
-                <a:spcPct val="110000"/>
-              </a:lnSpc>
-              <a:spcAft>
-                <a:spcPts val="1000"/>
-              </a:spcAft>
-            </a:pPr>
-            <a:r>
-              <a:rPr sz="2200" b="1" i="0">
-                <a:solidFill>
-                  <a:srgbClr val="1A1A1A"/>
-                </a:solidFill>
-                <a:latin typeface="Calibri"/>
-              </a:rPr>
-              <a:t>●  통계 가능 — 연봉·근태가 원본이라 평균·집계를 그대로</a:t>
-            </a:r>
-          </a:p>
-          <a:p>
-            <a:pPr algn="l">
-              <a:lnSpc>
-                <a:spcPct val="110000"/>
-              </a:lnSpc>
-              <a:spcAft>
-                <a:spcPts val="1000"/>
-              </a:spcAft>
-            </a:pPr>
-            <a:r>
-              <a:rPr sz="2200" b="0" i="0">
-                <a:solidFill>
-                  <a:srgbClr val="1A1A1A"/>
-                </a:solidFill>
-                <a:latin typeface="Calibri"/>
-              </a:rPr>
-              <a:t>●  되돌림 — 최종 결과물만 담당자가 재식별해 발송</a:t>
-            </a:r>
-          </a:p>
-          <a:p>
-            <a:pPr algn="l">
-              <a:lnSpc>
-                <a:spcPct val="110000"/>
-              </a:lnSpc>
-              <a:spcAft>
-                <a:spcPts val="1000"/>
-              </a:spcAft>
-            </a:pPr>
-            <a:r>
-              <a:rPr sz="2200" b="0" i="0">
-                <a:solidFill>
-                  <a:srgbClr val="1A1A1A"/>
-                </a:solidFill>
-                <a:latin typeface="Calibri"/>
-              </a:rPr>
-              <a:t>●  간편 — 키 없이 '비식별화 → 재식별' 두 단계, 도구가 알아서 처리</a:t>
-            </a:r>
-          </a:p>
-          <a:p>
-            <a:pPr algn="l">
-              <a:lnSpc>
-                <a:spcPct val="110000"/>
-              </a:lnSpc>
-              <a:spcAft>
-                <a:spcPts val="1000"/>
-              </a:spcAft>
-            </a:pPr>
-            <a:r>
-              <a:rPr sz="2200" b="0" i="0">
-                <a:solidFill>
-                  <a:srgbClr val="1A1A1A"/>
-                </a:solidFill>
-                <a:latin typeface="Calibri"/>
-              </a:rPr>
-              <a:t>●  문서도 OK — 메모·이메일 초안(.txt/.md) 속 식별정보도 봉인</a:t>
-            </a:r>
-          </a:p>
-        </p:txBody>
-      </p:sp>
-      <p:sp>
-        <p:nvSpPr>
-          <p:cNvPr id="7" name="TextBox 6"/>
-          <p:cNvSpPr txBox="1"/>
-          <p:nvPr/>
-        </p:nvSpPr>
-        <p:spPr>
-          <a:xfrm>
-            <a:off x="640080" y="6400800"/>
-            <a:ext cx="9997135" cy="274320"/>
-          </a:xfrm>
-          <a:prstGeom prst="rect">
-            <a:avLst/>
-          </a:prstGeom>
-          <a:noFill/>
-        </p:spPr>
-        <p:txBody>
-          <a:bodyPr wrap="square" anchor="t" lIns="0" rIns="0" tIns="0" bIns="0">
-            <a:spAutoFit/>
-          </a:bodyPr>
-          <a:lstStyle/>
-          <a:p>
-            <a:pPr algn="l">
-              <a:lnSpc>
-                <a:spcPct val="105000"/>
-              </a:lnSpc>
-            </a:pPr>
-            <a:r>
-              <a:rPr sz="1000" b="0" i="0">
-                <a:solidFill>
-                  <a:srgbClr val="7F7F7F"/>
-                </a:solidFill>
-                <a:latin typeface="Calibri"/>
-              </a:rPr>
-              <a:t>대외비 · Confidential · 인사팀 대상 설명자료</a:t>
-            </a:r>
-          </a:p>
-        </p:txBody>
-      </p:sp>
-      <p:sp>
-        <p:nvSpPr>
-          <p:cNvPr id="8" name="TextBox 7"/>
-          <p:cNvSpPr txBox="1"/>
-          <p:nvPr/>
-        </p:nvSpPr>
-        <p:spPr>
-          <a:xfrm>
-            <a:off x="10454335" y="6291072"/>
-            <a:ext cx="1097280" cy="384048"/>
-          </a:xfrm>
-          <a:prstGeom prst="rect">
-            <a:avLst/>
-          </a:prstGeom>
-          <a:noFill/>
-        </p:spPr>
-        <p:txBody>
-          <a:bodyPr wrap="square" anchor="t" lIns="0" rIns="0" tIns="0" bIns="0">
-            <a:spAutoFit/>
-          </a:bodyPr>
-          <a:lstStyle/>
-          <a:p>
-            <a:pPr algn="r">
-              <a:lnSpc>
-                <a:spcPct val="105000"/>
-              </a:lnSpc>
-            </a:pPr>
-            <a:r>
-              <a:rPr sz="1600" b="0" i="0">
-                <a:solidFill>
-                  <a:srgbClr val="7F7F7F"/>
-                </a:solidFill>
-                <a:latin typeface="Calibri"/>
-              </a:rPr>
-              <a:t>9</a:t>
-            </a:r>
-          </a:p>
-        </p:txBody>
-      </p:sp>
-      <p:sp>
-        <p:nvSpPr>
-          <p:cNvPr id="9" name="TextBox 8"/>
           <p:cNvSpPr txBox="1"/>
           <p:nvPr/>
         </p:nvSpPr>

--- a/claudedocs/pii-gateway-hr-deck.pptx
+++ b/claudedocs/pii-gateway-hr-deck.pptx
@@ -10,8 +10,6 @@
     <p:sldId id="258" r:id="rId9"/>
     <p:sldId id="259" r:id="rId10"/>
     <p:sldId id="260" r:id="rId11"/>
-    <p:sldId id="261" r:id="rId12"/>
-    <p:sldId id="262" r:id="rId13"/>
   </p:sldIdLst>
   <p:sldSz cx="12191695" cy="6858000" type="screen4x3"/>
   <p:notesSz cx="6858000" cy="9144000"/>
@@ -3250,7 +3248,7 @@
                 </a:solidFill>
                 <a:latin typeface="Calibri"/>
               </a:rPr>
-              <a:t>인사 데이터를 AI에 그대로 노출하지 않고 안전하게 활용하기</a:t>
+              <a:t>인사 데이터를 AI에 노출하지 않고 안전하게 활용하는 방법</a:t>
             </a:r>
           </a:p>
         </p:txBody>
@@ -3468,7 +3466,7 @@
                 </a:solidFill>
                 <a:latin typeface="Calibri"/>
               </a:rPr>
-              <a:t>신원은 가리고, 숫자는 살린다</a:t>
+              <a:t>식별자는 토큰화, 숫자는 원본 유지</a:t>
             </a:r>
           </a:p>
         </p:txBody>
@@ -3863,7 +3861,7 @@
                 </a:solidFill>
                 <a:latin typeface="Calibri"/>
               </a:rPr>
-              <a:t>세 단계로 끝납니다</a:t>
+              <a:t>세 단계 처리</a:t>
             </a:r>
           </a:p>
         </p:txBody>
@@ -4415,7 +4413,7 @@
                 </a:solidFill>
                 <a:latin typeface="Calibri"/>
               </a:rPr>
-              <a:t>작업본은 토큰, 최종본만 실명</a:t>
+              <a:t>작업본은 토큰, 최종본은 실명</a:t>
             </a:r>
           </a:p>
         </p:txBody>
@@ -4978,7 +4976,7 @@
         <p:spPr>
           <a:xfrm>
             <a:off x="0" y="0"/>
-            <a:ext cx="12191695" cy="914400"/>
+            <a:ext cx="12191695" cy="6858000"/>
           </a:xfrm>
           <a:prstGeom prst="rect">
             <a:avLst/>
@@ -5015,98 +5013,20 @@
       </p:sp>
       <p:sp>
         <p:nvSpPr>
-          <p:cNvPr id="3" name="TextBox 2"/>
-          <p:cNvSpPr txBox="1"/>
-          <p:nvPr/>
-        </p:nvSpPr>
-        <p:spPr>
-          <a:xfrm>
-            <a:off x="640080" y="118872"/>
-            <a:ext cx="8168335" cy="219456"/>
-          </a:xfrm>
-          <a:prstGeom prst="rect">
-            <a:avLst/>
-          </a:prstGeom>
-          <a:noFill/>
-        </p:spPr>
-        <p:txBody>
-          <a:bodyPr wrap="square" anchor="t" lIns="0" rIns="0" tIns="0" bIns="0">
-            <a:spAutoFit/>
-          </a:bodyPr>
-          <a:lstStyle/>
-          <a:p>
-            <a:pPr algn="l">
-              <a:lnSpc>
-                <a:spcPct val="105000"/>
-              </a:lnSpc>
-            </a:pPr>
-            <a:r>
-              <a:rPr sz="1100" b="1" i="0">
-                <a:solidFill>
-                  <a:srgbClr val="FFFFFF"/>
-                </a:solidFill>
-                <a:latin typeface="Calibri"/>
-              </a:rPr>
-              <a:t>검증 결과</a:t>
-            </a:r>
-          </a:p>
-        </p:txBody>
-      </p:sp>
-      <p:sp>
-        <p:nvSpPr>
-          <p:cNvPr id="4" name="TextBox 3"/>
-          <p:cNvSpPr txBox="1"/>
-          <p:nvPr/>
-        </p:nvSpPr>
-        <p:spPr>
-          <a:xfrm>
-            <a:off x="640080" y="347472"/>
-            <a:ext cx="8168335" cy="493776"/>
-          </a:xfrm>
-          <a:prstGeom prst="rect">
-            <a:avLst/>
-          </a:prstGeom>
-          <a:noFill/>
-        </p:spPr>
-        <p:txBody>
-          <a:bodyPr wrap="square" anchor="t" lIns="0" rIns="0" tIns="0" bIns="0">
-            <a:spAutoFit/>
-          </a:bodyPr>
-          <a:lstStyle/>
-          <a:p>
-            <a:pPr algn="l">
-              <a:lnSpc>
-                <a:spcPct val="105000"/>
-              </a:lnSpc>
-            </a:pPr>
-            <a:r>
-              <a:rPr sz="3000" b="1" i="0">
-                <a:solidFill>
-                  <a:srgbClr val="FFFFFF"/>
-                </a:solidFill>
-                <a:latin typeface="Calibri"/>
-              </a:rPr>
-              <a:t>통계도, 개인별 업무도 — 누출 없이 둘 다</a:t>
-            </a:r>
-          </a:p>
-        </p:txBody>
-      </p:sp>
-      <p:sp>
-        <p:nvSpPr>
-          <p:cNvPr id="5" name="Rectangle 4"/>
+          <p:cNvPr id="3" name="Rectangle 2"/>
           <p:cNvSpPr/>
           <p:nvPr/>
         </p:nvSpPr>
         <p:spPr>
           <a:xfrm>
-            <a:off x="640080" y="2103120"/>
-            <a:ext cx="2453563" cy="2560320"/>
+            <a:off x="0" y="6492240"/>
+            <a:ext cx="12191695" cy="365760"/>
           </a:xfrm>
           <a:prstGeom prst="rect">
             <a:avLst/>
           </a:prstGeom>
           <a:solidFill>
-            <a:srgbClr val="F2F2F2"/>
+            <a:srgbClr val="2F5597"/>
           </a:solidFill>
           <a:ln>
             <a:noFill/>
@@ -5137,58 +5057,14 @@
       </p:sp>
       <p:sp>
         <p:nvSpPr>
-          <p:cNvPr id="6" name="Rectangle 5"/>
-          <p:cNvSpPr/>
-          <p:nvPr/>
-        </p:nvSpPr>
-        <p:spPr>
-          <a:xfrm>
-            <a:off x="640080" y="2103120"/>
-            <a:ext cx="2453563" cy="109728"/>
-          </a:xfrm>
-          <a:prstGeom prst="rect">
-            <a:avLst/>
-          </a:prstGeom>
-          <a:solidFill>
-            <a:srgbClr val="2F5597"/>
-          </a:solidFill>
-          <a:ln>
-            <a:noFill/>
-          </a:ln>
-          <a:effectLst/>
-        </p:spPr>
-        <p:style>
-          <a:lnRef idx="1">
-            <a:schemeClr val="accent1"/>
-          </a:lnRef>
-          <a:fillRef idx="3">
-            <a:schemeClr val="accent1"/>
-          </a:fillRef>
-          <a:effectRef idx="2">
-            <a:schemeClr val="accent1"/>
-          </a:effectRef>
-          <a:fontRef idx="minor">
-            <a:schemeClr val="lt1"/>
-          </a:fontRef>
-        </p:style>
-        <p:txBody>
-          <a:bodyPr rtlCol="0" anchor="ctr"/>
-          <a:lstStyle/>
-          <a:p>
-            <a:pPr algn="ctr"/>
-          </a:p>
-        </p:txBody>
-      </p:sp>
-      <p:sp>
-        <p:nvSpPr>
-          <p:cNvPr id="7" name="TextBox 6"/>
+          <p:cNvPr id="4" name="TextBox 3"/>
           <p:cNvSpPr txBox="1"/>
           <p:nvPr/>
         </p:nvSpPr>
         <p:spPr>
           <a:xfrm>
-            <a:off x="640080" y="2560320"/>
-            <a:ext cx="2453563" cy="1005840"/>
+            <a:off x="640080" y="2377440"/>
+            <a:ext cx="10911535" cy="1463040"/>
           </a:xfrm>
           <a:prstGeom prst="rect">
             <a:avLst/>
@@ -5207,1363 +5083,13 @@
               </a:lnSpc>
             </a:pPr>
             <a:r>
-              <a:rPr sz="4800" b="1" i="0">
-                <a:solidFill>
-                  <a:srgbClr val="111111"/>
+              <a:rPr sz="5000" b="1" i="0">
+                <a:solidFill>
+                  <a:srgbClr val="FFFFFF"/>
                 </a:solidFill>
                 <a:latin typeface="Calibri"/>
               </a:rPr>
-              <a:t>0건</a:t>
-            </a:r>
-          </a:p>
-        </p:txBody>
-      </p:sp>
-      <p:sp>
-        <p:nvSpPr>
-          <p:cNvPr id="8" name="TextBox 7"/>
-          <p:cNvSpPr txBox="1"/>
-          <p:nvPr/>
-        </p:nvSpPr>
-        <p:spPr>
-          <a:xfrm>
-            <a:off x="640080" y="3611880"/>
-            <a:ext cx="2453563" cy="457200"/>
-          </a:xfrm>
-          <a:prstGeom prst="rect">
-            <a:avLst/>
-          </a:prstGeom>
-          <a:noFill/>
-        </p:spPr>
-        <p:txBody>
-          <a:bodyPr wrap="square" anchor="t" lIns="0" rIns="0" tIns="0" bIns="0">
-            <a:spAutoFit/>
-          </a:bodyPr>
-          <a:lstStyle/>
-          <a:p>
-            <a:pPr algn="ctr">
-              <a:lnSpc>
-                <a:spcPct val="105000"/>
-              </a:lnSpc>
-            </a:pPr>
-            <a:r>
-              <a:rPr sz="2200" b="1" i="0">
-                <a:solidFill>
-                  <a:srgbClr val="1A1A1A"/>
-                </a:solidFill>
-                <a:latin typeface="Calibri"/>
-              </a:rPr>
-              <a:t>식별자 누출</a:t>
-            </a:r>
-          </a:p>
-        </p:txBody>
-      </p:sp>
-      <p:sp>
-        <p:nvSpPr>
-          <p:cNvPr id="9" name="TextBox 8"/>
-          <p:cNvSpPr txBox="1"/>
-          <p:nvPr/>
-        </p:nvSpPr>
-        <p:spPr>
-          <a:xfrm>
-            <a:off x="822960" y="4023360"/>
-            <a:ext cx="2087803" cy="548640"/>
-          </a:xfrm>
-          <a:prstGeom prst="rect">
-            <a:avLst/>
-          </a:prstGeom>
-          <a:noFill/>
-        </p:spPr>
-        <p:txBody>
-          <a:bodyPr wrap="square" anchor="t" lIns="0" rIns="0" tIns="0" bIns="0">
-            <a:spAutoFit/>
-          </a:bodyPr>
-          <a:lstStyle/>
-          <a:p>
-            <a:pPr algn="ctr">
-              <a:lnSpc>
-                <a:spcPct val="100000"/>
-              </a:lnSpc>
-            </a:pPr>
-            <a:r>
-              <a:rPr sz="1200" b="0" i="0">
-                <a:solidFill>
-                  <a:srgbClr val="7F7F7F"/>
-                </a:solidFill>
-                <a:latin typeface="Calibri"/>
-              </a:rPr>
-              <a:t>작업 내내</a:t>
-            </a:r>
-          </a:p>
-        </p:txBody>
-      </p:sp>
-      <p:sp>
-        <p:nvSpPr>
-          <p:cNvPr id="10" name="Rectangle 9"/>
-          <p:cNvSpPr/>
-          <p:nvPr/>
-        </p:nvSpPr>
-        <p:spPr>
-          <a:xfrm>
-            <a:off x="3459403" y="2103120"/>
-            <a:ext cx="2453563" cy="2560320"/>
-          </a:xfrm>
-          <a:prstGeom prst="rect">
-            <a:avLst/>
-          </a:prstGeom>
-          <a:solidFill>
-            <a:srgbClr val="F2F2F2"/>
-          </a:solidFill>
-          <a:ln>
-            <a:noFill/>
-          </a:ln>
-          <a:effectLst/>
-        </p:spPr>
-        <p:style>
-          <a:lnRef idx="1">
-            <a:schemeClr val="accent1"/>
-          </a:lnRef>
-          <a:fillRef idx="3">
-            <a:schemeClr val="accent1"/>
-          </a:fillRef>
-          <a:effectRef idx="2">
-            <a:schemeClr val="accent1"/>
-          </a:effectRef>
-          <a:fontRef idx="minor">
-            <a:schemeClr val="lt1"/>
-          </a:fontRef>
-        </p:style>
-        <p:txBody>
-          <a:bodyPr rtlCol="0" anchor="ctr"/>
-          <a:lstStyle/>
-          <a:p>
-            <a:pPr algn="ctr"/>
-          </a:p>
-        </p:txBody>
-      </p:sp>
-      <p:sp>
-        <p:nvSpPr>
-          <p:cNvPr id="11" name="Rectangle 10"/>
-          <p:cNvSpPr/>
-          <p:nvPr/>
-        </p:nvSpPr>
-        <p:spPr>
-          <a:xfrm>
-            <a:off x="3459403" y="2103120"/>
-            <a:ext cx="2453563" cy="109728"/>
-          </a:xfrm>
-          <a:prstGeom prst="rect">
-            <a:avLst/>
-          </a:prstGeom>
-          <a:solidFill>
-            <a:srgbClr val="2F5597"/>
-          </a:solidFill>
-          <a:ln>
-            <a:noFill/>
-          </a:ln>
-          <a:effectLst/>
-        </p:spPr>
-        <p:style>
-          <a:lnRef idx="1">
-            <a:schemeClr val="accent1"/>
-          </a:lnRef>
-          <a:fillRef idx="3">
-            <a:schemeClr val="accent1"/>
-          </a:fillRef>
-          <a:effectRef idx="2">
-            <a:schemeClr val="accent1"/>
-          </a:effectRef>
-          <a:fontRef idx="minor">
-            <a:schemeClr val="lt1"/>
-          </a:fontRef>
-        </p:style>
-        <p:txBody>
-          <a:bodyPr rtlCol="0" anchor="ctr"/>
-          <a:lstStyle/>
-          <a:p>
-            <a:pPr algn="ctr"/>
-          </a:p>
-        </p:txBody>
-      </p:sp>
-      <p:sp>
-        <p:nvSpPr>
-          <p:cNvPr id="12" name="TextBox 11"/>
-          <p:cNvSpPr txBox="1"/>
-          <p:nvPr/>
-        </p:nvSpPr>
-        <p:spPr>
-          <a:xfrm>
-            <a:off x="3459403" y="2560320"/>
-            <a:ext cx="2453563" cy="1005840"/>
-          </a:xfrm>
-          <a:prstGeom prst="rect">
-            <a:avLst/>
-          </a:prstGeom>
-          <a:noFill/>
-        </p:spPr>
-        <p:txBody>
-          <a:bodyPr wrap="square" anchor="t" lIns="0" rIns="0" tIns="0" bIns="0">
-            <a:spAutoFit/>
-          </a:bodyPr>
-          <a:lstStyle/>
-          <a:p>
-            <a:pPr algn="ctr">
-              <a:lnSpc>
-                <a:spcPct val="105000"/>
-              </a:lnSpc>
-            </a:pPr>
-            <a:r>
-              <a:rPr sz="4800" b="1" i="0">
-                <a:solidFill>
-                  <a:srgbClr val="111111"/>
-                </a:solidFill>
-                <a:latin typeface="Calibri"/>
-              </a:rPr>
-              <a:t>24/24</a:t>
-            </a:r>
-          </a:p>
-        </p:txBody>
-      </p:sp>
-      <p:sp>
-        <p:nvSpPr>
-          <p:cNvPr id="13" name="TextBox 12"/>
-          <p:cNvSpPr txBox="1"/>
-          <p:nvPr/>
-        </p:nvSpPr>
-        <p:spPr>
-          <a:xfrm>
-            <a:off x="3459403" y="3611880"/>
-            <a:ext cx="2453563" cy="457200"/>
-          </a:xfrm>
-          <a:prstGeom prst="rect">
-            <a:avLst/>
-          </a:prstGeom>
-          <a:noFill/>
-        </p:spPr>
-        <p:txBody>
-          <a:bodyPr wrap="square" anchor="t" lIns="0" rIns="0" tIns="0" bIns="0">
-            <a:spAutoFit/>
-          </a:bodyPr>
-          <a:lstStyle/>
-          <a:p>
-            <a:pPr algn="ctr">
-              <a:lnSpc>
-                <a:spcPct val="105000"/>
-              </a:lnSpc>
-            </a:pPr>
-            <a:r>
-              <a:rPr sz="2200" b="1" i="0">
-                <a:solidFill>
-                  <a:srgbClr val="1A1A1A"/>
-                </a:solidFill>
-                <a:latin typeface="Calibri"/>
-              </a:rPr>
-              <a:t>시나리오 통과</a:t>
-            </a:r>
-          </a:p>
-        </p:txBody>
-      </p:sp>
-      <p:sp>
-        <p:nvSpPr>
-          <p:cNvPr id="14" name="TextBox 13"/>
-          <p:cNvSpPr txBox="1"/>
-          <p:nvPr/>
-        </p:nvSpPr>
-        <p:spPr>
-          <a:xfrm>
-            <a:off x="3642283" y="4023360"/>
-            <a:ext cx="2087803" cy="548640"/>
-          </a:xfrm>
-          <a:prstGeom prst="rect">
-            <a:avLst/>
-          </a:prstGeom>
-          <a:noFill/>
-        </p:spPr>
-        <p:txBody>
-          <a:bodyPr wrap="square" anchor="t" lIns="0" rIns="0" tIns="0" bIns="0">
-            <a:spAutoFit/>
-          </a:bodyPr>
-          <a:lstStyle/>
-          <a:p>
-            <a:pPr algn="ctr">
-              <a:lnSpc>
-                <a:spcPct val="100000"/>
-              </a:lnSpc>
-            </a:pPr>
-            <a:r>
-              <a:rPr sz="1200" b="0" i="0">
-                <a:solidFill>
-                  <a:srgbClr val="7F7F7F"/>
-                </a:solidFill>
-                <a:latin typeface="Calibri"/>
-              </a:rPr>
-              <a:t>통계 + HR 업무</a:t>
-            </a:r>
-          </a:p>
-        </p:txBody>
-      </p:sp>
-      <p:sp>
-        <p:nvSpPr>
-          <p:cNvPr id="15" name="Rectangle 14"/>
-          <p:cNvSpPr/>
-          <p:nvPr/>
-        </p:nvSpPr>
-        <p:spPr>
-          <a:xfrm>
-            <a:off x="6278727" y="2103120"/>
-            <a:ext cx="2453563" cy="2560320"/>
-          </a:xfrm>
-          <a:prstGeom prst="rect">
-            <a:avLst/>
-          </a:prstGeom>
-          <a:solidFill>
-            <a:srgbClr val="F2F2F2"/>
-          </a:solidFill>
-          <a:ln>
-            <a:noFill/>
-          </a:ln>
-          <a:effectLst/>
-        </p:spPr>
-        <p:style>
-          <a:lnRef idx="1">
-            <a:schemeClr val="accent1"/>
-          </a:lnRef>
-          <a:fillRef idx="3">
-            <a:schemeClr val="accent1"/>
-          </a:fillRef>
-          <a:effectRef idx="2">
-            <a:schemeClr val="accent1"/>
-          </a:effectRef>
-          <a:fontRef idx="minor">
-            <a:schemeClr val="lt1"/>
-          </a:fontRef>
-        </p:style>
-        <p:txBody>
-          <a:bodyPr rtlCol="0" anchor="ctr"/>
-          <a:lstStyle/>
-          <a:p>
-            <a:pPr algn="ctr"/>
-          </a:p>
-        </p:txBody>
-      </p:sp>
-      <p:sp>
-        <p:nvSpPr>
-          <p:cNvPr id="16" name="Rectangle 15"/>
-          <p:cNvSpPr/>
-          <p:nvPr/>
-        </p:nvSpPr>
-        <p:spPr>
-          <a:xfrm>
-            <a:off x="6278727" y="2103120"/>
-            <a:ext cx="2453563" cy="109728"/>
-          </a:xfrm>
-          <a:prstGeom prst="rect">
-            <a:avLst/>
-          </a:prstGeom>
-          <a:solidFill>
-            <a:srgbClr val="2F5597"/>
-          </a:solidFill>
-          <a:ln>
-            <a:noFill/>
-          </a:ln>
-          <a:effectLst/>
-        </p:spPr>
-        <p:style>
-          <a:lnRef idx="1">
-            <a:schemeClr val="accent1"/>
-          </a:lnRef>
-          <a:fillRef idx="3">
-            <a:schemeClr val="accent1"/>
-          </a:fillRef>
-          <a:effectRef idx="2">
-            <a:schemeClr val="accent1"/>
-          </a:effectRef>
-          <a:fontRef idx="minor">
-            <a:schemeClr val="lt1"/>
-          </a:fontRef>
-        </p:style>
-        <p:txBody>
-          <a:bodyPr rtlCol="0" anchor="ctr"/>
-          <a:lstStyle/>
-          <a:p>
-            <a:pPr algn="ctr"/>
-          </a:p>
-        </p:txBody>
-      </p:sp>
-      <p:sp>
-        <p:nvSpPr>
-          <p:cNvPr id="17" name="TextBox 16"/>
-          <p:cNvSpPr txBox="1"/>
-          <p:nvPr/>
-        </p:nvSpPr>
-        <p:spPr>
-          <a:xfrm>
-            <a:off x="6278727" y="2560320"/>
-            <a:ext cx="2453563" cy="1005840"/>
-          </a:xfrm>
-          <a:prstGeom prst="rect">
-            <a:avLst/>
-          </a:prstGeom>
-          <a:noFill/>
-        </p:spPr>
-        <p:txBody>
-          <a:bodyPr wrap="square" anchor="t" lIns="0" rIns="0" tIns="0" bIns="0">
-            <a:spAutoFit/>
-          </a:bodyPr>
-          <a:lstStyle/>
-          <a:p>
-            <a:pPr algn="ctr">
-              <a:lnSpc>
-                <a:spcPct val="105000"/>
-              </a:lnSpc>
-            </a:pPr>
-            <a:r>
-              <a:rPr sz="4800" b="1" i="0">
-                <a:solidFill>
-                  <a:srgbClr val="111111"/>
-                </a:solidFill>
-                <a:latin typeface="Calibri"/>
-              </a:rPr>
-              <a:t>100%</a:t>
-            </a:r>
-          </a:p>
-        </p:txBody>
-      </p:sp>
-      <p:sp>
-        <p:nvSpPr>
-          <p:cNvPr id="18" name="TextBox 17"/>
-          <p:cNvSpPr txBox="1"/>
-          <p:nvPr/>
-        </p:nvSpPr>
-        <p:spPr>
-          <a:xfrm>
-            <a:off x="6278727" y="3611880"/>
-            <a:ext cx="2453563" cy="457200"/>
-          </a:xfrm>
-          <a:prstGeom prst="rect">
-            <a:avLst/>
-          </a:prstGeom>
-          <a:noFill/>
-        </p:spPr>
-        <p:txBody>
-          <a:bodyPr wrap="square" anchor="t" lIns="0" rIns="0" tIns="0" bIns="0">
-            <a:spAutoFit/>
-          </a:bodyPr>
-          <a:lstStyle/>
-          <a:p>
-            <a:pPr algn="ctr">
-              <a:lnSpc>
-                <a:spcPct val="105000"/>
-              </a:lnSpc>
-            </a:pPr>
-            <a:r>
-              <a:rPr sz="2200" b="1" i="0">
-                <a:solidFill>
-                  <a:srgbClr val="1A1A1A"/>
-                </a:solidFill>
-                <a:latin typeface="Calibri"/>
-              </a:rPr>
-              <a:t>통계 정확도</a:t>
-            </a:r>
-          </a:p>
-        </p:txBody>
-      </p:sp>
-      <p:sp>
-        <p:nvSpPr>
-          <p:cNvPr id="19" name="TextBox 18"/>
-          <p:cNvSpPr txBox="1"/>
-          <p:nvPr/>
-        </p:nvSpPr>
-        <p:spPr>
-          <a:xfrm>
-            <a:off x="6461607" y="4023360"/>
-            <a:ext cx="2087803" cy="548640"/>
-          </a:xfrm>
-          <a:prstGeom prst="rect">
-            <a:avLst/>
-          </a:prstGeom>
-          <a:noFill/>
-        </p:spPr>
-        <p:txBody>
-          <a:bodyPr wrap="square" anchor="t" lIns="0" rIns="0" tIns="0" bIns="0">
-            <a:spAutoFit/>
-          </a:bodyPr>
-          <a:lstStyle/>
-          <a:p>
-            <a:pPr algn="ctr">
-              <a:lnSpc>
-                <a:spcPct val="100000"/>
-              </a:lnSpc>
-            </a:pPr>
-            <a:r>
-              <a:rPr sz="1200" b="0" i="0">
-                <a:solidFill>
-                  <a:srgbClr val="7F7F7F"/>
-                </a:solidFill>
-                <a:latin typeface="Calibri"/>
-              </a:rPr>
-              <a:t>비식별 파일서 직접 산출</a:t>
-            </a:r>
-          </a:p>
-        </p:txBody>
-      </p:sp>
-      <p:sp>
-        <p:nvSpPr>
-          <p:cNvPr id="20" name="Rectangle 19"/>
-          <p:cNvSpPr/>
-          <p:nvPr/>
-        </p:nvSpPr>
-        <p:spPr>
-          <a:xfrm>
-            <a:off x="9098051" y="2103120"/>
-            <a:ext cx="2453563" cy="2560320"/>
-          </a:xfrm>
-          <a:prstGeom prst="rect">
-            <a:avLst/>
-          </a:prstGeom>
-          <a:solidFill>
-            <a:srgbClr val="F2F2F2"/>
-          </a:solidFill>
-          <a:ln>
-            <a:noFill/>
-          </a:ln>
-          <a:effectLst/>
-        </p:spPr>
-        <p:style>
-          <a:lnRef idx="1">
-            <a:schemeClr val="accent1"/>
-          </a:lnRef>
-          <a:fillRef idx="3">
-            <a:schemeClr val="accent1"/>
-          </a:fillRef>
-          <a:effectRef idx="2">
-            <a:schemeClr val="accent1"/>
-          </a:effectRef>
-          <a:fontRef idx="minor">
-            <a:schemeClr val="lt1"/>
-          </a:fontRef>
-        </p:style>
-        <p:txBody>
-          <a:bodyPr rtlCol="0" anchor="ctr"/>
-          <a:lstStyle/>
-          <a:p>
-            <a:pPr algn="ctr"/>
-          </a:p>
-        </p:txBody>
-      </p:sp>
-      <p:sp>
-        <p:nvSpPr>
-          <p:cNvPr id="21" name="Rectangle 20"/>
-          <p:cNvSpPr/>
-          <p:nvPr/>
-        </p:nvSpPr>
-        <p:spPr>
-          <a:xfrm>
-            <a:off x="9098051" y="2103120"/>
-            <a:ext cx="2453563" cy="109728"/>
-          </a:xfrm>
-          <a:prstGeom prst="rect">
-            <a:avLst/>
-          </a:prstGeom>
-          <a:solidFill>
-            <a:srgbClr val="2F5597"/>
-          </a:solidFill>
-          <a:ln>
-            <a:noFill/>
-          </a:ln>
-          <a:effectLst/>
-        </p:spPr>
-        <p:style>
-          <a:lnRef idx="1">
-            <a:schemeClr val="accent1"/>
-          </a:lnRef>
-          <a:fillRef idx="3">
-            <a:schemeClr val="accent1"/>
-          </a:fillRef>
-          <a:effectRef idx="2">
-            <a:schemeClr val="accent1"/>
-          </a:effectRef>
-          <a:fontRef idx="minor">
-            <a:schemeClr val="lt1"/>
-          </a:fontRef>
-        </p:style>
-        <p:txBody>
-          <a:bodyPr rtlCol="0" anchor="ctr"/>
-          <a:lstStyle/>
-          <a:p>
-            <a:pPr algn="ctr"/>
-          </a:p>
-        </p:txBody>
-      </p:sp>
-      <p:sp>
-        <p:nvSpPr>
-          <p:cNvPr id="22" name="TextBox 21"/>
-          <p:cNvSpPr txBox="1"/>
-          <p:nvPr/>
-        </p:nvSpPr>
-        <p:spPr>
-          <a:xfrm>
-            <a:off x="9098051" y="2560320"/>
-            <a:ext cx="2453563" cy="1005840"/>
-          </a:xfrm>
-          <a:prstGeom prst="rect">
-            <a:avLst/>
-          </a:prstGeom>
-          <a:noFill/>
-        </p:spPr>
-        <p:txBody>
-          <a:bodyPr wrap="square" anchor="t" lIns="0" rIns="0" tIns="0" bIns="0">
-            <a:spAutoFit/>
-          </a:bodyPr>
-          <a:lstStyle/>
-          <a:p>
-            <a:pPr algn="ctr">
-              <a:lnSpc>
-                <a:spcPct val="105000"/>
-              </a:lnSpc>
-            </a:pPr>
-            <a:r>
-              <a:rPr sz="4800" b="1" i="0">
-                <a:solidFill>
-                  <a:srgbClr val="111111"/>
-                </a:solidFill>
-                <a:latin typeface="Calibri"/>
-              </a:rPr>
-              <a:t>250명+</a:t>
-            </a:r>
-          </a:p>
-        </p:txBody>
-      </p:sp>
-      <p:sp>
-        <p:nvSpPr>
-          <p:cNvPr id="23" name="TextBox 22"/>
-          <p:cNvSpPr txBox="1"/>
-          <p:nvPr/>
-        </p:nvSpPr>
-        <p:spPr>
-          <a:xfrm>
-            <a:off x="9098051" y="3611880"/>
-            <a:ext cx="2453563" cy="457200"/>
-          </a:xfrm>
-          <a:prstGeom prst="rect">
-            <a:avLst/>
-          </a:prstGeom>
-          <a:noFill/>
-        </p:spPr>
-        <p:txBody>
-          <a:bodyPr wrap="square" anchor="t" lIns="0" rIns="0" tIns="0" bIns="0">
-            <a:spAutoFit/>
-          </a:bodyPr>
-          <a:lstStyle/>
-          <a:p>
-            <a:pPr algn="ctr">
-              <a:lnSpc>
-                <a:spcPct val="105000"/>
-              </a:lnSpc>
-            </a:pPr>
-            <a:r>
-              <a:rPr sz="2200" b="1" i="0">
-                <a:solidFill>
-                  <a:srgbClr val="1A1A1A"/>
-                </a:solidFill>
-                <a:latin typeface="Calibri"/>
-              </a:rPr>
-              <a:t>검증 데이터</a:t>
-            </a:r>
-          </a:p>
-        </p:txBody>
-      </p:sp>
-      <p:sp>
-        <p:nvSpPr>
-          <p:cNvPr id="24" name="TextBox 23"/>
-          <p:cNvSpPr txBox="1"/>
-          <p:nvPr/>
-        </p:nvSpPr>
-        <p:spPr>
-          <a:xfrm>
-            <a:off x="9280931" y="4023360"/>
-            <a:ext cx="2087803" cy="548640"/>
-          </a:xfrm>
-          <a:prstGeom prst="rect">
-            <a:avLst/>
-          </a:prstGeom>
-          <a:noFill/>
-        </p:spPr>
-        <p:txBody>
-          <a:bodyPr wrap="square" anchor="t" lIns="0" rIns="0" tIns="0" bIns="0">
-            <a:spAutoFit/>
-          </a:bodyPr>
-          <a:lstStyle/>
-          <a:p>
-            <a:pPr algn="ctr">
-              <a:lnSpc>
-                <a:spcPct val="100000"/>
-              </a:lnSpc>
-            </a:pPr>
-            <a:r>
-              <a:rPr sz="1200" b="0" i="0">
-                <a:solidFill>
-                  <a:srgbClr val="7F7F7F"/>
-                </a:solidFill>
-                <a:latin typeface="Calibri"/>
-              </a:rPr>
-              <a:t>다른 규모·문서 포함</a:t>
-            </a:r>
-          </a:p>
-        </p:txBody>
-      </p:sp>
-      <p:sp>
-        <p:nvSpPr>
-          <p:cNvPr id="25" name="TextBox 24"/>
-          <p:cNvSpPr txBox="1"/>
-          <p:nvPr/>
-        </p:nvSpPr>
-        <p:spPr>
-          <a:xfrm>
-            <a:off x="640080" y="6400800"/>
-            <a:ext cx="9997135" cy="274320"/>
-          </a:xfrm>
-          <a:prstGeom prst="rect">
-            <a:avLst/>
-          </a:prstGeom>
-          <a:noFill/>
-        </p:spPr>
-        <p:txBody>
-          <a:bodyPr wrap="square" anchor="t" lIns="0" rIns="0" tIns="0" bIns="0">
-            <a:spAutoFit/>
-          </a:bodyPr>
-          <a:lstStyle/>
-          <a:p>
-            <a:pPr algn="l">
-              <a:lnSpc>
-                <a:spcPct val="105000"/>
-              </a:lnSpc>
-            </a:pPr>
-            <a:r>
-              <a:rPr sz="1000" b="0" i="0">
-                <a:solidFill>
-                  <a:srgbClr val="7F7F7F"/>
-                </a:solidFill>
-                <a:latin typeface="Calibri"/>
-              </a:rPr>
-              <a:t>대외비 · Confidential · 인사팀 대상 설명자료</a:t>
-            </a:r>
-          </a:p>
-        </p:txBody>
-      </p:sp>
-      <p:sp>
-        <p:nvSpPr>
-          <p:cNvPr id="26" name="TextBox 25"/>
-          <p:cNvSpPr txBox="1"/>
-          <p:nvPr/>
-        </p:nvSpPr>
-        <p:spPr>
-          <a:xfrm>
-            <a:off x="10454335" y="6291072"/>
-            <a:ext cx="1097280" cy="384048"/>
-          </a:xfrm>
-          <a:prstGeom prst="rect">
-            <a:avLst/>
-          </a:prstGeom>
-          <a:noFill/>
-        </p:spPr>
-        <p:txBody>
-          <a:bodyPr wrap="square" anchor="t" lIns="0" rIns="0" tIns="0" bIns="0">
-            <a:spAutoFit/>
-          </a:bodyPr>
-          <a:lstStyle/>
-          <a:p>
-            <a:pPr algn="r">
-              <a:lnSpc>
-                <a:spcPct val="105000"/>
-              </a:lnSpc>
-            </a:pPr>
-            <a:r>
-              <a:rPr sz="1600" b="0" i="0">
-                <a:solidFill>
-                  <a:srgbClr val="7F7F7F"/>
-                </a:solidFill>
-                <a:latin typeface="Calibri"/>
-              </a:rPr>
-              <a:t>5</a:t>
-            </a:r>
-          </a:p>
-        </p:txBody>
-      </p:sp>
-      <p:sp>
-        <p:nvSpPr>
-          <p:cNvPr id="27" name="TextBox 26"/>
-          <p:cNvSpPr txBox="1"/>
-          <p:nvPr/>
-        </p:nvSpPr>
-        <p:spPr>
-          <a:xfrm>
-            <a:off x="8808415" y="182880"/>
-            <a:ext cx="2743200" cy="548640"/>
-          </a:xfrm>
-          <a:prstGeom prst="rect">
-            <a:avLst/>
-          </a:prstGeom>
-          <a:noFill/>
-        </p:spPr>
-        <p:txBody>
-          <a:bodyPr wrap="square" anchor="t" lIns="0" rIns="0" tIns="0" bIns="0">
-            <a:spAutoFit/>
-          </a:bodyPr>
-          <a:lstStyle/>
-          <a:p>
-            <a:pPr algn="r">
-              <a:lnSpc>
-                <a:spcPct val="105000"/>
-              </a:lnSpc>
-            </a:pPr>
-            <a:r>
-              <a:rPr sz="1800" b="1" i="0">
-                <a:solidFill>
-                  <a:srgbClr val="FFFFFF"/>
-                </a:solidFill>
-                <a:latin typeface="Calibri"/>
-              </a:rPr>
-              <a:t>Confidential</a:t>
-            </a:r>
-          </a:p>
-        </p:txBody>
-      </p:sp>
-    </p:spTree>
-  </p:cSld>
-  <p:clrMapOvr>
-    <a:masterClrMapping/>
-  </p:clrMapOvr>
-</p:sld>
-</file>
-
-<file path=ppt/slides/slide6.xml><?xml version="1.0" encoding="utf-8"?>
-<p:sld xmlns:a="http://schemas.openxmlformats.org/drawingml/2006/main" xmlns:p="http://schemas.openxmlformats.org/presentationml/2006/main" xmlns:r="http://schemas.openxmlformats.org/officeDocument/2006/relationships">
-  <p:cSld>
-    <p:spTree>
-      <p:nvGrpSpPr>
-        <p:cNvPr id="1" name=""/>
-        <p:cNvGrpSpPr/>
-        <p:nvPr/>
-      </p:nvGrpSpPr>
-      <p:grpSpPr/>
-      <p:sp>
-        <p:nvSpPr>
-          <p:cNvPr id="2" name="Rectangle 1"/>
-          <p:cNvSpPr/>
-          <p:nvPr/>
-        </p:nvSpPr>
-        <p:spPr>
-          <a:xfrm>
-            <a:off x="0" y="0"/>
-            <a:ext cx="12191695" cy="914400"/>
-          </a:xfrm>
-          <a:prstGeom prst="rect">
-            <a:avLst/>
-          </a:prstGeom>
-          <a:solidFill>
-            <a:srgbClr val="111111"/>
-          </a:solidFill>
-          <a:ln>
-            <a:noFill/>
-          </a:ln>
-          <a:effectLst/>
-        </p:spPr>
-        <p:style>
-          <a:lnRef idx="1">
-            <a:schemeClr val="accent1"/>
-          </a:lnRef>
-          <a:fillRef idx="3">
-            <a:schemeClr val="accent1"/>
-          </a:fillRef>
-          <a:effectRef idx="2">
-            <a:schemeClr val="accent1"/>
-          </a:effectRef>
-          <a:fontRef idx="minor">
-            <a:schemeClr val="lt1"/>
-          </a:fontRef>
-        </p:style>
-        <p:txBody>
-          <a:bodyPr rtlCol="0" anchor="ctr"/>
-          <a:lstStyle/>
-          <a:p>
-            <a:pPr algn="ctr"/>
-          </a:p>
-        </p:txBody>
-      </p:sp>
-      <p:sp>
-        <p:nvSpPr>
-          <p:cNvPr id="3" name="TextBox 2"/>
-          <p:cNvSpPr txBox="1"/>
-          <p:nvPr/>
-        </p:nvSpPr>
-        <p:spPr>
-          <a:xfrm>
-            <a:off x="640080" y="118872"/>
-            <a:ext cx="8168335" cy="219456"/>
-          </a:xfrm>
-          <a:prstGeom prst="rect">
-            <a:avLst/>
-          </a:prstGeom>
-          <a:noFill/>
-        </p:spPr>
-        <p:txBody>
-          <a:bodyPr wrap="square" anchor="t" lIns="0" rIns="0" tIns="0" bIns="0">
-            <a:spAutoFit/>
-          </a:bodyPr>
-          <a:lstStyle/>
-          <a:p>
-            <a:pPr algn="l">
-              <a:lnSpc>
-                <a:spcPct val="105000"/>
-              </a:lnSpc>
-            </a:pPr>
-            <a:r>
-              <a:rPr sz="1100" b="1" i="0">
-                <a:solidFill>
-                  <a:srgbClr val="FFFFFF"/>
-                </a:solidFill>
-                <a:latin typeface="Calibri"/>
-              </a:rPr>
-              <a:t>기대 효과 · 유의점</a:t>
-            </a:r>
-          </a:p>
-        </p:txBody>
-      </p:sp>
-      <p:sp>
-        <p:nvSpPr>
-          <p:cNvPr id="4" name="TextBox 3"/>
-          <p:cNvSpPr txBox="1"/>
-          <p:nvPr/>
-        </p:nvSpPr>
-        <p:spPr>
-          <a:xfrm>
-            <a:off x="640080" y="347472"/>
-            <a:ext cx="8168335" cy="493776"/>
-          </a:xfrm>
-          <a:prstGeom prst="rect">
-            <a:avLst/>
-          </a:prstGeom>
-          <a:noFill/>
-        </p:spPr>
-        <p:txBody>
-          <a:bodyPr wrap="square" anchor="t" lIns="0" rIns="0" tIns="0" bIns="0">
-            <a:spAutoFit/>
-          </a:bodyPr>
-          <a:lstStyle/>
-          <a:p>
-            <a:pPr algn="l">
-              <a:lnSpc>
-                <a:spcPct val="105000"/>
-              </a:lnSpc>
-            </a:pPr>
-            <a:r>
-              <a:rPr sz="3000" b="1" i="0">
-                <a:solidFill>
-                  <a:srgbClr val="FFFFFF"/>
-                </a:solidFill>
-                <a:latin typeface="Calibri"/>
-              </a:rPr>
-              <a:t>인사팀에게 좋은 점, 그리고 알아둘 점</a:t>
-            </a:r>
-          </a:p>
-        </p:txBody>
-      </p:sp>
-      <p:sp>
-        <p:nvSpPr>
-          <p:cNvPr id="5" name="TextBox 4"/>
-          <p:cNvSpPr txBox="1"/>
-          <p:nvPr/>
-        </p:nvSpPr>
-        <p:spPr>
-          <a:xfrm>
-            <a:off x="640080" y="1554480"/>
-            <a:ext cx="10911535" cy="640080"/>
-          </a:xfrm>
-          <a:prstGeom prst="rect">
-            <a:avLst/>
-          </a:prstGeom>
-          <a:noFill/>
-        </p:spPr>
-        <p:txBody>
-          <a:bodyPr wrap="square" anchor="t" lIns="0" rIns="0" tIns="0" bIns="0">
-            <a:spAutoFit/>
-          </a:bodyPr>
-          <a:lstStyle/>
-          <a:p>
-            <a:pPr algn="l">
-              <a:lnSpc>
-                <a:spcPct val="110000"/>
-              </a:lnSpc>
-            </a:pPr>
-            <a:r>
-              <a:rPr sz="2400" b="0" i="1">
-                <a:solidFill>
-                  <a:srgbClr val="595959"/>
-                </a:solidFill>
-                <a:latin typeface="Calibri"/>
-              </a:rPr>
-              <a:t>평소처럼 일하되, 신원은 가려진 채로.</a:t>
-            </a:r>
-          </a:p>
-        </p:txBody>
-      </p:sp>
-      <p:sp>
-        <p:nvSpPr>
-          <p:cNvPr id="6" name="TextBox 5"/>
-          <p:cNvSpPr txBox="1"/>
-          <p:nvPr/>
-        </p:nvSpPr>
-        <p:spPr>
-          <a:xfrm>
-            <a:off x="640080" y="2286000"/>
-            <a:ext cx="10911535" cy="3931920"/>
-          </a:xfrm>
-          <a:prstGeom prst="rect">
-            <a:avLst/>
-          </a:prstGeom>
-          <a:noFill/>
-        </p:spPr>
-        <p:txBody>
-          <a:bodyPr wrap="square" anchor="t" lIns="0" rIns="0" tIns="0" bIns="0">
-            <a:spAutoFit/>
-          </a:bodyPr>
-          <a:lstStyle/>
-          <a:p>
-            <a:pPr algn="l">
-              <a:lnSpc>
-                <a:spcPct val="110000"/>
-              </a:lnSpc>
-              <a:spcAft>
-                <a:spcPts val="1000"/>
-              </a:spcAft>
-            </a:pPr>
-            <a:r>
-              <a:rPr sz="2200" b="1" i="0">
-                <a:solidFill>
-                  <a:srgbClr val="1A1A1A"/>
-                </a:solidFill>
-                <a:latin typeface="Calibri"/>
-              </a:rPr>
-              <a:t>●  안전 — 식별자 AI 노출 0건 · 통계 가능 — 연봉·근태가 원본</a:t>
-            </a:r>
-          </a:p>
-          <a:p>
-            <a:pPr algn="l">
-              <a:lnSpc>
-                <a:spcPct val="110000"/>
-              </a:lnSpc>
-              <a:spcAft>
-                <a:spcPts val="1000"/>
-              </a:spcAft>
-            </a:pPr>
-            <a:r>
-              <a:rPr sz="2200" b="0" i="0">
-                <a:solidFill>
-                  <a:srgbClr val="1A1A1A"/>
-                </a:solidFill>
-                <a:latin typeface="Calibri"/>
-              </a:rPr>
-              <a:t>●  간편 — 키 없이 '비식별화 → 재식별' 두 단계 · 문서(.txt/.md)도 지원</a:t>
-            </a:r>
-          </a:p>
-          <a:p>
-            <a:pPr algn="l">
-              <a:lnSpc>
-                <a:spcPct val="110000"/>
-              </a:lnSpc>
-              <a:spcAft>
-                <a:spcPts val="1000"/>
-              </a:spcAft>
-            </a:pPr>
-            <a:r>
-              <a:rPr sz="2200" b="0" i="0">
-                <a:solidFill>
-                  <a:srgbClr val="1A1A1A"/>
-                </a:solidFill>
-                <a:latin typeface="Calibri"/>
-              </a:rPr>
-              <a:t>●  유의 — 숫자 값은 (이름과 분리된 채) 보입니다; 개별 숫자도 숨겨야 하면 집계값만 전달</a:t>
-            </a:r>
-          </a:p>
-          <a:p>
-            <a:pPr algn="l">
-              <a:lnSpc>
-                <a:spcPct val="110000"/>
-              </a:lnSpc>
-              <a:spcAft>
-                <a:spcPts val="1000"/>
-              </a:spcAft>
-            </a:pPr>
-            <a:r>
-              <a:rPr sz="2200" b="0" i="0">
-                <a:solidFill>
-                  <a:srgbClr val="1A1A1A"/>
-                </a:solidFill>
-                <a:latin typeface="Calibri"/>
-              </a:rPr>
-              <a:t>●  유의 — 복원 대응표(map)는 평문이라 원본처럼 안전 보관 필요</a:t>
-            </a:r>
-          </a:p>
-        </p:txBody>
-      </p:sp>
-      <p:sp>
-        <p:nvSpPr>
-          <p:cNvPr id="7" name="TextBox 6"/>
-          <p:cNvSpPr txBox="1"/>
-          <p:nvPr/>
-        </p:nvSpPr>
-        <p:spPr>
-          <a:xfrm>
-            <a:off x="640080" y="6400800"/>
-            <a:ext cx="9997135" cy="274320"/>
-          </a:xfrm>
-          <a:prstGeom prst="rect">
-            <a:avLst/>
-          </a:prstGeom>
-          <a:noFill/>
-        </p:spPr>
-        <p:txBody>
-          <a:bodyPr wrap="square" anchor="t" lIns="0" rIns="0" tIns="0" bIns="0">
-            <a:spAutoFit/>
-          </a:bodyPr>
-          <a:lstStyle/>
-          <a:p>
-            <a:pPr algn="l">
-              <a:lnSpc>
-                <a:spcPct val="105000"/>
-              </a:lnSpc>
-            </a:pPr>
-            <a:r>
-              <a:rPr sz="1000" b="0" i="0">
-                <a:solidFill>
-                  <a:srgbClr val="7F7F7F"/>
-                </a:solidFill>
-                <a:latin typeface="Calibri"/>
-              </a:rPr>
-              <a:t>대외비 · Confidential · 인사팀 대상 설명자료</a:t>
-            </a:r>
-          </a:p>
-        </p:txBody>
-      </p:sp>
-      <p:sp>
-        <p:nvSpPr>
-          <p:cNvPr id="8" name="TextBox 7"/>
-          <p:cNvSpPr txBox="1"/>
-          <p:nvPr/>
-        </p:nvSpPr>
-        <p:spPr>
-          <a:xfrm>
-            <a:off x="10454335" y="6291072"/>
-            <a:ext cx="1097280" cy="384048"/>
-          </a:xfrm>
-          <a:prstGeom prst="rect">
-            <a:avLst/>
-          </a:prstGeom>
-          <a:noFill/>
-        </p:spPr>
-        <p:txBody>
-          <a:bodyPr wrap="square" anchor="t" lIns="0" rIns="0" tIns="0" bIns="0">
-            <a:spAutoFit/>
-          </a:bodyPr>
-          <a:lstStyle/>
-          <a:p>
-            <a:pPr algn="r">
-              <a:lnSpc>
-                <a:spcPct val="105000"/>
-              </a:lnSpc>
-            </a:pPr>
-            <a:r>
-              <a:rPr sz="1600" b="0" i="0">
-                <a:solidFill>
-                  <a:srgbClr val="7F7F7F"/>
-                </a:solidFill>
-                <a:latin typeface="Calibri"/>
-              </a:rPr>
-              <a:t>6</a:t>
-            </a:r>
-          </a:p>
-        </p:txBody>
-      </p:sp>
-      <p:sp>
-        <p:nvSpPr>
-          <p:cNvPr id="9" name="TextBox 8"/>
-          <p:cNvSpPr txBox="1"/>
-          <p:nvPr/>
-        </p:nvSpPr>
-        <p:spPr>
-          <a:xfrm>
-            <a:off x="8808415" y="182880"/>
-            <a:ext cx="2743200" cy="548640"/>
-          </a:xfrm>
-          <a:prstGeom prst="rect">
-            <a:avLst/>
-          </a:prstGeom>
-          <a:noFill/>
-        </p:spPr>
-        <p:txBody>
-          <a:bodyPr wrap="square" anchor="t" lIns="0" rIns="0" tIns="0" bIns="0">
-            <a:spAutoFit/>
-          </a:bodyPr>
-          <a:lstStyle/>
-          <a:p>
-            <a:pPr algn="r">
-              <a:lnSpc>
-                <a:spcPct val="105000"/>
-              </a:lnSpc>
-            </a:pPr>
-            <a:r>
-              <a:rPr sz="1800" b="1" i="0">
-                <a:solidFill>
-                  <a:srgbClr val="FFFFFF"/>
-                </a:solidFill>
-                <a:latin typeface="Calibri"/>
-              </a:rPr>
-              <a:t>Confidential</a:t>
-            </a:r>
-          </a:p>
-        </p:txBody>
-      </p:sp>
-    </p:spTree>
-  </p:cSld>
-  <p:clrMapOvr>
-    <a:masterClrMapping/>
-  </p:clrMapOvr>
-</p:sld>
-</file>
-
-<file path=ppt/slides/slide7.xml><?xml version="1.0" encoding="utf-8"?>
-<p:sld xmlns:a="http://schemas.openxmlformats.org/drawingml/2006/main" xmlns:p="http://schemas.openxmlformats.org/presentationml/2006/main" xmlns:r="http://schemas.openxmlformats.org/officeDocument/2006/relationships">
-  <p:cSld>
-    <p:spTree>
-      <p:nvGrpSpPr>
-        <p:cNvPr id="1" name=""/>
-        <p:cNvGrpSpPr/>
-        <p:nvPr/>
-      </p:nvGrpSpPr>
-      <p:grpSpPr/>
-      <p:sp>
-        <p:nvSpPr>
-          <p:cNvPr id="2" name="Rectangle 1"/>
-          <p:cNvSpPr/>
-          <p:nvPr/>
-        </p:nvSpPr>
-        <p:spPr>
-          <a:xfrm>
-            <a:off x="0" y="0"/>
-            <a:ext cx="12191695" cy="6858000"/>
-          </a:xfrm>
-          <a:prstGeom prst="rect">
-            <a:avLst/>
-          </a:prstGeom>
-          <a:solidFill>
-            <a:srgbClr val="111111"/>
-          </a:solidFill>
-          <a:ln>
-            <a:noFill/>
-          </a:ln>
-          <a:effectLst/>
-        </p:spPr>
-        <p:style>
-          <a:lnRef idx="1">
-            <a:schemeClr val="accent1"/>
-          </a:lnRef>
-          <a:fillRef idx="3">
-            <a:schemeClr val="accent1"/>
-          </a:fillRef>
-          <a:effectRef idx="2">
-            <a:schemeClr val="accent1"/>
-          </a:effectRef>
-          <a:fontRef idx="minor">
-            <a:schemeClr val="lt1"/>
-          </a:fontRef>
-        </p:style>
-        <p:txBody>
-          <a:bodyPr rtlCol="0" anchor="ctr"/>
-          <a:lstStyle/>
-          <a:p>
-            <a:pPr algn="ctr"/>
-          </a:p>
-        </p:txBody>
-      </p:sp>
-      <p:sp>
-        <p:nvSpPr>
-          <p:cNvPr id="3" name="Rectangle 2"/>
-          <p:cNvSpPr/>
-          <p:nvPr/>
-        </p:nvSpPr>
-        <p:spPr>
-          <a:xfrm>
-            <a:off x="0" y="6492240"/>
-            <a:ext cx="12191695" cy="365760"/>
-          </a:xfrm>
-          <a:prstGeom prst="rect">
-            <a:avLst/>
-          </a:prstGeom>
-          <a:solidFill>
-            <a:srgbClr val="2F5597"/>
-          </a:solidFill>
-          <a:ln>
-            <a:noFill/>
-          </a:ln>
-          <a:effectLst/>
-        </p:spPr>
-        <p:style>
-          <a:lnRef idx="1">
-            <a:schemeClr val="accent1"/>
-          </a:lnRef>
-          <a:fillRef idx="3">
-            <a:schemeClr val="accent1"/>
-          </a:fillRef>
-          <a:effectRef idx="2">
-            <a:schemeClr val="accent1"/>
-          </a:effectRef>
-          <a:fontRef idx="minor">
-            <a:schemeClr val="lt1"/>
-          </a:fontRef>
-        </p:style>
-        <p:txBody>
-          <a:bodyPr rtlCol="0" anchor="ctr"/>
-          <a:lstStyle/>
-          <a:p>
-            <a:pPr algn="ctr"/>
-          </a:p>
-        </p:txBody>
-      </p:sp>
-      <p:sp>
-        <p:nvSpPr>
-          <p:cNvPr id="4" name="TextBox 3"/>
-          <p:cNvSpPr txBox="1"/>
-          <p:nvPr/>
-        </p:nvSpPr>
-        <p:spPr>
-          <a:xfrm>
-            <a:off x="640080" y="2377440"/>
-            <a:ext cx="10911535" cy="1463040"/>
-          </a:xfrm>
-          <a:prstGeom prst="rect">
-            <a:avLst/>
-          </a:prstGeom>
-          <a:noFill/>
-        </p:spPr>
-        <p:txBody>
-          <a:bodyPr wrap="square" anchor="t" lIns="0" rIns="0" tIns="0" bIns="0">
-            <a:spAutoFit/>
-          </a:bodyPr>
-          <a:lstStyle/>
-          <a:p>
-            <a:pPr algn="ctr">
-              <a:lnSpc>
-                <a:spcPct val="105000"/>
-              </a:lnSpc>
-            </a:pPr>
-            <a:r>
-              <a:rPr sz="5000" b="1" i="0">
-                <a:solidFill>
-                  <a:srgbClr val="FFFFFF"/>
-                </a:solidFill>
-                <a:latin typeface="Calibri"/>
-              </a:rPr>
-              <a:t>시작하기</a:t>
+              <a:t>도입 안내</a:t>
             </a:r>
           </a:p>
         </p:txBody>
@@ -6602,7 +5128,7 @@
                 </a:solidFill>
                 <a:latin typeface="Calibri"/>
               </a:rPr>
-              <a:t>담당자 키·도입 방법은 데이터보호 담당 부서로 문의해 주세요 · 데이터는 모두 합성(가상) 예시</a:t>
+              <a:t>도입·키 발급은 데이터보호 담당 부서로 문의 · 데이터는 합성 예시</a:t>
             </a:r>
           </a:p>
         </p:txBody>
